--- a/AdTech_Budget_2027.pptx
+++ b/AdTech_Budget_2027.pptx
@@ -9,6 +9,7 @@
   </p:notesMasterIdLst>
   <p:sldIdLst>
     <p:sldId id="289" r:id="rId5"/>
+    <p:sldId id="293" r:id="rId15"/>
     <p:sldId id="292" r:id="rId14"/>
     <p:sldId id="291" r:id="rId13"/>
     <p:sldId id="290" r:id="rId12"/>
@@ -43961,6 +43962,9669 @@
                     </a:p>
                   </a:txBody>
                   <a:tcPr marL="72000" marR="36000" marT="18000" marB="18000" anchor="ctr">
+                    <a:lnL>
+                      <a:noFill/>
+                    </a:lnL>
+                    <a:lnR w="12700">
+                      <a:solidFill>
+                        <a:schemeClr val="bg1">
+                          <a:lumMod val="50000"/>
+                        </a:schemeClr>
+                      </a:solidFill>
+                      <a:prstDash val="solid"/>
+                    </a:lnR>
+                    <a:lnT w="12700">
+                      <a:solidFill>
+                        <a:schemeClr val="bg1">
+                          <a:lumMod val="50000"/>
+                        </a:schemeClr>
+                      </a:solidFill>
+                      <a:prstDash val="solid"/>
+                    </a:lnT>
+                    <a:lnB w="12700">
+                      <a:solidFill>
+                        <a:schemeClr val="bg1">
+                          <a:lumMod val="50000"/>
+                        </a:schemeClr>
+                      </a:solidFill>
+                      <a:prstDash val="solid"/>
+                    </a:lnB>
+                    <a:noFill/>
+                  </a:tcPr>
+                </a:tc>
+              </a:tr>
+            </a:tbl>
+          </a:graphicData>
+        </a:graphic>
+      </p:graphicFrame>
+    </p:spTree>
+    <p:extLst>
+      <p:ext uri="{BB962C8B-B14F-4D97-AF65-F5344CB8AC3E}">
+        <p14:creationId xmlns:p14="http://schemas.microsoft.com/office/powerpoint/2010/main" val="1650885464"/>
+      </p:ext>
+    </p:extLst>
+  </p:cSld>
+  <p:clrMapOvr>
+    <a:masterClrMapping/>
+  </p:clrMapOvr>
+</p:sld>
+</file>
+
+<file path=ppt/slides/slide6.xml><?xml version="1.0" encoding="utf-8"?>
+<p:sld xmlns:a="http://schemas.openxmlformats.org/drawingml/2006/main" xmlns:r="http://schemas.openxmlformats.org/officeDocument/2006/relationships" xmlns:p="http://schemas.openxmlformats.org/presentationml/2006/main">
+  <p:cSld>
+    <p:spTree>
+      <p:nvGrpSpPr>
+        <p:cNvPr id="1" name=""/>
+        <p:cNvGrpSpPr/>
+        <p:nvPr/>
+      </p:nvGrpSpPr>
+      <p:grpSpPr>
+        <a:xfrm>
+          <a:off x="0" y="0"/>
+          <a:ext cx="0" cy="0"/>
+          <a:chOff x="0" y="0"/>
+          <a:chExt cx="0" cy="0"/>
+        </a:xfrm>
+      </p:grpSpPr>
+      <p:graphicFrame>
+        <p:nvGraphicFramePr>
+          <p:cNvPr id="6" name="think-cell data - do not delete" hidden="1"/>
+          <p:cNvGraphicFramePr>
+            <a:graphicFrameLocks noChangeAspect="1"/>
+          </p:cNvGraphicFramePr>
+          <p:nvPr>
+            <p:custDataLst>
+              <p:tags r:id="rId1"/>
+            </p:custDataLst>
+          </p:nvPr>
+        </p:nvGraphicFramePr>
+        <p:xfrm>
+          <a:off x="364175" y="829165"/>
+          <a:ext cx="1588" cy="1588"/>
+        </p:xfrm>
+        <a:graphic>
+          <a:graphicData uri="http://schemas.openxmlformats.org/presentationml/2006/ole">
+            <mc:AlternateContent xmlns:mc="http://schemas.openxmlformats.org/markup-compatibility/2006">
+              <mc:Choice xmlns:v="urn:schemas-microsoft-com:vml" Requires="v">
+                <p:oleObj name="Слайд think-cell" r:id="rId4" imgW="425" imgH="424" progId="TCLayout.ActiveDocument.1">
+                  <p:embed/>
+                </p:oleObj>
+              </mc:Choice>
+              <mc:Fallback>
+                <p:oleObj name="Слайд think-cell" r:id="rId4" imgW="425" imgH="424" progId="TCLayout.ActiveDocument.1">
+                  <p:embed/>
+                  <p:pic>
+                    <p:nvPicPr>
+                      <p:cNvPr id="6" name="think-cell data - do not delete" hidden="1"/>
+                      <p:cNvPicPr/>
+                      <p:nvPr/>
+                    </p:nvPicPr>
+                    <p:blipFill>
+                      <a:blip r:embed="rId5"/>
+                      <a:stretch>
+                        <a:fillRect/>
+                      </a:stretch>
+                    </p:blipFill>
+                    <p:spPr>
+                      <a:xfrm>
+                        <a:off x="364175" y="829165"/>
+                        <a:ext cx="1588" cy="1588"/>
+                      </a:xfrm>
+                      <a:prstGeom prst="rect">
+                        <a:avLst/>
+                      </a:prstGeom>
+                    </p:spPr>
+                  </p:pic>
+                </p:oleObj>
+              </mc:Fallback>
+            </mc:AlternateContent>
+          </a:graphicData>
+        </a:graphic>
+      </p:graphicFrame>
+      <p:sp>
+        <p:nvSpPr>
+          <p:cNvPr id="3" name="Текст 2"/>
+          <p:cNvSpPr>
+            <a:spLocks noGrp="1"/>
+          </p:cNvSpPr>
+          <p:nvPr>
+            <p:ph type="body" sz="quarter" idx="17"/>
+          </p:nvPr>
+        </p:nvSpPr>
+        <p:spPr>
+          <a:xfrm>
+            <a:off x="1619251" y="6317712"/>
+            <a:ext cx="9277350" cy="433083"/>
+          </a:xfrm>
+        </p:spPr>
+        <p:txBody>
+          <a:bodyPr/>
+          <a:lstStyle/>
+          <a:p>
+            <a:r>
+              <a:rPr lang="ru-RU" dirty="0"/>
+              <a:t>* - 2026 Прогноз — модель бюджета (cons 10.09); форматы — лист «P&amp;L 2027_Formats» (Instore и Online DMP — по факту 8 мес. 2026 с корр.)</a:t>
+            </a:r>
+            <a:br>
+              <a:rPr lang="ru-RU" dirty="0"/>
+            </a:br>
+            <a:r>
+              <a:rPr lang="ru-RU" dirty="0"/>
+              <a:t>** - Incremental Revenue — прирост к прогнозу 2026 (вид для консолидации); стратегия по форматам не задана (кроме E-commerce = APP); «+» — улучшение</a:t>
+            </a:r>
+          </a:p>
+        </p:txBody>
+      </p:sp>
+      <p:sp>
+        <p:nvSpPr>
+          <p:cNvPr id="4" name="Номер слайда 3"/>
+          <p:cNvSpPr>
+            <a:spLocks noGrp="1"/>
+          </p:cNvSpPr>
+          <p:nvPr>
+            <p:ph type="sldNum" sz="quarter" idx="4"/>
+          </p:nvPr>
+        </p:nvSpPr>
+        <p:spPr/>
+        <p:txBody>
+          <a:bodyPr/>
+          <a:lstStyle/>
+          <a:p>
+            <a:fld id="{527D41D6-7756-D84E-A787-9DAD2BF0F149}" type="slidenum">
+              <a:rPr lang="ru-RU" smtClean="0"/>
+              <a:pPr/>
+              <a:t>1</a:t>
+            </a:fld>
+            <a:endParaRPr lang="ru-RU" dirty="0"/>
+          </a:p>
+        </p:txBody>
+      </p:sp>
+      <p:sp>
+        <p:nvSpPr>
+          <p:cNvPr id="5" name="Текст 4"/>
+          <p:cNvSpPr>
+            <a:spLocks noGrp="1"/>
+          </p:cNvSpPr>
+          <p:nvPr>
+            <p:ph type="body" sz="quarter" idx="10"/>
+          </p:nvPr>
+        </p:nvSpPr>
+        <p:spPr>
+          <a:xfrm>
+            <a:off x="364175" y="225093"/>
+            <a:ext cx="11463650" cy="343867"/>
+          </a:xfrm>
+        </p:spPr>
+        <p:txBody>
+          <a:bodyPr/>
+          <a:lstStyle/>
+          <a:p>
+            <a:r>
+              <a:rPr lang="en-US" dirty="0">
+                <a:solidFill>
+                  <a:srgbClr val="FF0000"/>
+                </a:solidFill>
+              </a:rPr>
+              <a:t>OMNI KPI Summary. AdTech: </a:t>
+            </a:r>
+            <a:r>
+              <a:rPr lang="ru-RU" dirty="0"/>
+              <a:t>Бюджет 2027 — выручка по форматам</a:t>
+            </a:r>
+            <a:endParaRPr lang="en-US" dirty="0"/>
+          </a:p>
+        </p:txBody>
+      </p:sp>
+      <p:graphicFrame>
+        <p:nvGraphicFramePr>
+          <p:cNvPr id="8" name="Таблица 7"/>
+          <p:cNvGraphicFramePr>
+            <a:graphicFrameLocks noGrp="1"/>
+          </p:cNvGraphicFramePr>
+          <p:nvPr>
+            <p:extLst>
+              <p:ext uri="{D42A27DB-BD31-4B8C-83A1-F6EECF244321}">
+                <p14:modId xmlns:p14="http://schemas.microsoft.com/office/powerpoint/2010/main" val="2534462825"/>
+              </p:ext>
+            </p:extLst>
+          </p:nvPr>
+        </p:nvGraphicFramePr>
+        <p:xfrm>
+          <a:off x="364175" y="829165"/>
+          <a:ext cx="11260000" cy="5205000"/>
+        </p:xfrm>
+        <a:graphic>
+          <a:graphicData uri="http://schemas.openxmlformats.org/drawingml/2006/table">
+            <a:tbl>
+              <a:tblPr firstRow="1"/>
+              <a:tblGrid>
+                <a:gridCol w="2300000"/>
+                <a:gridCol w="700000"/>
+                <a:gridCol w="700000"/>
+                <a:gridCol w="580000"/>
+                <a:gridCol w="700000"/>
+                <a:gridCol w="780000"/>
+                <a:gridCol w="780000"/>
+                <a:gridCol w="2300000"/>
+                <a:gridCol w="120000"/>
+                <a:gridCol w="575000"/>
+                <a:gridCol w="575000"/>
+                <a:gridCol w="575000"/>
+                <a:gridCol w="575000"/>
+              </a:tblGrid>
+              <a:tr h="480000">
+                <a:tc>
+                  <a:txBody>
+                    <a:bodyPr/>
+                    <a:lstStyle/>
+                    <a:p>
+                      <a:pPr algn="ctr"/>
+                      <a:r>
+                        <a:rPr lang="ru-RU" sz="1000" b="1" i="0" dirty="0">
+                          <a:solidFill>
+                            <a:srgbClr val="FFFFFF"/>
+                          </a:solidFill>
+                          <a:latin typeface="Arial"/>
+                        </a:rPr>
+                        <a:t>КПЭ (выручка по форматам), млн руб.</a:t>
+                      </a:r>
+                    </a:p>
+                  </a:txBody>
+                  <a:tcPr marL="36000" marR="36000" marT="18000" marB="18000" anchor="ctr">
+                    <a:lnL w="12700">
+                      <a:solidFill>
+                        <a:schemeClr val="bg1">
+                          <a:lumMod val="50000"/>
+                        </a:schemeClr>
+                      </a:solidFill>
+                      <a:prstDash val="solid"/>
+                    </a:lnL>
+                    <a:lnR>
+                      <a:noFill/>
+                    </a:lnR>
+                    <a:lnT w="12700">
+                      <a:solidFill>
+                        <a:schemeClr val="bg1">
+                          <a:lumMod val="50000"/>
+                        </a:schemeClr>
+                      </a:solidFill>
+                      <a:prstDash val="solid"/>
+                    </a:lnT>
+                    <a:lnB w="12700">
+                      <a:solidFill>
+                        <a:schemeClr val="bg1">
+                          <a:lumMod val="50000"/>
+                        </a:schemeClr>
+                      </a:solidFill>
+                      <a:prstDash val="solid"/>
+                    </a:lnB>
+                    <a:solidFill>
+                      <a:srgbClr val="000000"/>
+                    </a:solidFill>
+                  </a:tcPr>
+                </a:tc>
+                <a:tc>
+                  <a:txBody>
+                    <a:bodyPr/>
+                    <a:lstStyle/>
+                    <a:p>
+                      <a:pPr algn="ctr"/>
+                      <a:r>
+                        <a:rPr lang="ru-RU" sz="1000" b="1" i="0" dirty="0">
+                          <a:solidFill>
+                            <a:srgbClr val="FFFFFF"/>
+                          </a:solidFill>
+                          <a:latin typeface="Arial"/>
+                        </a:rPr>
+                        <a:t>2027</a:t>
+                      </a:r>
+                    </a:p>
+                    <a:p>
+                      <a:pPr algn="ctr"/>
+                      <a:r>
+                        <a:rPr lang="ru-RU" sz="1000" b="1" i="0" dirty="0">
+                          <a:solidFill>
+                            <a:srgbClr val="FFFFFF"/>
+                          </a:solidFill>
+                          <a:latin typeface="Arial"/>
+                        </a:rPr>
+                        <a:t>Бюджет</a:t>
+                      </a:r>
+                    </a:p>
+                  </a:txBody>
+                  <a:tcPr marL="36000" marR="36000" marT="18000" marB="18000" anchor="ctr">
+                    <a:lnL>
+                      <a:noFill/>
+                    </a:lnL>
+                    <a:lnR>
+                      <a:noFill/>
+                    </a:lnR>
+                    <a:lnT w="12700">
+                      <a:solidFill>
+                        <a:schemeClr val="bg1">
+                          <a:lumMod val="50000"/>
+                        </a:schemeClr>
+                      </a:solidFill>
+                      <a:prstDash val="solid"/>
+                    </a:lnT>
+                    <a:lnB w="12700">
+                      <a:solidFill>
+                        <a:schemeClr val="bg1">
+                          <a:lumMod val="50000"/>
+                        </a:schemeClr>
+                      </a:solidFill>
+                      <a:prstDash val="solid"/>
+                    </a:lnB>
+                    <a:solidFill>
+                      <a:srgbClr val="000000"/>
+                    </a:solidFill>
+                  </a:tcPr>
+                </a:tc>
+                <a:tc>
+                  <a:txBody>
+                    <a:bodyPr/>
+                    <a:lstStyle/>
+                    <a:p>
+                      <a:pPr algn="ctr"/>
+                      <a:r>
+                        <a:rPr lang="ru-RU" sz="1000" b="1" i="0" dirty="0">
+                          <a:solidFill>
+                            <a:srgbClr val="FFFFFF"/>
+                          </a:solidFill>
+                          <a:latin typeface="Arial"/>
+                        </a:rPr>
+                        <a:t>2026</a:t>
+                      </a:r>
+                    </a:p>
+                    <a:p>
+                      <a:pPr algn="ctr"/>
+                      <a:r>
+                        <a:rPr lang="ru-RU" sz="1000" b="1" i="0" dirty="0">
+                          <a:solidFill>
+                            <a:srgbClr val="FFFFFF"/>
+                          </a:solidFill>
+                          <a:latin typeface="Arial"/>
+                        </a:rPr>
+                        <a:t>Прогноз*</a:t>
+                      </a:r>
+                    </a:p>
+                  </a:txBody>
+                  <a:tcPr marL="36000" marR="36000" marT="18000" marB="18000" anchor="ctr">
+                    <a:lnL>
+                      <a:noFill/>
+                    </a:lnL>
+                    <a:lnR>
+                      <a:noFill/>
+                    </a:lnR>
+                    <a:lnT w="12700">
+                      <a:solidFill>
+                        <a:schemeClr val="bg1">
+                          <a:lumMod val="50000"/>
+                        </a:schemeClr>
+                      </a:solidFill>
+                      <a:prstDash val="solid"/>
+                    </a:lnT>
+                    <a:lnB w="12700">
+                      <a:solidFill>
+                        <a:schemeClr val="bg1">
+                          <a:lumMod val="50000"/>
+                        </a:schemeClr>
+                      </a:solidFill>
+                      <a:prstDash val="solid"/>
+                    </a:lnB>
+                    <a:solidFill>
+                      <a:srgbClr val="000000"/>
+                    </a:solidFill>
+                  </a:tcPr>
+                </a:tc>
+                <a:tc>
+                  <a:txBody>
+                    <a:bodyPr/>
+                    <a:lstStyle/>
+                    <a:p>
+                      <a:pPr algn="ctr"/>
+                      <a:r>
+                        <a:rPr lang="ru-RU" sz="1000" b="1" i="0" dirty="0">
+                          <a:solidFill>
+                            <a:srgbClr val="FFFFFF"/>
+                          </a:solidFill>
+                          <a:latin typeface="Arial"/>
+                        </a:rPr>
+                        <a:t>Δ к</a:t>
+                      </a:r>
+                    </a:p>
+                    <a:p>
+                      <a:pPr algn="ctr"/>
+                      <a:r>
+                        <a:rPr lang="ru-RU" sz="1000" b="1" i="0" dirty="0">
+                          <a:solidFill>
+                            <a:srgbClr val="FFFFFF"/>
+                          </a:solidFill>
+                          <a:latin typeface="Arial"/>
+                        </a:rPr>
+                        <a:t>2026</a:t>
+                      </a:r>
+                    </a:p>
+                  </a:txBody>
+                  <a:tcPr marL="36000" marR="36000" marT="18000" marB="18000" anchor="ctr">
+                    <a:lnL>
+                      <a:noFill/>
+                    </a:lnL>
+                    <a:lnR>
+                      <a:noFill/>
+                    </a:lnR>
+                    <a:lnT w="12700">
+                      <a:solidFill>
+                        <a:schemeClr val="bg1">
+                          <a:lumMod val="50000"/>
+                        </a:schemeClr>
+                      </a:solidFill>
+                      <a:prstDash val="solid"/>
+                    </a:lnT>
+                    <a:lnB w="12700">
+                      <a:solidFill>
+                        <a:schemeClr val="bg1">
+                          <a:lumMod val="50000"/>
+                        </a:schemeClr>
+                      </a:solidFill>
+                      <a:prstDash val="solid"/>
+                    </a:lnB>
+                    <a:solidFill>
+                      <a:srgbClr val="000000"/>
+                    </a:solidFill>
+                  </a:tcPr>
+                </a:tc>
+                <a:tc>
+                  <a:txBody>
+                    <a:bodyPr/>
+                    <a:lstStyle/>
+                    <a:p>
+                      <a:pPr algn="ctr"/>
+                      <a:r>
+                        <a:rPr lang="ru-RU" sz="1000" b="1" i="0" dirty="0">
+                          <a:solidFill>
+                            <a:srgbClr val="FFFFFF"/>
+                          </a:solidFill>
+                          <a:latin typeface="Arial"/>
+                        </a:rPr>
+                        <a:t>YoY</a:t>
+                      </a:r>
+                    </a:p>
+                  </a:txBody>
+                  <a:tcPr marL="36000" marR="36000" marT="18000" marB="18000" anchor="ctr">
+                    <a:lnL>
+                      <a:noFill/>
+                    </a:lnL>
+                    <a:lnR>
+                      <a:noFill/>
+                    </a:lnR>
+                    <a:lnT w="12700">
+                      <a:solidFill>
+                        <a:schemeClr val="bg1">
+                          <a:lumMod val="50000"/>
+                        </a:schemeClr>
+                      </a:solidFill>
+                      <a:prstDash val="solid"/>
+                    </a:lnT>
+                    <a:lnB w="12700">
+                      <a:solidFill>
+                        <a:schemeClr val="bg1">
+                          <a:lumMod val="50000"/>
+                        </a:schemeClr>
+                      </a:solidFill>
+                      <a:prstDash val="solid"/>
+                    </a:lnB>
+                    <a:solidFill>
+                      <a:srgbClr val="000000"/>
+                    </a:solidFill>
+                  </a:tcPr>
+                </a:tc>
+                <a:tc>
+                  <a:txBody>
+                    <a:bodyPr/>
+                    <a:lstStyle/>
+                    <a:p>
+                      <a:pPr algn="ctr"/>
+                      <a:r>
+                        <a:rPr lang="ru-RU" sz="1000" b="1" i="0" dirty="0">
+                          <a:solidFill>
+                            <a:srgbClr val="FFFFFF"/>
+                          </a:solidFill>
+                          <a:latin typeface="Arial"/>
+                        </a:rPr>
+                        <a:t>2027</a:t>
+                      </a:r>
+                    </a:p>
+                    <a:p>
+                      <a:pPr algn="ctr"/>
+                      <a:r>
+                        <a:rPr lang="ru-RU" sz="1000" b="1" i="0" dirty="0">
+                          <a:solidFill>
+                            <a:srgbClr val="FFFFFF"/>
+                          </a:solidFill>
+                          <a:latin typeface="Arial"/>
+                        </a:rPr>
+                        <a:t>Стратегия</a:t>
+                      </a:r>
+                    </a:p>
+                  </a:txBody>
+                  <a:tcPr marL="36000" marR="36000" marT="18000" marB="18000" anchor="ctr">
+                    <a:lnL>
+                      <a:noFill/>
+                    </a:lnL>
+                    <a:lnR>
+                      <a:noFill/>
+                    </a:lnR>
+                    <a:lnT w="12700">
+                      <a:solidFill>
+                        <a:schemeClr val="bg1">
+                          <a:lumMod val="50000"/>
+                        </a:schemeClr>
+                      </a:solidFill>
+                      <a:prstDash val="solid"/>
+                    </a:lnT>
+                    <a:lnB w="12700">
+                      <a:solidFill>
+                        <a:schemeClr val="bg1">
+                          <a:lumMod val="50000"/>
+                        </a:schemeClr>
+                      </a:solidFill>
+                      <a:prstDash val="solid"/>
+                    </a:lnB>
+                    <a:solidFill>
+                      <a:srgbClr val="000000"/>
+                    </a:solidFill>
+                  </a:tcPr>
+                </a:tc>
+                <a:tc>
+                  <a:txBody>
+                    <a:bodyPr/>
+                    <a:lstStyle/>
+                    <a:p>
+                      <a:pPr algn="ctr"/>
+                      <a:r>
+                        <a:rPr lang="ru-RU" sz="1000" b="1" i="0" dirty="0">
+                          <a:solidFill>
+                            <a:srgbClr val="FFFFFF"/>
+                          </a:solidFill>
+                          <a:latin typeface="Arial"/>
+                        </a:rPr>
+                        <a:t>к</a:t>
+                      </a:r>
+                    </a:p>
+                    <a:p>
+                      <a:pPr algn="ctr"/>
+                      <a:r>
+                        <a:rPr lang="ru-RU" sz="1000" b="1" i="0" dirty="0">
+                          <a:solidFill>
+                            <a:srgbClr val="FFFFFF"/>
+                          </a:solidFill>
+                          <a:latin typeface="Arial"/>
+                        </a:rPr>
+                        <a:t>Стратегии</a:t>
+                      </a:r>
+                    </a:p>
+                  </a:txBody>
+                  <a:tcPr marL="36000" marR="36000" marT="18000" marB="18000" anchor="ctr">
+                    <a:lnL>
+                      <a:noFill/>
+                    </a:lnL>
+                    <a:lnR>
+                      <a:noFill/>
+                    </a:lnR>
+                    <a:lnT w="12700">
+                      <a:solidFill>
+                        <a:schemeClr val="bg1">
+                          <a:lumMod val="50000"/>
+                        </a:schemeClr>
+                      </a:solidFill>
+                      <a:prstDash val="solid"/>
+                    </a:lnT>
+                    <a:lnB w="12700">
+                      <a:solidFill>
+                        <a:schemeClr val="bg1">
+                          <a:lumMod val="50000"/>
+                        </a:schemeClr>
+                      </a:solidFill>
+                      <a:prstDash val="solid"/>
+                    </a:lnB>
+                    <a:solidFill>
+                      <a:srgbClr val="000000"/>
+                    </a:solidFill>
+                  </a:tcPr>
+                </a:tc>
+                <a:tc>
+                  <a:txBody>
+                    <a:bodyPr/>
+                    <a:lstStyle/>
+                    <a:p>
+                      <a:pPr algn="ctr"/>
+                      <a:r>
+                        <a:rPr lang="ru-RU" sz="1000" b="1" i="0" dirty="0">
+                          <a:solidFill>
+                            <a:srgbClr val="FFFFFF"/>
+                          </a:solidFill>
+                          <a:latin typeface="Arial"/>
+                        </a:rPr>
+                        <a:t>Комментарий</a:t>
+                      </a:r>
+                    </a:p>
+                  </a:txBody>
+                  <a:tcPr marL="36000" marR="36000" marT="18000" marB="18000" anchor="ctr">
+                    <a:lnL>
+                      <a:noFill/>
+                    </a:lnL>
+                    <a:lnR w="12700">
+                      <a:solidFill>
+                        <a:schemeClr val="bg1">
+                          <a:lumMod val="50000"/>
+                        </a:schemeClr>
+                      </a:solidFill>
+                      <a:prstDash val="solid"/>
+                    </a:lnR>
+                    <a:lnT w="12700">
+                      <a:solidFill>
+                        <a:schemeClr val="bg1">
+                          <a:lumMod val="50000"/>
+                        </a:schemeClr>
+                      </a:solidFill>
+                      <a:prstDash val="solid"/>
+                    </a:lnT>
+                    <a:lnB w="12700">
+                      <a:solidFill>
+                        <a:schemeClr val="bg1">
+                          <a:lumMod val="50000"/>
+                        </a:schemeClr>
+                      </a:solidFill>
+                      <a:prstDash val="solid"/>
+                    </a:lnB>
+                    <a:solidFill>
+                      <a:srgbClr val="000000"/>
+                    </a:solidFill>
+                  </a:tcPr>
+                </a:tc>
+                <a:tc>
+                  <a:txBody>
+                    <a:bodyPr/>
+                    <a:lstStyle/>
+                    <a:p>
+                      <a:endParaRPr lang="ru-RU" sz="1000" dirty="0"/>
+                    </a:p>
+                  </a:txBody>
+                  <a:tcPr>
+                    <a:lnL w="12700">
+                      <a:solidFill>
+                        <a:schemeClr val="bg1">
+                          <a:lumMod val="50000"/>
+                        </a:schemeClr>
+                      </a:solidFill>
+                      <a:prstDash val="solid"/>
+                    </a:lnL>
+                    <a:lnR>
+                      <a:noFill/>
+                    </a:lnR>
+                    <a:lnT>
+                      <a:noFill/>
+                    </a:lnT>
+                    <a:lnB>
+                      <a:noFill/>
+                    </a:lnB>
+                    <a:noFill/>
+                  </a:tcPr>
+                </a:tc>
+                <a:tc>
+                  <a:txBody>
+                    <a:bodyPr/>
+                    <a:lstStyle/>
+                    <a:p>
+                      <a:pPr algn="ctr"/>
+                      <a:r>
+                        <a:rPr lang="ru-RU" sz="1000" b="1" i="0" dirty="0">
+                          <a:solidFill>
+                            <a:srgbClr val="FFFFFF"/>
+                          </a:solidFill>
+                          <a:latin typeface="Arial"/>
+                        </a:rPr>
+                        <a:t>Q1</a:t>
+                      </a:r>
+                    </a:p>
+                    <a:p>
+                      <a:pPr algn="ctr"/>
+                      <a:r>
+                        <a:rPr lang="ru-RU" sz="1000" b="1" i="0" dirty="0">
+                          <a:solidFill>
+                            <a:srgbClr val="FFFFFF"/>
+                          </a:solidFill>
+                          <a:latin typeface="Arial"/>
+                        </a:rPr>
+                        <a:t>2027</a:t>
+                      </a:r>
+                    </a:p>
+                  </a:txBody>
+                  <a:tcPr marL="36000" marR="36000" marT="18000" marB="18000" anchor="ctr">
+                    <a:lnL w="12700">
+                      <a:solidFill>
+                        <a:schemeClr val="bg1">
+                          <a:lumMod val="50000"/>
+                        </a:schemeClr>
+                      </a:solidFill>
+                      <a:prstDash val="solid"/>
+                    </a:lnL>
+                    <a:lnR>
+                      <a:noFill/>
+                    </a:lnR>
+                    <a:lnT w="12700">
+                      <a:solidFill>
+                        <a:schemeClr val="bg1">
+                          <a:lumMod val="50000"/>
+                        </a:schemeClr>
+                      </a:solidFill>
+                      <a:prstDash val="solid"/>
+                    </a:lnT>
+                    <a:lnB w="12700">
+                      <a:solidFill>
+                        <a:schemeClr val="bg1">
+                          <a:lumMod val="50000"/>
+                        </a:schemeClr>
+                      </a:solidFill>
+                      <a:prstDash val="solid"/>
+                    </a:lnB>
+                    <a:solidFill>
+                      <a:srgbClr val="000000"/>
+                    </a:solidFill>
+                  </a:tcPr>
+                </a:tc>
+                <a:tc>
+                  <a:txBody>
+                    <a:bodyPr/>
+                    <a:lstStyle/>
+                    <a:p>
+                      <a:pPr algn="ctr"/>
+                      <a:r>
+                        <a:rPr lang="ru-RU" sz="1000" b="1" i="0" dirty="0">
+                          <a:solidFill>
+                            <a:srgbClr val="FFFFFF"/>
+                          </a:solidFill>
+                          <a:latin typeface="Arial"/>
+                        </a:rPr>
+                        <a:t>Q2</a:t>
+                      </a:r>
+                    </a:p>
+                    <a:p>
+                      <a:pPr algn="ctr"/>
+                      <a:r>
+                        <a:rPr lang="ru-RU" sz="1000" b="1" i="0" dirty="0">
+                          <a:solidFill>
+                            <a:srgbClr val="FFFFFF"/>
+                          </a:solidFill>
+                          <a:latin typeface="Arial"/>
+                        </a:rPr>
+                        <a:t>2027</a:t>
+                      </a:r>
+                    </a:p>
+                  </a:txBody>
+                  <a:tcPr marL="36000" marR="36000" marT="18000" marB="18000" anchor="ctr">
+                    <a:lnL>
+                      <a:noFill/>
+                    </a:lnL>
+                    <a:lnR>
+                      <a:noFill/>
+                    </a:lnR>
+                    <a:lnT w="12700">
+                      <a:solidFill>
+                        <a:schemeClr val="bg1">
+                          <a:lumMod val="50000"/>
+                        </a:schemeClr>
+                      </a:solidFill>
+                      <a:prstDash val="solid"/>
+                    </a:lnT>
+                    <a:lnB w="12700">
+                      <a:solidFill>
+                        <a:schemeClr val="bg1">
+                          <a:lumMod val="50000"/>
+                        </a:schemeClr>
+                      </a:solidFill>
+                      <a:prstDash val="solid"/>
+                    </a:lnB>
+                    <a:solidFill>
+                      <a:srgbClr val="000000"/>
+                    </a:solidFill>
+                  </a:tcPr>
+                </a:tc>
+                <a:tc>
+                  <a:txBody>
+                    <a:bodyPr/>
+                    <a:lstStyle/>
+                    <a:p>
+                      <a:pPr algn="ctr"/>
+                      <a:r>
+                        <a:rPr lang="ru-RU" sz="1000" b="1" i="0" dirty="0">
+                          <a:solidFill>
+                            <a:srgbClr val="FFFFFF"/>
+                          </a:solidFill>
+                          <a:latin typeface="Arial"/>
+                        </a:rPr>
+                        <a:t>Q3</a:t>
+                      </a:r>
+                    </a:p>
+                    <a:p>
+                      <a:pPr algn="ctr"/>
+                      <a:r>
+                        <a:rPr lang="ru-RU" sz="1000" b="1" i="0" dirty="0">
+                          <a:solidFill>
+                            <a:srgbClr val="FFFFFF"/>
+                          </a:solidFill>
+                          <a:latin typeface="Arial"/>
+                        </a:rPr>
+                        <a:t>2027</a:t>
+                      </a:r>
+                    </a:p>
+                  </a:txBody>
+                  <a:tcPr marL="36000" marR="36000" marT="18000" marB="18000" anchor="ctr">
+                    <a:lnL>
+                      <a:noFill/>
+                    </a:lnL>
+                    <a:lnR>
+                      <a:noFill/>
+                    </a:lnR>
+                    <a:lnT w="12700">
+                      <a:solidFill>
+                        <a:schemeClr val="bg1">
+                          <a:lumMod val="50000"/>
+                        </a:schemeClr>
+                      </a:solidFill>
+                      <a:prstDash val="solid"/>
+                    </a:lnT>
+                    <a:lnB w="12700">
+                      <a:solidFill>
+                        <a:schemeClr val="bg1">
+                          <a:lumMod val="50000"/>
+                        </a:schemeClr>
+                      </a:solidFill>
+                      <a:prstDash val="solid"/>
+                    </a:lnB>
+                    <a:solidFill>
+                      <a:srgbClr val="000000"/>
+                    </a:solidFill>
+                  </a:tcPr>
+                </a:tc>
+                <a:tc>
+                  <a:txBody>
+                    <a:bodyPr/>
+                    <a:lstStyle/>
+                    <a:p>
+                      <a:pPr algn="ctr"/>
+                      <a:r>
+                        <a:rPr lang="ru-RU" sz="1000" b="1" i="0" dirty="0">
+                          <a:solidFill>
+                            <a:srgbClr val="FFFFFF"/>
+                          </a:solidFill>
+                          <a:latin typeface="Arial"/>
+                        </a:rPr>
+                        <a:t>Q4</a:t>
+                      </a:r>
+                    </a:p>
+                    <a:p>
+                      <a:pPr algn="ctr"/>
+                      <a:r>
+                        <a:rPr lang="ru-RU" sz="1000" b="1" i="0" dirty="0">
+                          <a:solidFill>
+                            <a:srgbClr val="FFFFFF"/>
+                          </a:solidFill>
+                          <a:latin typeface="Arial"/>
+                        </a:rPr>
+                        <a:t>2027</a:t>
+                      </a:r>
+                    </a:p>
+                  </a:txBody>
+                  <a:tcPr marL="36000" marR="36000" marT="18000" marB="18000" anchor="ctr">
+                    <a:lnL>
+                      <a:noFill/>
+                    </a:lnL>
+                    <a:lnR w="12700">
+                      <a:solidFill>
+                        <a:schemeClr val="bg1">
+                          <a:lumMod val="50000"/>
+                        </a:schemeClr>
+                      </a:solidFill>
+                      <a:prstDash val="solid"/>
+                    </a:lnR>
+                    <a:lnT w="12700">
+                      <a:solidFill>
+                        <a:schemeClr val="bg1">
+                          <a:lumMod val="50000"/>
+                        </a:schemeClr>
+                      </a:solidFill>
+                      <a:prstDash val="solid"/>
+                    </a:lnT>
+                    <a:lnB w="12700">
+                      <a:solidFill>
+                        <a:schemeClr val="bg1">
+                          <a:lumMod val="50000"/>
+                        </a:schemeClr>
+                      </a:solidFill>
+                      <a:prstDash val="solid"/>
+                    </a:lnB>
+                    <a:solidFill>
+                      <a:srgbClr val="000000"/>
+                    </a:solidFill>
+                  </a:tcPr>
+                </a:tc>
+              </a:tr>
+              <a:tr h="315000">
+                <a:tc>
+                  <a:txBody>
+                    <a:bodyPr/>
+                    <a:lstStyle/>
+                    <a:p>
+                      <a:pPr algn="l"/>
+                      <a:r>
+                        <a:rPr lang="ru-RU" sz="1000" b="1" i="0" dirty="0">
+                          <a:solidFill>
+                            <a:schemeClr val="tx1"/>
+                          </a:solidFill>
+                          <a:latin typeface="Arial"/>
+                        </a:rPr>
+                        <a:t>E-commerce</a:t>
+                      </a:r>
+                    </a:p>
+                  </a:txBody>
+                  <a:tcPr marL="72000" marR="36000" marT="18000" marB="18000" anchor="ctr">
+                    <a:lnL w="12700">
+                      <a:solidFill>
+                        <a:schemeClr val="bg1">
+                          <a:lumMod val="50000"/>
+                        </a:schemeClr>
+                      </a:solidFill>
+                      <a:prstDash val="solid"/>
+                    </a:lnL>
+                    <a:lnR>
+                      <a:noFill/>
+                    </a:lnR>
+                    <a:lnT w="12700">
+                      <a:solidFill>
+                        <a:schemeClr val="bg1">
+                          <a:lumMod val="50000"/>
+                        </a:schemeClr>
+                      </a:solidFill>
+                      <a:prstDash val="solid"/>
+                    </a:lnT>
+                    <a:lnB w="12700">
+                      <a:solidFill>
+                        <a:schemeClr val="bg1">
+                          <a:lumMod val="50000"/>
+                        </a:schemeClr>
+                      </a:solidFill>
+                      <a:prstDash val="solid"/>
+                    </a:lnB>
+                    <a:noFill/>
+                  </a:tcPr>
+                </a:tc>
+                <a:tc>
+                  <a:txBody>
+                    <a:bodyPr/>
+                    <a:lstStyle/>
+                    <a:p>
+                      <a:pPr algn="ctr"/>
+                      <a:r>
+                        <a:rPr lang="ru-RU" sz="1000" b="1" i="0" dirty="0">
+                          <a:solidFill>
+                            <a:schemeClr val="tx1"/>
+                          </a:solidFill>
+                          <a:latin typeface="Arial"/>
+                        </a:rPr>
+                        <a:t>7 696</a:t>
+                      </a:r>
+                    </a:p>
+                  </a:txBody>
+                  <a:tcPr marL="36000" marR="36000" marT="18000" marB="18000" anchor="ctr">
+                    <a:lnL>
+                      <a:noFill/>
+                    </a:lnL>
+                    <a:lnR>
+                      <a:noFill/>
+                    </a:lnR>
+                    <a:lnT w="12700">
+                      <a:solidFill>
+                        <a:schemeClr val="bg1">
+                          <a:lumMod val="50000"/>
+                        </a:schemeClr>
+                      </a:solidFill>
+                      <a:prstDash val="solid"/>
+                    </a:lnT>
+                    <a:lnB w="12700">
+                      <a:solidFill>
+                        <a:schemeClr val="bg1">
+                          <a:lumMod val="50000"/>
+                        </a:schemeClr>
+                      </a:solidFill>
+                      <a:prstDash val="solid"/>
+                    </a:lnB>
+                    <a:noFill/>
+                  </a:tcPr>
+                </a:tc>
+                <a:tc>
+                  <a:txBody>
+                    <a:bodyPr/>
+                    <a:lstStyle/>
+                    <a:p>
+                      <a:pPr algn="ctr"/>
+                      <a:r>
+                        <a:rPr lang="ru-RU" sz="1000" b="0" i="0" dirty="0">
+                          <a:solidFill>
+                            <a:schemeClr val="tx1"/>
+                          </a:solidFill>
+                          <a:latin typeface="Arial"/>
+                        </a:rPr>
+                        <a:t>6 195</a:t>
+                      </a:r>
+                    </a:p>
+                  </a:txBody>
+                  <a:tcPr marL="36000" marR="36000" marT="18000" marB="18000" anchor="ctr">
+                    <a:lnL>
+                      <a:noFill/>
+                    </a:lnL>
+                    <a:lnR>
+                      <a:noFill/>
+                    </a:lnR>
+                    <a:lnT w="12700">
+                      <a:solidFill>
+                        <a:schemeClr val="bg1">
+                          <a:lumMod val="50000"/>
+                        </a:schemeClr>
+                      </a:solidFill>
+                      <a:prstDash val="solid"/>
+                    </a:lnT>
+                    <a:lnB w="12700">
+                      <a:solidFill>
+                        <a:schemeClr val="bg1">
+                          <a:lumMod val="50000"/>
+                        </a:schemeClr>
+                      </a:solidFill>
+                      <a:prstDash val="solid"/>
+                    </a:lnB>
+                    <a:noFill/>
+                  </a:tcPr>
+                </a:tc>
+                <a:tc>
+                  <a:txBody>
+                    <a:bodyPr/>
+                    <a:lstStyle/>
+                    <a:p>
+                      <a:pPr algn="ctr"/>
+                      <a:r>
+                        <a:rPr lang="ru-RU" sz="1000" b="0" i="0" dirty="0">
+                          <a:solidFill>
+                            <a:schemeClr val="tx1">
+                              <a:lumMod val="50000"/>
+                              <a:lumOff val="50000"/>
+                            </a:schemeClr>
+                          </a:solidFill>
+                          <a:latin typeface="Arial"/>
+                        </a:rPr>
+                        <a:t>+1 501</a:t>
+                      </a:r>
+                    </a:p>
+                  </a:txBody>
+                  <a:tcPr marL="36000" marR="36000" marT="18000" marB="18000" anchor="ctr">
+                    <a:lnL>
+                      <a:noFill/>
+                    </a:lnL>
+                    <a:lnR>
+                      <a:noFill/>
+                    </a:lnR>
+                    <a:lnT w="12700">
+                      <a:solidFill>
+                        <a:schemeClr val="bg1">
+                          <a:lumMod val="50000"/>
+                        </a:schemeClr>
+                      </a:solidFill>
+                      <a:prstDash val="solid"/>
+                    </a:lnT>
+                    <a:lnB w="12700">
+                      <a:solidFill>
+                        <a:schemeClr val="bg1">
+                          <a:lumMod val="50000"/>
+                        </a:schemeClr>
+                      </a:solidFill>
+                      <a:prstDash val="solid"/>
+                    </a:lnB>
+                    <a:noFill/>
+                  </a:tcPr>
+                </a:tc>
+                <a:tc>
+                  <a:txBody>
+                    <a:bodyPr/>
+                    <a:lstStyle/>
+                    <a:p>
+                      <a:pPr algn="ctr"/>
+                      <a:r>
+                        <a:rPr lang="ru-RU" sz="1000" b="0" i="0" dirty="0">
+                          <a:solidFill>
+                            <a:schemeClr val="tx1">
+                              <a:lumMod val="50000"/>
+                              <a:lumOff val="50000"/>
+                            </a:schemeClr>
+                          </a:solidFill>
+                          <a:latin typeface="Arial"/>
+                        </a:rPr>
+                        <a:t>+24,2%</a:t>
+                      </a:r>
+                    </a:p>
+                  </a:txBody>
+                  <a:tcPr marL="36000" marR="36000" marT="18000" marB="18000" anchor="ctr">
+                    <a:lnL>
+                      <a:noFill/>
+                    </a:lnL>
+                    <a:lnR>
+                      <a:noFill/>
+                    </a:lnR>
+                    <a:lnT w="12700">
+                      <a:solidFill>
+                        <a:schemeClr val="bg1">
+                          <a:lumMod val="50000"/>
+                        </a:schemeClr>
+                      </a:solidFill>
+                      <a:prstDash val="solid"/>
+                    </a:lnT>
+                    <a:lnB w="12700">
+                      <a:solidFill>
+                        <a:schemeClr val="bg1">
+                          <a:lumMod val="50000"/>
+                        </a:schemeClr>
+                      </a:solidFill>
+                      <a:prstDash val="solid"/>
+                    </a:lnB>
+                    <a:solidFill>
+                      <a:srgbClr val="C6EFCE"/>
+                    </a:solidFill>
+                  </a:tcPr>
+                </a:tc>
+                <a:tc>
+                  <a:txBody>
+                    <a:bodyPr/>
+                    <a:lstStyle/>
+                    <a:p>
+                      <a:pPr algn="ctr"/>
+                      <a:r>
+                        <a:rPr lang="ru-RU" sz="1000" b="0" i="0" dirty="0">
+                          <a:solidFill>
+                            <a:schemeClr val="tx1"/>
+                          </a:solidFill>
+                          <a:latin typeface="Arial"/>
+                        </a:rPr>
+                        <a:t>7 251</a:t>
+                      </a:r>
+                    </a:p>
+                  </a:txBody>
+                  <a:tcPr marL="36000" marR="36000" marT="18000" marB="18000" anchor="ctr">
+                    <a:lnL>
+                      <a:noFill/>
+                    </a:lnL>
+                    <a:lnR>
+                      <a:noFill/>
+                    </a:lnR>
+                    <a:lnT w="12700">
+                      <a:solidFill>
+                        <a:schemeClr val="bg1">
+                          <a:lumMod val="50000"/>
+                        </a:schemeClr>
+                      </a:solidFill>
+                      <a:prstDash val="solid"/>
+                    </a:lnT>
+                    <a:lnB w="12700">
+                      <a:solidFill>
+                        <a:schemeClr val="bg1">
+                          <a:lumMod val="50000"/>
+                        </a:schemeClr>
+                      </a:solidFill>
+                      <a:prstDash val="solid"/>
+                    </a:lnB>
+                    <a:noFill/>
+                  </a:tcPr>
+                </a:tc>
+                <a:tc>
+                  <a:txBody>
+                    <a:bodyPr/>
+                    <a:lstStyle/>
+                    <a:p>
+                      <a:pPr algn="ctr"/>
+                      <a:r>
+                        <a:rPr lang="ru-RU" sz="1000" b="0" i="0" dirty="0">
+                          <a:solidFill>
+                            <a:schemeClr val="tx1">
+                              <a:lumMod val="50000"/>
+                              <a:lumOff val="50000"/>
+                            </a:schemeClr>
+                          </a:solidFill>
+                          <a:latin typeface="Arial"/>
+                        </a:rPr>
+                        <a:t>+6,1%</a:t>
+                      </a:r>
+                    </a:p>
+                  </a:txBody>
+                  <a:tcPr marL="36000" marR="36000" marT="18000" marB="18000" anchor="ctr">
+                    <a:lnL>
+                      <a:noFill/>
+                    </a:lnL>
+                    <a:lnR>
+                      <a:noFill/>
+                    </a:lnR>
+                    <a:lnT w="12700">
+                      <a:solidFill>
+                        <a:schemeClr val="bg1">
+                          <a:lumMod val="50000"/>
+                        </a:schemeClr>
+                      </a:solidFill>
+                      <a:prstDash val="solid"/>
+                    </a:lnT>
+                    <a:lnB w="12700">
+                      <a:solidFill>
+                        <a:schemeClr val="bg1">
+                          <a:lumMod val="50000"/>
+                        </a:schemeClr>
+                      </a:solidFill>
+                      <a:prstDash val="solid"/>
+                    </a:lnB>
+                    <a:solidFill>
+                      <a:srgbClr val="C6EFCE"/>
+                    </a:solidFill>
+                  </a:tcPr>
+                </a:tc>
+                <a:tc>
+                  <a:txBody>
+                    <a:bodyPr/>
+                    <a:lstStyle/>
+                    <a:p>
+                      <a:pPr algn="l"/>
+                      <a:r>
+                        <a:rPr lang="ru-RU" sz="1000" b="1" i="0" dirty="0">
+                          <a:solidFill>
+                            <a:schemeClr val="tx1"/>
+                          </a:solidFill>
+                          <a:latin typeface="Arial"/>
+                        </a:rPr>
+                        <a:t>= APP; аудитория (DAC) +18%; выше стратегии на 445</a:t>
+                      </a:r>
+                    </a:p>
+                  </a:txBody>
+                  <a:tcPr marL="72000" marR="36000" marT="18000" marB="18000" anchor="ctr">
+                    <a:lnL>
+                      <a:noFill/>
+                    </a:lnL>
+                    <a:lnR w="12700">
+                      <a:solidFill>
+                        <a:schemeClr val="bg1">
+                          <a:lumMod val="50000"/>
+                        </a:schemeClr>
+                      </a:solidFill>
+                      <a:prstDash val="solid"/>
+                    </a:lnR>
+                    <a:lnT w="12700">
+                      <a:solidFill>
+                        <a:schemeClr val="bg1">
+                          <a:lumMod val="50000"/>
+                        </a:schemeClr>
+                      </a:solidFill>
+                      <a:prstDash val="solid"/>
+                    </a:lnT>
+                    <a:lnB w="12700">
+                      <a:solidFill>
+                        <a:schemeClr val="bg1">
+                          <a:lumMod val="50000"/>
+                        </a:schemeClr>
+                      </a:solidFill>
+                      <a:prstDash val="solid"/>
+                    </a:lnB>
+                    <a:noFill/>
+                  </a:tcPr>
+                </a:tc>
+                <a:tc>
+                  <a:txBody>
+                    <a:bodyPr/>
+                    <a:lstStyle/>
+                    <a:p>
+                      <a:endParaRPr lang="ru-RU" sz="1000" dirty="0"/>
+                    </a:p>
+                  </a:txBody>
+                  <a:tcPr>
+                    <a:lnL w="12700">
+                      <a:solidFill>
+                        <a:schemeClr val="bg1">
+                          <a:lumMod val="50000"/>
+                        </a:schemeClr>
+                      </a:solidFill>
+                      <a:prstDash val="solid"/>
+                    </a:lnL>
+                    <a:lnR>
+                      <a:noFill/>
+                    </a:lnR>
+                    <a:lnT>
+                      <a:noFill/>
+                    </a:lnT>
+                    <a:lnB>
+                      <a:noFill/>
+                    </a:lnB>
+                    <a:noFill/>
+                  </a:tcPr>
+                </a:tc>
+                <a:tc>
+                  <a:txBody>
+                    <a:bodyPr/>
+                    <a:lstStyle/>
+                    <a:p>
+                      <a:pPr algn="ctr"/>
+                      <a:r>
+                        <a:rPr lang="ru-RU" sz="1000" b="0" i="0" dirty="0">
+                          <a:solidFill>
+                            <a:schemeClr val="tx1"/>
+                          </a:solidFill>
+                          <a:latin typeface="Arial"/>
+                        </a:rPr>
+                        <a:t>1 077</a:t>
+                      </a:r>
+                    </a:p>
+                  </a:txBody>
+                  <a:tcPr marL="36000" marR="36000" marT="18000" marB="18000" anchor="ctr">
+                    <a:lnL w="12700">
+                      <a:solidFill>
+                        <a:schemeClr val="bg1">
+                          <a:lumMod val="50000"/>
+                        </a:schemeClr>
+                      </a:solidFill>
+                      <a:prstDash val="solid"/>
+                    </a:lnL>
+                    <a:lnR>
+                      <a:noFill/>
+                    </a:lnR>
+                    <a:lnT w="12700">
+                      <a:solidFill>
+                        <a:schemeClr val="bg1">
+                          <a:lumMod val="50000"/>
+                        </a:schemeClr>
+                      </a:solidFill>
+                      <a:prstDash val="solid"/>
+                    </a:lnT>
+                    <a:lnB w="12700">
+                      <a:solidFill>
+                        <a:schemeClr val="bg1">
+                          <a:lumMod val="50000"/>
+                        </a:schemeClr>
+                      </a:solidFill>
+                      <a:prstDash val="solid"/>
+                    </a:lnB>
+                    <a:noFill/>
+                  </a:tcPr>
+                </a:tc>
+                <a:tc>
+                  <a:txBody>
+                    <a:bodyPr/>
+                    <a:lstStyle/>
+                    <a:p>
+                      <a:pPr algn="ctr"/>
+                      <a:r>
+                        <a:rPr lang="ru-RU" sz="1000" b="0" i="0" dirty="0">
+                          <a:solidFill>
+                            <a:schemeClr val="tx1"/>
+                          </a:solidFill>
+                          <a:latin typeface="Arial"/>
+                        </a:rPr>
+                        <a:t>1 616</a:t>
+                      </a:r>
+                    </a:p>
+                  </a:txBody>
+                  <a:tcPr marL="36000" marR="36000" marT="18000" marB="18000" anchor="ctr">
+                    <a:lnL>
+                      <a:noFill/>
+                    </a:lnL>
+                    <a:lnR>
+                      <a:noFill/>
+                    </a:lnR>
+                    <a:lnT w="12700">
+                      <a:solidFill>
+                        <a:schemeClr val="bg1">
+                          <a:lumMod val="50000"/>
+                        </a:schemeClr>
+                      </a:solidFill>
+                      <a:prstDash val="solid"/>
+                    </a:lnT>
+                    <a:lnB w="12700">
+                      <a:solidFill>
+                        <a:schemeClr val="bg1">
+                          <a:lumMod val="50000"/>
+                        </a:schemeClr>
+                      </a:solidFill>
+                      <a:prstDash val="solid"/>
+                    </a:lnB>
+                    <a:noFill/>
+                  </a:tcPr>
+                </a:tc>
+                <a:tc>
+                  <a:txBody>
+                    <a:bodyPr/>
+                    <a:lstStyle/>
+                    <a:p>
+                      <a:pPr algn="ctr"/>
+                      <a:r>
+                        <a:rPr lang="ru-RU" sz="1000" b="0" i="0" dirty="0">
+                          <a:solidFill>
+                            <a:schemeClr val="tx1"/>
+                          </a:solidFill>
+                          <a:latin typeface="Arial"/>
+                        </a:rPr>
+                        <a:t>1 770</a:t>
+                      </a:r>
+                    </a:p>
+                  </a:txBody>
+                  <a:tcPr marL="36000" marR="36000" marT="18000" marB="18000" anchor="ctr">
+                    <a:lnL>
+                      <a:noFill/>
+                    </a:lnL>
+                    <a:lnR>
+                      <a:noFill/>
+                    </a:lnR>
+                    <a:lnT w="12700">
+                      <a:solidFill>
+                        <a:schemeClr val="bg1">
+                          <a:lumMod val="50000"/>
+                        </a:schemeClr>
+                      </a:solidFill>
+                      <a:prstDash val="solid"/>
+                    </a:lnT>
+                    <a:lnB w="12700">
+                      <a:solidFill>
+                        <a:schemeClr val="bg1">
+                          <a:lumMod val="50000"/>
+                        </a:schemeClr>
+                      </a:solidFill>
+                      <a:prstDash val="solid"/>
+                    </a:lnB>
+                    <a:noFill/>
+                  </a:tcPr>
+                </a:tc>
+                <a:tc>
+                  <a:txBody>
+                    <a:bodyPr/>
+                    <a:lstStyle/>
+                    <a:p>
+                      <a:pPr algn="ctr"/>
+                      <a:r>
+                        <a:rPr lang="ru-RU" sz="1000" b="0" i="0" dirty="0">
+                          <a:solidFill>
+                            <a:schemeClr val="tx1"/>
+                          </a:solidFill>
+                          <a:latin typeface="Arial"/>
+                        </a:rPr>
+                        <a:t>3 232</a:t>
+                      </a:r>
+                    </a:p>
+                  </a:txBody>
+                  <a:tcPr marL="36000" marR="36000" marT="18000" marB="18000" anchor="ctr">
+                    <a:lnL>
+                      <a:noFill/>
+                    </a:lnL>
+                    <a:lnR w="12700">
+                      <a:solidFill>
+                        <a:schemeClr val="bg1">
+                          <a:lumMod val="50000"/>
+                        </a:schemeClr>
+                      </a:solidFill>
+                      <a:prstDash val="solid"/>
+                    </a:lnR>
+                    <a:lnT w="12700">
+                      <a:solidFill>
+                        <a:schemeClr val="bg1">
+                          <a:lumMod val="50000"/>
+                        </a:schemeClr>
+                      </a:solidFill>
+                      <a:prstDash val="solid"/>
+                    </a:lnT>
+                    <a:lnB w="12700">
+                      <a:solidFill>
+                        <a:schemeClr val="bg1">
+                          <a:lumMod val="50000"/>
+                        </a:schemeClr>
+                      </a:solidFill>
+                      <a:prstDash val="solid"/>
+                    </a:lnB>
+                    <a:noFill/>
+                  </a:tcPr>
+                </a:tc>
+              </a:tr>
+              <a:tr h="315000">
+                <a:tc>
+                  <a:txBody>
+                    <a:bodyPr/>
+                    <a:lstStyle/>
+                    <a:p>
+                      <a:pPr algn="l"/>
+                      <a:r>
+                        <a:rPr lang="ru-RU" sz="1000" b="1" i="0" dirty="0">
+                          <a:solidFill>
+                            <a:schemeClr val="tx1"/>
+                          </a:solidFill>
+                          <a:latin typeface="Arial"/>
+                        </a:rPr>
+                        <a:t>ММ</a:t>
+                      </a:r>
+                    </a:p>
+                  </a:txBody>
+                  <a:tcPr marL="72000" marR="36000" marT="18000" marB="18000" anchor="ctr">
+                    <a:lnL w="12700">
+                      <a:solidFill>
+                        <a:schemeClr val="bg1">
+                          <a:lumMod val="50000"/>
+                        </a:schemeClr>
+                      </a:solidFill>
+                      <a:prstDash val="solid"/>
+                    </a:lnL>
+                    <a:lnR>
+                      <a:noFill/>
+                    </a:lnR>
+                    <a:lnT w="12700">
+                      <a:solidFill>
+                        <a:schemeClr val="bg1">
+                          <a:lumMod val="50000"/>
+                        </a:schemeClr>
+                      </a:solidFill>
+                      <a:prstDash val="solid"/>
+                    </a:lnT>
+                    <a:lnB w="12700">
+                      <a:solidFill>
+                        <a:schemeClr val="bg1">
+                          <a:lumMod val="50000"/>
+                        </a:schemeClr>
+                      </a:solidFill>
+                      <a:prstDash val="solid"/>
+                    </a:lnB>
+                    <a:noFill/>
+                  </a:tcPr>
+                </a:tc>
+                <a:tc>
+                  <a:txBody>
+                    <a:bodyPr/>
+                    <a:lstStyle/>
+                    <a:p>
+                      <a:pPr algn="ctr"/>
+                      <a:r>
+                        <a:rPr lang="ru-RU" sz="1000" b="1" i="0" dirty="0">
+                          <a:solidFill>
+                            <a:schemeClr val="tx1"/>
+                          </a:solidFill>
+                          <a:latin typeface="Arial"/>
+                        </a:rPr>
+                        <a:t>3 082</a:t>
+                      </a:r>
+                    </a:p>
+                  </a:txBody>
+                  <a:tcPr marL="36000" marR="36000" marT="18000" marB="18000" anchor="ctr">
+                    <a:lnL>
+                      <a:noFill/>
+                    </a:lnL>
+                    <a:lnR>
+                      <a:noFill/>
+                    </a:lnR>
+                    <a:lnT w="12700">
+                      <a:solidFill>
+                        <a:schemeClr val="bg1">
+                          <a:lumMod val="50000"/>
+                        </a:schemeClr>
+                      </a:solidFill>
+                      <a:prstDash val="solid"/>
+                    </a:lnT>
+                    <a:lnB w="12700">
+                      <a:solidFill>
+                        <a:schemeClr val="bg1">
+                          <a:lumMod val="50000"/>
+                        </a:schemeClr>
+                      </a:solidFill>
+                      <a:prstDash val="solid"/>
+                    </a:lnB>
+                    <a:noFill/>
+                  </a:tcPr>
+                </a:tc>
+                <a:tc>
+                  <a:txBody>
+                    <a:bodyPr/>
+                    <a:lstStyle/>
+                    <a:p>
+                      <a:pPr algn="ctr"/>
+                      <a:r>
+                        <a:rPr lang="ru-RU" sz="1000" b="0" i="0" dirty="0">
+                          <a:solidFill>
+                            <a:schemeClr val="tx1"/>
+                          </a:solidFill>
+                          <a:latin typeface="Arial"/>
+                        </a:rPr>
+                        <a:t>1 862</a:t>
+                      </a:r>
+                    </a:p>
+                  </a:txBody>
+                  <a:tcPr marL="36000" marR="36000" marT="18000" marB="18000" anchor="ctr">
+                    <a:lnL>
+                      <a:noFill/>
+                    </a:lnL>
+                    <a:lnR>
+                      <a:noFill/>
+                    </a:lnR>
+                    <a:lnT w="12700">
+                      <a:solidFill>
+                        <a:schemeClr val="bg1">
+                          <a:lumMod val="50000"/>
+                        </a:schemeClr>
+                      </a:solidFill>
+                      <a:prstDash val="solid"/>
+                    </a:lnT>
+                    <a:lnB w="12700">
+                      <a:solidFill>
+                        <a:schemeClr val="bg1">
+                          <a:lumMod val="50000"/>
+                        </a:schemeClr>
+                      </a:solidFill>
+                      <a:prstDash val="solid"/>
+                    </a:lnB>
+                    <a:noFill/>
+                  </a:tcPr>
+                </a:tc>
+                <a:tc>
+                  <a:txBody>
+                    <a:bodyPr/>
+                    <a:lstStyle/>
+                    <a:p>
+                      <a:pPr algn="ctr"/>
+                      <a:r>
+                        <a:rPr lang="ru-RU" sz="1000" b="0" i="0" dirty="0">
+                          <a:solidFill>
+                            <a:schemeClr val="tx1">
+                              <a:lumMod val="50000"/>
+                              <a:lumOff val="50000"/>
+                            </a:schemeClr>
+                          </a:solidFill>
+                          <a:latin typeface="Arial"/>
+                        </a:rPr>
+                        <a:t>+1 220</a:t>
+                      </a:r>
+                    </a:p>
+                  </a:txBody>
+                  <a:tcPr marL="36000" marR="36000" marT="18000" marB="18000" anchor="ctr">
+                    <a:lnL>
+                      <a:noFill/>
+                    </a:lnL>
+                    <a:lnR>
+                      <a:noFill/>
+                    </a:lnR>
+                    <a:lnT w="12700">
+                      <a:solidFill>
+                        <a:schemeClr val="bg1">
+                          <a:lumMod val="50000"/>
+                        </a:schemeClr>
+                      </a:solidFill>
+                      <a:prstDash val="solid"/>
+                    </a:lnT>
+                    <a:lnB w="12700">
+                      <a:solidFill>
+                        <a:schemeClr val="bg1">
+                          <a:lumMod val="50000"/>
+                        </a:schemeClr>
+                      </a:solidFill>
+                      <a:prstDash val="solid"/>
+                    </a:lnB>
+                    <a:noFill/>
+                  </a:tcPr>
+                </a:tc>
+                <a:tc>
+                  <a:txBody>
+                    <a:bodyPr/>
+                    <a:lstStyle/>
+                    <a:p>
+                      <a:pPr algn="ctr"/>
+                      <a:r>
+                        <a:rPr lang="ru-RU" sz="1000" b="0" i="0" dirty="0">
+                          <a:solidFill>
+                            <a:schemeClr val="tx1">
+                              <a:lumMod val="50000"/>
+                              <a:lumOff val="50000"/>
+                            </a:schemeClr>
+                          </a:solidFill>
+                          <a:latin typeface="Arial"/>
+                        </a:rPr>
+                        <a:t>+65,5%</a:t>
+                      </a:r>
+                    </a:p>
+                  </a:txBody>
+                  <a:tcPr marL="36000" marR="36000" marT="18000" marB="18000" anchor="ctr">
+                    <a:lnL>
+                      <a:noFill/>
+                    </a:lnL>
+                    <a:lnR>
+                      <a:noFill/>
+                    </a:lnR>
+                    <a:lnT w="12700">
+                      <a:solidFill>
+                        <a:schemeClr val="bg1">
+                          <a:lumMod val="50000"/>
+                        </a:schemeClr>
+                      </a:solidFill>
+                      <a:prstDash val="solid"/>
+                    </a:lnT>
+                    <a:lnB w="12700">
+                      <a:solidFill>
+                        <a:schemeClr val="bg1">
+                          <a:lumMod val="50000"/>
+                        </a:schemeClr>
+                      </a:solidFill>
+                      <a:prstDash val="solid"/>
+                    </a:lnB>
+                    <a:solidFill>
+                      <a:srgbClr val="C6EFCE"/>
+                    </a:solidFill>
+                  </a:tcPr>
+                </a:tc>
+                <a:tc>
+                  <a:txBody>
+                    <a:bodyPr/>
+                    <a:lstStyle/>
+                    <a:p>
+                      <a:pPr algn="ctr"/>
+                      <a:r>
+                        <a:rPr lang="ru-RU" sz="1000" b="0" i="0" dirty="0">
+                          <a:solidFill>
+                            <a:schemeClr val="tx1"/>
+                          </a:solidFill>
+                          <a:latin typeface="Arial"/>
+                        </a:rPr>
+                        <a:t>–</a:t>
+                      </a:r>
+                    </a:p>
+                  </a:txBody>
+                  <a:tcPr marL="36000" marR="36000" marT="18000" marB="18000" anchor="ctr">
+                    <a:lnL>
+                      <a:noFill/>
+                    </a:lnL>
+                    <a:lnR>
+                      <a:noFill/>
+                    </a:lnR>
+                    <a:lnT w="12700">
+                      <a:solidFill>
+                        <a:schemeClr val="bg1">
+                          <a:lumMod val="50000"/>
+                        </a:schemeClr>
+                      </a:solidFill>
+                      <a:prstDash val="solid"/>
+                    </a:lnT>
+                    <a:lnB w="12700">
+                      <a:solidFill>
+                        <a:schemeClr val="bg1">
+                          <a:lumMod val="50000"/>
+                        </a:schemeClr>
+                      </a:solidFill>
+                      <a:prstDash val="solid"/>
+                    </a:lnB>
+                    <a:noFill/>
+                  </a:tcPr>
+                </a:tc>
+                <a:tc>
+                  <a:txBody>
+                    <a:bodyPr/>
+                    <a:lstStyle/>
+                    <a:p>
+                      <a:pPr algn="ctr"/>
+                      <a:r>
+                        <a:rPr lang="ru-RU" sz="1000" b="0" i="0" dirty="0">
+                          <a:solidFill>
+                            <a:schemeClr val="tx1">
+                              <a:lumMod val="50000"/>
+                              <a:lumOff val="50000"/>
+                            </a:schemeClr>
+                          </a:solidFill>
+                          <a:latin typeface="Arial"/>
+                        </a:rPr>
+                        <a:t>н/п</a:t>
+                      </a:r>
+                    </a:p>
+                  </a:txBody>
+                  <a:tcPr marL="36000" marR="36000" marT="18000" marB="18000" anchor="ctr">
+                    <a:lnL>
+                      <a:noFill/>
+                    </a:lnL>
+                    <a:lnR>
+                      <a:noFill/>
+                    </a:lnR>
+                    <a:lnT w="12700">
+                      <a:solidFill>
+                        <a:schemeClr val="bg1">
+                          <a:lumMod val="50000"/>
+                        </a:schemeClr>
+                      </a:solidFill>
+                      <a:prstDash val="solid"/>
+                    </a:lnT>
+                    <a:lnB w="12700">
+                      <a:solidFill>
+                        <a:schemeClr val="bg1">
+                          <a:lumMod val="50000"/>
+                        </a:schemeClr>
+                      </a:solidFill>
+                      <a:prstDash val="solid"/>
+                    </a:lnB>
+                    <a:noFill/>
+                  </a:tcPr>
+                </a:tc>
+                <a:tc>
+                  <a:txBody>
+                    <a:bodyPr/>
+                    <a:lstStyle/>
+                    <a:p>
+                      <a:pPr algn="l"/>
+                      <a:r>
+                        <a:rPr lang="ru-RU" sz="1000" b="1" i="0" dirty="0">
+                          <a:solidFill>
+                            <a:schemeClr val="tx1"/>
+                          </a:solidFill>
+                          <a:latin typeface="Arial"/>
+                        </a:rPr>
+                        <a:t>Instore 2 770 + Online DMP 313</a:t>
+                      </a:r>
+                    </a:p>
+                  </a:txBody>
+                  <a:tcPr marL="72000" marR="36000" marT="18000" marB="18000" anchor="ctr">
+                    <a:lnL>
+                      <a:noFill/>
+                    </a:lnL>
+                    <a:lnR w="12700">
+                      <a:solidFill>
+                        <a:schemeClr val="bg1">
+                          <a:lumMod val="50000"/>
+                        </a:schemeClr>
+                      </a:solidFill>
+                      <a:prstDash val="solid"/>
+                    </a:lnR>
+                    <a:lnT w="12700">
+                      <a:solidFill>
+                        <a:schemeClr val="bg1">
+                          <a:lumMod val="50000"/>
+                        </a:schemeClr>
+                      </a:solidFill>
+                      <a:prstDash val="solid"/>
+                    </a:lnT>
+                    <a:lnB w="12700">
+                      <a:solidFill>
+                        <a:schemeClr val="bg1">
+                          <a:lumMod val="50000"/>
+                        </a:schemeClr>
+                      </a:solidFill>
+                      <a:prstDash val="solid"/>
+                    </a:lnB>
+                    <a:noFill/>
+                  </a:tcPr>
+                </a:tc>
+                <a:tc>
+                  <a:txBody>
+                    <a:bodyPr/>
+                    <a:lstStyle/>
+                    <a:p>
+                      <a:endParaRPr lang="ru-RU" sz="1000" dirty="0"/>
+                    </a:p>
+                  </a:txBody>
+                  <a:tcPr>
+                    <a:lnL w="12700">
+                      <a:solidFill>
+                        <a:schemeClr val="bg1">
+                          <a:lumMod val="50000"/>
+                        </a:schemeClr>
+                      </a:solidFill>
+                      <a:prstDash val="solid"/>
+                    </a:lnL>
+                    <a:lnR>
+                      <a:noFill/>
+                    </a:lnR>
+                    <a:lnT>
+                      <a:noFill/>
+                    </a:lnT>
+                    <a:lnB>
+                      <a:noFill/>
+                    </a:lnB>
+                    <a:noFill/>
+                  </a:tcPr>
+                </a:tc>
+                <a:tc>
+                  <a:txBody>
+                    <a:bodyPr/>
+                    <a:lstStyle/>
+                    <a:p>
+                      <a:pPr algn="ctr"/>
+                      <a:r>
+                        <a:rPr lang="ru-RU" sz="1000" b="0" i="0" dirty="0">
+                          <a:solidFill>
+                            <a:schemeClr val="tx1"/>
+                          </a:solidFill>
+                          <a:latin typeface="Arial"/>
+                        </a:rPr>
+                        <a:t>432</a:t>
+                      </a:r>
+                    </a:p>
+                  </a:txBody>
+                  <a:tcPr marL="36000" marR="36000" marT="18000" marB="18000" anchor="ctr">
+                    <a:lnL w="12700">
+                      <a:solidFill>
+                        <a:schemeClr val="bg1">
+                          <a:lumMod val="50000"/>
+                        </a:schemeClr>
+                      </a:solidFill>
+                      <a:prstDash val="solid"/>
+                    </a:lnL>
+                    <a:lnR>
+                      <a:noFill/>
+                    </a:lnR>
+                    <a:lnT w="12700">
+                      <a:solidFill>
+                        <a:schemeClr val="bg1">
+                          <a:lumMod val="50000"/>
+                        </a:schemeClr>
+                      </a:solidFill>
+                      <a:prstDash val="solid"/>
+                    </a:lnT>
+                    <a:lnB w="12700">
+                      <a:solidFill>
+                        <a:schemeClr val="bg1">
+                          <a:lumMod val="50000"/>
+                        </a:schemeClr>
+                      </a:solidFill>
+                      <a:prstDash val="solid"/>
+                    </a:lnB>
+                    <a:noFill/>
+                  </a:tcPr>
+                </a:tc>
+                <a:tc>
+                  <a:txBody>
+                    <a:bodyPr/>
+                    <a:lstStyle/>
+                    <a:p>
+                      <a:pPr algn="ctr"/>
+                      <a:r>
+                        <a:rPr lang="ru-RU" sz="1000" b="0" i="0" dirty="0">
+                          <a:solidFill>
+                            <a:schemeClr val="tx1"/>
+                          </a:solidFill>
+                          <a:latin typeface="Arial"/>
+                        </a:rPr>
+                        <a:t>647</a:t>
+                      </a:r>
+                    </a:p>
+                  </a:txBody>
+                  <a:tcPr marL="36000" marR="36000" marT="18000" marB="18000" anchor="ctr">
+                    <a:lnL>
+                      <a:noFill/>
+                    </a:lnL>
+                    <a:lnR>
+                      <a:noFill/>
+                    </a:lnR>
+                    <a:lnT w="12700">
+                      <a:solidFill>
+                        <a:schemeClr val="bg1">
+                          <a:lumMod val="50000"/>
+                        </a:schemeClr>
+                      </a:solidFill>
+                      <a:prstDash val="solid"/>
+                    </a:lnT>
+                    <a:lnB w="12700">
+                      <a:solidFill>
+                        <a:schemeClr val="bg1">
+                          <a:lumMod val="50000"/>
+                        </a:schemeClr>
+                      </a:solidFill>
+                      <a:prstDash val="solid"/>
+                    </a:lnB>
+                    <a:noFill/>
+                  </a:tcPr>
+                </a:tc>
+                <a:tc>
+                  <a:txBody>
+                    <a:bodyPr/>
+                    <a:lstStyle/>
+                    <a:p>
+                      <a:pPr algn="ctr"/>
+                      <a:r>
+                        <a:rPr lang="ru-RU" sz="1000" b="0" i="0" dirty="0">
+                          <a:solidFill>
+                            <a:schemeClr val="tx1"/>
+                          </a:solidFill>
+                          <a:latin typeface="Arial"/>
+                        </a:rPr>
+                        <a:t>709</a:t>
+                      </a:r>
+                    </a:p>
+                  </a:txBody>
+                  <a:tcPr marL="36000" marR="36000" marT="18000" marB="18000" anchor="ctr">
+                    <a:lnL>
+                      <a:noFill/>
+                    </a:lnL>
+                    <a:lnR>
+                      <a:noFill/>
+                    </a:lnR>
+                    <a:lnT w="12700">
+                      <a:solidFill>
+                        <a:schemeClr val="bg1">
+                          <a:lumMod val="50000"/>
+                        </a:schemeClr>
+                      </a:solidFill>
+                      <a:prstDash val="solid"/>
+                    </a:lnT>
+                    <a:lnB w="12700">
+                      <a:solidFill>
+                        <a:schemeClr val="bg1">
+                          <a:lumMod val="50000"/>
+                        </a:schemeClr>
+                      </a:solidFill>
+                      <a:prstDash val="solid"/>
+                    </a:lnB>
+                    <a:noFill/>
+                  </a:tcPr>
+                </a:tc>
+                <a:tc>
+                  <a:txBody>
+                    <a:bodyPr/>
+                    <a:lstStyle/>
+                    <a:p>
+                      <a:pPr algn="ctr"/>
+                      <a:r>
+                        <a:rPr lang="ru-RU" sz="1000" b="0" i="0" dirty="0">
+                          <a:solidFill>
+                            <a:schemeClr val="tx1"/>
+                          </a:solidFill>
+                          <a:latin typeface="Arial"/>
+                        </a:rPr>
+                        <a:t>1 295</a:t>
+                      </a:r>
+                    </a:p>
+                  </a:txBody>
+                  <a:tcPr marL="36000" marR="36000" marT="18000" marB="18000" anchor="ctr">
+                    <a:lnL>
+                      <a:noFill/>
+                    </a:lnL>
+                    <a:lnR w="12700">
+                      <a:solidFill>
+                        <a:schemeClr val="bg1">
+                          <a:lumMod val="50000"/>
+                        </a:schemeClr>
+                      </a:solidFill>
+                      <a:prstDash val="solid"/>
+                    </a:lnR>
+                    <a:lnT w="12700">
+                      <a:solidFill>
+                        <a:schemeClr val="bg1">
+                          <a:lumMod val="50000"/>
+                        </a:schemeClr>
+                      </a:solidFill>
+                      <a:prstDash val="solid"/>
+                    </a:lnT>
+                    <a:lnB w="12700">
+                      <a:solidFill>
+                        <a:schemeClr val="bg1">
+                          <a:lumMod val="50000"/>
+                        </a:schemeClr>
+                      </a:solidFill>
+                      <a:prstDash val="solid"/>
+                    </a:lnB>
+                    <a:noFill/>
+                  </a:tcPr>
+                </a:tc>
+              </a:tr>
+              <a:tr h="315000">
+                <a:tc>
+                  <a:txBody>
+                    <a:bodyPr/>
+                    <a:lstStyle/>
+                    <a:p>
+                      <a:pPr algn="l"/>
+                      <a:r>
+                        <a:rPr lang="ru-RU" sz="1000" b="1" i="0" dirty="0">
+                          <a:solidFill>
+                            <a:schemeClr val="tx1"/>
+                          </a:solidFill>
+                          <a:latin typeface="Arial"/>
+                        </a:rPr>
+                        <a:t>МК</a:t>
+                      </a:r>
+                    </a:p>
+                  </a:txBody>
+                  <a:tcPr marL="72000" marR="36000" marT="18000" marB="18000" anchor="ctr">
+                    <a:lnL w="12700">
+                      <a:solidFill>
+                        <a:schemeClr val="bg1">
+                          <a:lumMod val="50000"/>
+                        </a:schemeClr>
+                      </a:solidFill>
+                      <a:prstDash val="solid"/>
+                    </a:lnL>
+                    <a:lnR>
+                      <a:noFill/>
+                    </a:lnR>
+                    <a:lnT w="12700">
+                      <a:solidFill>
+                        <a:schemeClr val="bg1">
+                          <a:lumMod val="50000"/>
+                        </a:schemeClr>
+                      </a:solidFill>
+                      <a:prstDash val="solid"/>
+                    </a:lnT>
+                    <a:lnB w="12700">
+                      <a:solidFill>
+                        <a:schemeClr val="bg1">
+                          <a:lumMod val="50000"/>
+                        </a:schemeClr>
+                      </a:solidFill>
+                      <a:prstDash val="solid"/>
+                    </a:lnB>
+                    <a:noFill/>
+                  </a:tcPr>
+                </a:tc>
+                <a:tc>
+                  <a:txBody>
+                    <a:bodyPr/>
+                    <a:lstStyle/>
+                    <a:p>
+                      <a:pPr algn="ctr"/>
+                      <a:r>
+                        <a:rPr lang="ru-RU" sz="1000" b="1" i="0" dirty="0">
+                          <a:solidFill>
+                            <a:schemeClr val="tx1"/>
+                          </a:solidFill>
+                          <a:latin typeface="Arial"/>
+                        </a:rPr>
+                        <a:t>1 644</a:t>
+                      </a:r>
+                    </a:p>
+                  </a:txBody>
+                  <a:tcPr marL="36000" marR="36000" marT="18000" marB="18000" anchor="ctr">
+                    <a:lnL>
+                      <a:noFill/>
+                    </a:lnL>
+                    <a:lnR>
+                      <a:noFill/>
+                    </a:lnR>
+                    <a:lnT w="12700">
+                      <a:solidFill>
+                        <a:schemeClr val="bg1">
+                          <a:lumMod val="50000"/>
+                        </a:schemeClr>
+                      </a:solidFill>
+                      <a:prstDash val="solid"/>
+                    </a:lnT>
+                    <a:lnB w="12700">
+                      <a:solidFill>
+                        <a:schemeClr val="bg1">
+                          <a:lumMod val="50000"/>
+                        </a:schemeClr>
+                      </a:solidFill>
+                      <a:prstDash val="solid"/>
+                    </a:lnB>
+                    <a:noFill/>
+                  </a:tcPr>
+                </a:tc>
+                <a:tc>
+                  <a:txBody>
+                    <a:bodyPr/>
+                    <a:lstStyle/>
+                    <a:p>
+                      <a:pPr algn="ctr"/>
+                      <a:r>
+                        <a:rPr lang="ru-RU" sz="1000" b="0" i="0" dirty="0">
+                          <a:solidFill>
+                            <a:schemeClr val="tx1"/>
+                          </a:solidFill>
+                          <a:latin typeface="Arial"/>
+                        </a:rPr>
+                        <a:t>1 008</a:t>
+                      </a:r>
+                    </a:p>
+                  </a:txBody>
+                  <a:tcPr marL="36000" marR="36000" marT="18000" marB="18000" anchor="ctr">
+                    <a:lnL>
+                      <a:noFill/>
+                    </a:lnL>
+                    <a:lnR>
+                      <a:noFill/>
+                    </a:lnR>
+                    <a:lnT w="12700">
+                      <a:solidFill>
+                        <a:schemeClr val="bg1">
+                          <a:lumMod val="50000"/>
+                        </a:schemeClr>
+                      </a:solidFill>
+                      <a:prstDash val="solid"/>
+                    </a:lnT>
+                    <a:lnB w="12700">
+                      <a:solidFill>
+                        <a:schemeClr val="bg1">
+                          <a:lumMod val="50000"/>
+                        </a:schemeClr>
+                      </a:solidFill>
+                      <a:prstDash val="solid"/>
+                    </a:lnB>
+                    <a:noFill/>
+                  </a:tcPr>
+                </a:tc>
+                <a:tc>
+                  <a:txBody>
+                    <a:bodyPr/>
+                    <a:lstStyle/>
+                    <a:p>
+                      <a:pPr algn="ctr"/>
+                      <a:r>
+                        <a:rPr lang="ru-RU" sz="1000" b="0" i="0" dirty="0">
+                          <a:solidFill>
+                            <a:schemeClr val="tx1">
+                              <a:lumMod val="50000"/>
+                              <a:lumOff val="50000"/>
+                            </a:schemeClr>
+                          </a:solidFill>
+                          <a:latin typeface="Arial"/>
+                        </a:rPr>
+                        <a:t>+635</a:t>
+                      </a:r>
+                    </a:p>
+                  </a:txBody>
+                  <a:tcPr marL="36000" marR="36000" marT="18000" marB="18000" anchor="ctr">
+                    <a:lnL>
+                      <a:noFill/>
+                    </a:lnL>
+                    <a:lnR>
+                      <a:noFill/>
+                    </a:lnR>
+                    <a:lnT w="12700">
+                      <a:solidFill>
+                        <a:schemeClr val="bg1">
+                          <a:lumMod val="50000"/>
+                        </a:schemeClr>
+                      </a:solidFill>
+                      <a:prstDash val="solid"/>
+                    </a:lnT>
+                    <a:lnB w="12700">
+                      <a:solidFill>
+                        <a:schemeClr val="bg1">
+                          <a:lumMod val="50000"/>
+                        </a:schemeClr>
+                      </a:solidFill>
+                      <a:prstDash val="solid"/>
+                    </a:lnB>
+                    <a:noFill/>
+                  </a:tcPr>
+                </a:tc>
+                <a:tc>
+                  <a:txBody>
+                    <a:bodyPr/>
+                    <a:lstStyle/>
+                    <a:p>
+                      <a:pPr algn="ctr"/>
+                      <a:r>
+                        <a:rPr lang="ru-RU" sz="1000" b="0" i="0" dirty="0">
+                          <a:solidFill>
+                            <a:schemeClr val="tx1">
+                              <a:lumMod val="50000"/>
+                              <a:lumOff val="50000"/>
+                            </a:schemeClr>
+                          </a:solidFill>
+                          <a:latin typeface="Arial"/>
+                        </a:rPr>
+                        <a:t>+63,0%</a:t>
+                      </a:r>
+                    </a:p>
+                  </a:txBody>
+                  <a:tcPr marL="36000" marR="36000" marT="18000" marB="18000" anchor="ctr">
+                    <a:lnL>
+                      <a:noFill/>
+                    </a:lnL>
+                    <a:lnR>
+                      <a:noFill/>
+                    </a:lnR>
+                    <a:lnT w="12700">
+                      <a:solidFill>
+                        <a:schemeClr val="bg1">
+                          <a:lumMod val="50000"/>
+                        </a:schemeClr>
+                      </a:solidFill>
+                      <a:prstDash val="solid"/>
+                    </a:lnT>
+                    <a:lnB w="12700">
+                      <a:solidFill>
+                        <a:schemeClr val="bg1">
+                          <a:lumMod val="50000"/>
+                        </a:schemeClr>
+                      </a:solidFill>
+                      <a:prstDash val="solid"/>
+                    </a:lnB>
+                    <a:solidFill>
+                      <a:srgbClr val="C6EFCE"/>
+                    </a:solidFill>
+                  </a:tcPr>
+                </a:tc>
+                <a:tc>
+                  <a:txBody>
+                    <a:bodyPr/>
+                    <a:lstStyle/>
+                    <a:p>
+                      <a:pPr algn="ctr"/>
+                      <a:r>
+                        <a:rPr lang="ru-RU" sz="1000" b="0" i="0" dirty="0">
+                          <a:solidFill>
+                            <a:schemeClr val="tx1"/>
+                          </a:solidFill>
+                          <a:latin typeface="Arial"/>
+                        </a:rPr>
+                        <a:t>–</a:t>
+                      </a:r>
+                    </a:p>
+                  </a:txBody>
+                  <a:tcPr marL="36000" marR="36000" marT="18000" marB="18000" anchor="ctr">
+                    <a:lnL>
+                      <a:noFill/>
+                    </a:lnL>
+                    <a:lnR>
+                      <a:noFill/>
+                    </a:lnR>
+                    <a:lnT w="12700">
+                      <a:solidFill>
+                        <a:schemeClr val="bg1">
+                          <a:lumMod val="50000"/>
+                        </a:schemeClr>
+                      </a:solidFill>
+                      <a:prstDash val="solid"/>
+                    </a:lnT>
+                    <a:lnB w="12700">
+                      <a:solidFill>
+                        <a:schemeClr val="bg1">
+                          <a:lumMod val="50000"/>
+                        </a:schemeClr>
+                      </a:solidFill>
+                      <a:prstDash val="solid"/>
+                    </a:lnB>
+                    <a:noFill/>
+                  </a:tcPr>
+                </a:tc>
+                <a:tc>
+                  <a:txBody>
+                    <a:bodyPr/>
+                    <a:lstStyle/>
+                    <a:p>
+                      <a:pPr algn="ctr"/>
+                      <a:r>
+                        <a:rPr lang="ru-RU" sz="1000" b="0" i="0" dirty="0">
+                          <a:solidFill>
+                            <a:schemeClr val="tx1">
+                              <a:lumMod val="50000"/>
+                              <a:lumOff val="50000"/>
+                            </a:schemeClr>
+                          </a:solidFill>
+                          <a:latin typeface="Arial"/>
+                        </a:rPr>
+                        <a:t>н/п</a:t>
+                      </a:r>
+                    </a:p>
+                  </a:txBody>
+                  <a:tcPr marL="36000" marR="36000" marT="18000" marB="18000" anchor="ctr">
+                    <a:lnL>
+                      <a:noFill/>
+                    </a:lnL>
+                    <a:lnR>
+                      <a:noFill/>
+                    </a:lnR>
+                    <a:lnT w="12700">
+                      <a:solidFill>
+                        <a:schemeClr val="bg1">
+                          <a:lumMod val="50000"/>
+                        </a:schemeClr>
+                      </a:solidFill>
+                      <a:prstDash val="solid"/>
+                    </a:lnT>
+                    <a:lnB w="12700">
+                      <a:solidFill>
+                        <a:schemeClr val="bg1">
+                          <a:lumMod val="50000"/>
+                        </a:schemeClr>
+                      </a:solidFill>
+                      <a:prstDash val="solid"/>
+                    </a:lnB>
+                    <a:noFill/>
+                  </a:tcPr>
+                </a:tc>
+                <a:tc>
+                  <a:txBody>
+                    <a:bodyPr/>
+                    <a:lstStyle/>
+                    <a:p>
+                      <a:pPr algn="l"/>
+                      <a:r>
+                        <a:rPr lang="ru-RU" sz="1000" b="1" i="0" dirty="0">
+                          <a:solidFill>
+                            <a:schemeClr val="tx1"/>
+                          </a:solidFill>
+                          <a:latin typeface="Arial"/>
+                        </a:rPr>
+                        <a:t>Online DMP 1 246 + Instore 397 (рост оборудования в ТТ МК)</a:t>
+                      </a:r>
+                    </a:p>
+                  </a:txBody>
+                  <a:tcPr marL="72000" marR="36000" marT="18000" marB="18000" anchor="ctr">
+                    <a:lnL>
+                      <a:noFill/>
+                    </a:lnL>
+                    <a:lnR w="12700">
+                      <a:solidFill>
+                        <a:schemeClr val="bg1">
+                          <a:lumMod val="50000"/>
+                        </a:schemeClr>
+                      </a:solidFill>
+                      <a:prstDash val="solid"/>
+                    </a:lnR>
+                    <a:lnT w="12700">
+                      <a:solidFill>
+                        <a:schemeClr val="bg1">
+                          <a:lumMod val="50000"/>
+                        </a:schemeClr>
+                      </a:solidFill>
+                      <a:prstDash val="solid"/>
+                    </a:lnT>
+                    <a:lnB w="12700">
+                      <a:solidFill>
+                        <a:schemeClr val="bg1">
+                          <a:lumMod val="50000"/>
+                        </a:schemeClr>
+                      </a:solidFill>
+                      <a:prstDash val="solid"/>
+                    </a:lnB>
+                    <a:noFill/>
+                  </a:tcPr>
+                </a:tc>
+                <a:tc>
+                  <a:txBody>
+                    <a:bodyPr/>
+                    <a:lstStyle/>
+                    <a:p>
+                      <a:endParaRPr lang="ru-RU" sz="1000" dirty="0"/>
+                    </a:p>
+                  </a:txBody>
+                  <a:tcPr>
+                    <a:lnL w="12700">
+                      <a:solidFill>
+                        <a:schemeClr val="bg1">
+                          <a:lumMod val="50000"/>
+                        </a:schemeClr>
+                      </a:solidFill>
+                      <a:prstDash val="solid"/>
+                    </a:lnL>
+                    <a:lnR>
+                      <a:noFill/>
+                    </a:lnR>
+                    <a:lnT>
+                      <a:noFill/>
+                    </a:lnT>
+                    <a:lnB>
+                      <a:noFill/>
+                    </a:lnB>
+                    <a:noFill/>
+                  </a:tcPr>
+                </a:tc>
+                <a:tc>
+                  <a:txBody>
+                    <a:bodyPr/>
+                    <a:lstStyle/>
+                    <a:p>
+                      <a:pPr algn="ctr"/>
+                      <a:r>
+                        <a:rPr lang="ru-RU" sz="1000" b="0" i="0" dirty="0">
+                          <a:solidFill>
+                            <a:schemeClr val="tx1"/>
+                          </a:solidFill>
+                          <a:latin typeface="Arial"/>
+                        </a:rPr>
+                        <a:t>230</a:t>
+                      </a:r>
+                    </a:p>
+                  </a:txBody>
+                  <a:tcPr marL="36000" marR="36000" marT="18000" marB="18000" anchor="ctr">
+                    <a:lnL w="12700">
+                      <a:solidFill>
+                        <a:schemeClr val="bg1">
+                          <a:lumMod val="50000"/>
+                        </a:schemeClr>
+                      </a:solidFill>
+                      <a:prstDash val="solid"/>
+                    </a:lnL>
+                    <a:lnR>
+                      <a:noFill/>
+                    </a:lnR>
+                    <a:lnT w="12700">
+                      <a:solidFill>
+                        <a:schemeClr val="bg1">
+                          <a:lumMod val="50000"/>
+                        </a:schemeClr>
+                      </a:solidFill>
+                      <a:prstDash val="solid"/>
+                    </a:lnT>
+                    <a:lnB w="12700">
+                      <a:solidFill>
+                        <a:schemeClr val="bg1">
+                          <a:lumMod val="50000"/>
+                        </a:schemeClr>
+                      </a:solidFill>
+                      <a:prstDash val="solid"/>
+                    </a:lnB>
+                    <a:noFill/>
+                  </a:tcPr>
+                </a:tc>
+                <a:tc>
+                  <a:txBody>
+                    <a:bodyPr/>
+                    <a:lstStyle/>
+                    <a:p>
+                      <a:pPr algn="ctr"/>
+                      <a:r>
+                        <a:rPr lang="ru-RU" sz="1000" b="0" i="0" dirty="0">
+                          <a:solidFill>
+                            <a:schemeClr val="tx1"/>
+                          </a:solidFill>
+                          <a:latin typeface="Arial"/>
+                        </a:rPr>
+                        <a:t>345</a:t>
+                      </a:r>
+                    </a:p>
+                  </a:txBody>
+                  <a:tcPr marL="36000" marR="36000" marT="18000" marB="18000" anchor="ctr">
+                    <a:lnL>
+                      <a:noFill/>
+                    </a:lnL>
+                    <a:lnR>
+                      <a:noFill/>
+                    </a:lnR>
+                    <a:lnT w="12700">
+                      <a:solidFill>
+                        <a:schemeClr val="bg1">
+                          <a:lumMod val="50000"/>
+                        </a:schemeClr>
+                      </a:solidFill>
+                      <a:prstDash val="solid"/>
+                    </a:lnT>
+                    <a:lnB w="12700">
+                      <a:solidFill>
+                        <a:schemeClr val="bg1">
+                          <a:lumMod val="50000"/>
+                        </a:schemeClr>
+                      </a:solidFill>
+                      <a:prstDash val="solid"/>
+                    </a:lnB>
+                    <a:noFill/>
+                  </a:tcPr>
+                </a:tc>
+                <a:tc>
+                  <a:txBody>
+                    <a:bodyPr/>
+                    <a:lstStyle/>
+                    <a:p>
+                      <a:pPr algn="ctr"/>
+                      <a:r>
+                        <a:rPr lang="ru-RU" sz="1000" b="0" i="0" dirty="0">
+                          <a:solidFill>
+                            <a:schemeClr val="tx1"/>
+                          </a:solidFill>
+                          <a:latin typeface="Arial"/>
+                        </a:rPr>
+                        <a:t>378</a:t>
+                      </a:r>
+                    </a:p>
+                  </a:txBody>
+                  <a:tcPr marL="36000" marR="36000" marT="18000" marB="18000" anchor="ctr">
+                    <a:lnL>
+                      <a:noFill/>
+                    </a:lnL>
+                    <a:lnR>
+                      <a:noFill/>
+                    </a:lnR>
+                    <a:lnT w="12700">
+                      <a:solidFill>
+                        <a:schemeClr val="bg1">
+                          <a:lumMod val="50000"/>
+                        </a:schemeClr>
+                      </a:solidFill>
+                      <a:prstDash val="solid"/>
+                    </a:lnT>
+                    <a:lnB w="12700">
+                      <a:solidFill>
+                        <a:schemeClr val="bg1">
+                          <a:lumMod val="50000"/>
+                        </a:schemeClr>
+                      </a:solidFill>
+                      <a:prstDash val="solid"/>
+                    </a:lnB>
+                    <a:noFill/>
+                  </a:tcPr>
+                </a:tc>
+                <a:tc>
+                  <a:txBody>
+                    <a:bodyPr/>
+                    <a:lstStyle/>
+                    <a:p>
+                      <a:pPr algn="ctr"/>
+                      <a:r>
+                        <a:rPr lang="ru-RU" sz="1000" b="0" i="0" dirty="0">
+                          <a:solidFill>
+                            <a:schemeClr val="tx1"/>
+                          </a:solidFill>
+                          <a:latin typeface="Arial"/>
+                        </a:rPr>
+                        <a:t>690</a:t>
+                      </a:r>
+                    </a:p>
+                  </a:txBody>
+                  <a:tcPr marL="36000" marR="36000" marT="18000" marB="18000" anchor="ctr">
+                    <a:lnL>
+                      <a:noFill/>
+                    </a:lnL>
+                    <a:lnR w="12700">
+                      <a:solidFill>
+                        <a:schemeClr val="bg1">
+                          <a:lumMod val="50000"/>
+                        </a:schemeClr>
+                      </a:solidFill>
+                      <a:prstDash val="solid"/>
+                    </a:lnR>
+                    <a:lnT w="12700">
+                      <a:solidFill>
+                        <a:schemeClr val="bg1">
+                          <a:lumMod val="50000"/>
+                        </a:schemeClr>
+                      </a:solidFill>
+                      <a:prstDash val="solid"/>
+                    </a:lnT>
+                    <a:lnB w="12700">
+                      <a:solidFill>
+                        <a:schemeClr val="bg1">
+                          <a:lumMod val="50000"/>
+                        </a:schemeClr>
+                      </a:solidFill>
+                      <a:prstDash val="solid"/>
+                    </a:lnB>
+                    <a:noFill/>
+                  </a:tcPr>
+                </a:tc>
+              </a:tr>
+              <a:tr h="315000">
+                <a:tc>
+                  <a:txBody>
+                    <a:bodyPr/>
+                    <a:lstStyle/>
+                    <a:p>
+                      <a:pPr algn="l"/>
+                      <a:r>
+                        <a:rPr lang="ru-RU" sz="1000" b="1" i="0" dirty="0">
+                          <a:solidFill>
+                            <a:schemeClr val="tx1"/>
+                          </a:solidFill>
+                          <a:latin typeface="Arial"/>
+                        </a:rPr>
+                        <a:t>МЭ</a:t>
+                      </a:r>
+                    </a:p>
+                  </a:txBody>
+                  <a:tcPr marL="72000" marR="36000" marT="18000" marB="18000" anchor="ctr">
+                    <a:lnL w="12700">
+                      <a:solidFill>
+                        <a:schemeClr val="bg1">
+                          <a:lumMod val="50000"/>
+                        </a:schemeClr>
+                      </a:solidFill>
+                      <a:prstDash val="solid"/>
+                    </a:lnL>
+                    <a:lnR>
+                      <a:noFill/>
+                    </a:lnR>
+                    <a:lnT w="12700">
+                      <a:solidFill>
+                        <a:schemeClr val="bg1">
+                          <a:lumMod val="50000"/>
+                        </a:schemeClr>
+                      </a:solidFill>
+                      <a:prstDash val="solid"/>
+                    </a:lnT>
+                    <a:lnB w="12700">
+                      <a:solidFill>
+                        <a:schemeClr val="bg1">
+                          <a:lumMod val="50000"/>
+                        </a:schemeClr>
+                      </a:solidFill>
+                      <a:prstDash val="solid"/>
+                    </a:lnB>
+                    <a:noFill/>
+                  </a:tcPr>
+                </a:tc>
+                <a:tc>
+                  <a:txBody>
+                    <a:bodyPr/>
+                    <a:lstStyle/>
+                    <a:p>
+                      <a:pPr algn="ctr"/>
+                      <a:r>
+                        <a:rPr lang="ru-RU" sz="1000" b="1" i="0" dirty="0">
+                          <a:solidFill>
+                            <a:schemeClr val="tx1"/>
+                          </a:solidFill>
+                          <a:latin typeface="Arial"/>
+                        </a:rPr>
+                        <a:t>563</a:t>
+                      </a:r>
+                    </a:p>
+                  </a:txBody>
+                  <a:tcPr marL="36000" marR="36000" marT="18000" marB="18000" anchor="ctr">
+                    <a:lnL>
+                      <a:noFill/>
+                    </a:lnL>
+                    <a:lnR>
+                      <a:noFill/>
+                    </a:lnR>
+                    <a:lnT w="12700">
+                      <a:solidFill>
+                        <a:schemeClr val="bg1">
+                          <a:lumMod val="50000"/>
+                        </a:schemeClr>
+                      </a:solidFill>
+                      <a:prstDash val="solid"/>
+                    </a:lnT>
+                    <a:lnB w="12700">
+                      <a:solidFill>
+                        <a:schemeClr val="bg1">
+                          <a:lumMod val="50000"/>
+                        </a:schemeClr>
+                      </a:solidFill>
+                      <a:prstDash val="solid"/>
+                    </a:lnB>
+                    <a:noFill/>
+                  </a:tcPr>
+                </a:tc>
+                <a:tc>
+                  <a:txBody>
+                    <a:bodyPr/>
+                    <a:lstStyle/>
+                    <a:p>
+                      <a:pPr algn="ctr"/>
+                      <a:r>
+                        <a:rPr lang="ru-RU" sz="1000" b="0" i="0" dirty="0">
+                          <a:solidFill>
+                            <a:schemeClr val="tx1"/>
+                          </a:solidFill>
+                          <a:latin typeface="Arial"/>
+                        </a:rPr>
+                        <a:t>340</a:t>
+                      </a:r>
+                    </a:p>
+                  </a:txBody>
+                  <a:tcPr marL="36000" marR="36000" marT="18000" marB="18000" anchor="ctr">
+                    <a:lnL>
+                      <a:noFill/>
+                    </a:lnL>
+                    <a:lnR>
+                      <a:noFill/>
+                    </a:lnR>
+                    <a:lnT w="12700">
+                      <a:solidFill>
+                        <a:schemeClr val="bg1">
+                          <a:lumMod val="50000"/>
+                        </a:schemeClr>
+                      </a:solidFill>
+                      <a:prstDash val="solid"/>
+                    </a:lnT>
+                    <a:lnB w="12700">
+                      <a:solidFill>
+                        <a:schemeClr val="bg1">
+                          <a:lumMod val="50000"/>
+                        </a:schemeClr>
+                      </a:solidFill>
+                      <a:prstDash val="solid"/>
+                    </a:lnB>
+                    <a:noFill/>
+                  </a:tcPr>
+                </a:tc>
+                <a:tc>
+                  <a:txBody>
+                    <a:bodyPr/>
+                    <a:lstStyle/>
+                    <a:p>
+                      <a:pPr algn="ctr"/>
+                      <a:r>
+                        <a:rPr lang="ru-RU" sz="1000" b="0" i="0" dirty="0">
+                          <a:solidFill>
+                            <a:schemeClr val="tx1">
+                              <a:lumMod val="50000"/>
+                              <a:lumOff val="50000"/>
+                            </a:schemeClr>
+                          </a:solidFill>
+                          <a:latin typeface="Arial"/>
+                        </a:rPr>
+                        <a:t>+223</a:t>
+                      </a:r>
+                    </a:p>
+                  </a:txBody>
+                  <a:tcPr marL="36000" marR="36000" marT="18000" marB="18000" anchor="ctr">
+                    <a:lnL>
+                      <a:noFill/>
+                    </a:lnL>
+                    <a:lnR>
+                      <a:noFill/>
+                    </a:lnR>
+                    <a:lnT w="12700">
+                      <a:solidFill>
+                        <a:schemeClr val="bg1">
+                          <a:lumMod val="50000"/>
+                        </a:schemeClr>
+                      </a:solidFill>
+                      <a:prstDash val="solid"/>
+                    </a:lnT>
+                    <a:lnB w="12700">
+                      <a:solidFill>
+                        <a:schemeClr val="bg1">
+                          <a:lumMod val="50000"/>
+                        </a:schemeClr>
+                      </a:solidFill>
+                      <a:prstDash val="solid"/>
+                    </a:lnB>
+                    <a:noFill/>
+                  </a:tcPr>
+                </a:tc>
+                <a:tc>
+                  <a:txBody>
+                    <a:bodyPr/>
+                    <a:lstStyle/>
+                    <a:p>
+                      <a:pPr algn="ctr"/>
+                      <a:r>
+                        <a:rPr lang="ru-RU" sz="1000" b="0" i="0" dirty="0">
+                          <a:solidFill>
+                            <a:schemeClr val="tx1">
+                              <a:lumMod val="50000"/>
+                              <a:lumOff val="50000"/>
+                            </a:schemeClr>
+                          </a:solidFill>
+                          <a:latin typeface="Arial"/>
+                        </a:rPr>
+                        <a:t>+65,7%</a:t>
+                      </a:r>
+                    </a:p>
+                  </a:txBody>
+                  <a:tcPr marL="36000" marR="36000" marT="18000" marB="18000" anchor="ctr">
+                    <a:lnL>
+                      <a:noFill/>
+                    </a:lnL>
+                    <a:lnR>
+                      <a:noFill/>
+                    </a:lnR>
+                    <a:lnT w="12700">
+                      <a:solidFill>
+                        <a:schemeClr val="bg1">
+                          <a:lumMod val="50000"/>
+                        </a:schemeClr>
+                      </a:solidFill>
+                      <a:prstDash val="solid"/>
+                    </a:lnT>
+                    <a:lnB w="12700">
+                      <a:solidFill>
+                        <a:schemeClr val="bg1">
+                          <a:lumMod val="50000"/>
+                        </a:schemeClr>
+                      </a:solidFill>
+                      <a:prstDash val="solid"/>
+                    </a:lnB>
+                    <a:solidFill>
+                      <a:srgbClr val="C6EFCE"/>
+                    </a:solidFill>
+                  </a:tcPr>
+                </a:tc>
+                <a:tc>
+                  <a:txBody>
+                    <a:bodyPr/>
+                    <a:lstStyle/>
+                    <a:p>
+                      <a:pPr algn="ctr"/>
+                      <a:r>
+                        <a:rPr lang="ru-RU" sz="1000" b="0" i="0" dirty="0">
+                          <a:solidFill>
+                            <a:schemeClr val="tx1"/>
+                          </a:solidFill>
+                          <a:latin typeface="Arial"/>
+                        </a:rPr>
+                        <a:t>–</a:t>
+                      </a:r>
+                    </a:p>
+                  </a:txBody>
+                  <a:tcPr marL="36000" marR="36000" marT="18000" marB="18000" anchor="ctr">
+                    <a:lnL>
+                      <a:noFill/>
+                    </a:lnL>
+                    <a:lnR>
+                      <a:noFill/>
+                    </a:lnR>
+                    <a:lnT w="12700">
+                      <a:solidFill>
+                        <a:schemeClr val="bg1">
+                          <a:lumMod val="50000"/>
+                        </a:schemeClr>
+                      </a:solidFill>
+                      <a:prstDash val="solid"/>
+                    </a:lnT>
+                    <a:lnB w="12700">
+                      <a:solidFill>
+                        <a:schemeClr val="bg1">
+                          <a:lumMod val="50000"/>
+                        </a:schemeClr>
+                      </a:solidFill>
+                      <a:prstDash val="solid"/>
+                    </a:lnB>
+                    <a:noFill/>
+                  </a:tcPr>
+                </a:tc>
+                <a:tc>
+                  <a:txBody>
+                    <a:bodyPr/>
+                    <a:lstStyle/>
+                    <a:p>
+                      <a:pPr algn="ctr"/>
+                      <a:r>
+                        <a:rPr lang="ru-RU" sz="1000" b="0" i="0" dirty="0">
+                          <a:solidFill>
+                            <a:schemeClr val="tx1">
+                              <a:lumMod val="50000"/>
+                              <a:lumOff val="50000"/>
+                            </a:schemeClr>
+                          </a:solidFill>
+                          <a:latin typeface="Arial"/>
+                        </a:rPr>
+                        <a:t>н/п</a:t>
+                      </a:r>
+                    </a:p>
+                  </a:txBody>
+                  <a:tcPr marL="36000" marR="36000" marT="18000" marB="18000" anchor="ctr">
+                    <a:lnL>
+                      <a:noFill/>
+                    </a:lnL>
+                    <a:lnR>
+                      <a:noFill/>
+                    </a:lnR>
+                    <a:lnT w="12700">
+                      <a:solidFill>
+                        <a:schemeClr val="bg1">
+                          <a:lumMod val="50000"/>
+                        </a:schemeClr>
+                      </a:solidFill>
+                      <a:prstDash val="solid"/>
+                    </a:lnT>
+                    <a:lnB w="12700">
+                      <a:solidFill>
+                        <a:schemeClr val="bg1">
+                          <a:lumMod val="50000"/>
+                        </a:schemeClr>
+                      </a:solidFill>
+                      <a:prstDash val="solid"/>
+                    </a:lnB>
+                    <a:noFill/>
+                  </a:tcPr>
+                </a:tc>
+                <a:tc>
+                  <a:txBody>
+                    <a:bodyPr/>
+                    <a:lstStyle/>
+                    <a:p>
+                      <a:pPr algn="l"/>
+                      <a:r>
+                        <a:rPr lang="ru-RU" sz="1000" b="1" i="0" dirty="0">
+                          <a:solidFill>
+                            <a:schemeClr val="tx1"/>
+                          </a:solidFill>
+                          <a:latin typeface="Arial"/>
+                        </a:rPr>
+                        <a:t>Instore 532 + Online DMP 31</a:t>
+                      </a:r>
+                    </a:p>
+                  </a:txBody>
+                  <a:tcPr marL="72000" marR="36000" marT="18000" marB="18000" anchor="ctr">
+                    <a:lnL>
+                      <a:noFill/>
+                    </a:lnL>
+                    <a:lnR w="12700">
+                      <a:solidFill>
+                        <a:schemeClr val="bg1">
+                          <a:lumMod val="50000"/>
+                        </a:schemeClr>
+                      </a:solidFill>
+                      <a:prstDash val="solid"/>
+                    </a:lnR>
+                    <a:lnT w="12700">
+                      <a:solidFill>
+                        <a:schemeClr val="bg1">
+                          <a:lumMod val="50000"/>
+                        </a:schemeClr>
+                      </a:solidFill>
+                      <a:prstDash val="solid"/>
+                    </a:lnT>
+                    <a:lnB w="12700">
+                      <a:solidFill>
+                        <a:schemeClr val="bg1">
+                          <a:lumMod val="50000"/>
+                        </a:schemeClr>
+                      </a:solidFill>
+                      <a:prstDash val="solid"/>
+                    </a:lnB>
+                    <a:noFill/>
+                  </a:tcPr>
+                </a:tc>
+                <a:tc>
+                  <a:txBody>
+                    <a:bodyPr/>
+                    <a:lstStyle/>
+                    <a:p>
+                      <a:endParaRPr lang="ru-RU" sz="1000" dirty="0"/>
+                    </a:p>
+                  </a:txBody>
+                  <a:tcPr>
+                    <a:lnL w="12700">
+                      <a:solidFill>
+                        <a:schemeClr val="bg1">
+                          <a:lumMod val="50000"/>
+                        </a:schemeClr>
+                      </a:solidFill>
+                      <a:prstDash val="solid"/>
+                    </a:lnL>
+                    <a:lnR>
+                      <a:noFill/>
+                    </a:lnR>
+                    <a:lnT>
+                      <a:noFill/>
+                    </a:lnT>
+                    <a:lnB>
+                      <a:noFill/>
+                    </a:lnB>
+                    <a:noFill/>
+                  </a:tcPr>
+                </a:tc>
+                <a:tc>
+                  <a:txBody>
+                    <a:bodyPr/>
+                    <a:lstStyle/>
+                    <a:p>
+                      <a:pPr algn="ctr"/>
+                      <a:r>
+                        <a:rPr lang="ru-RU" sz="1000" b="0" i="0" dirty="0">
+                          <a:solidFill>
+                            <a:schemeClr val="tx1"/>
+                          </a:solidFill>
+                          <a:latin typeface="Arial"/>
+                        </a:rPr>
+                        <a:t>79</a:t>
+                      </a:r>
+                    </a:p>
+                  </a:txBody>
+                  <a:tcPr marL="36000" marR="36000" marT="18000" marB="18000" anchor="ctr">
+                    <a:lnL w="12700">
+                      <a:solidFill>
+                        <a:schemeClr val="bg1">
+                          <a:lumMod val="50000"/>
+                        </a:schemeClr>
+                      </a:solidFill>
+                      <a:prstDash val="solid"/>
+                    </a:lnL>
+                    <a:lnR>
+                      <a:noFill/>
+                    </a:lnR>
+                    <a:lnT w="12700">
+                      <a:solidFill>
+                        <a:schemeClr val="bg1">
+                          <a:lumMod val="50000"/>
+                        </a:schemeClr>
+                      </a:solidFill>
+                      <a:prstDash val="solid"/>
+                    </a:lnT>
+                    <a:lnB w="12700">
+                      <a:solidFill>
+                        <a:schemeClr val="bg1">
+                          <a:lumMod val="50000"/>
+                        </a:schemeClr>
+                      </a:solidFill>
+                      <a:prstDash val="solid"/>
+                    </a:lnB>
+                    <a:noFill/>
+                  </a:tcPr>
+                </a:tc>
+                <a:tc>
+                  <a:txBody>
+                    <a:bodyPr/>
+                    <a:lstStyle/>
+                    <a:p>
+                      <a:pPr algn="ctr"/>
+                      <a:r>
+                        <a:rPr lang="ru-RU" sz="1000" b="0" i="0" dirty="0">
+                          <a:solidFill>
+                            <a:schemeClr val="tx1"/>
+                          </a:solidFill>
+                          <a:latin typeface="Arial"/>
+                        </a:rPr>
+                        <a:t>118</a:t>
+                      </a:r>
+                    </a:p>
+                  </a:txBody>
+                  <a:tcPr marL="36000" marR="36000" marT="18000" marB="18000" anchor="ctr">
+                    <a:lnL>
+                      <a:noFill/>
+                    </a:lnL>
+                    <a:lnR>
+                      <a:noFill/>
+                    </a:lnR>
+                    <a:lnT w="12700">
+                      <a:solidFill>
+                        <a:schemeClr val="bg1">
+                          <a:lumMod val="50000"/>
+                        </a:schemeClr>
+                      </a:solidFill>
+                      <a:prstDash val="solid"/>
+                    </a:lnT>
+                    <a:lnB w="12700">
+                      <a:solidFill>
+                        <a:schemeClr val="bg1">
+                          <a:lumMod val="50000"/>
+                        </a:schemeClr>
+                      </a:solidFill>
+                      <a:prstDash val="solid"/>
+                    </a:lnB>
+                    <a:noFill/>
+                  </a:tcPr>
+                </a:tc>
+                <a:tc>
+                  <a:txBody>
+                    <a:bodyPr/>
+                    <a:lstStyle/>
+                    <a:p>
+                      <a:pPr algn="ctr"/>
+                      <a:r>
+                        <a:rPr lang="ru-RU" sz="1000" b="0" i="0" dirty="0">
+                          <a:solidFill>
+                            <a:schemeClr val="tx1"/>
+                          </a:solidFill>
+                          <a:latin typeface="Arial"/>
+                        </a:rPr>
+                        <a:t>129</a:t>
+                      </a:r>
+                    </a:p>
+                  </a:txBody>
+                  <a:tcPr marL="36000" marR="36000" marT="18000" marB="18000" anchor="ctr">
+                    <a:lnL>
+                      <a:noFill/>
+                    </a:lnL>
+                    <a:lnR>
+                      <a:noFill/>
+                    </a:lnR>
+                    <a:lnT w="12700">
+                      <a:solidFill>
+                        <a:schemeClr val="bg1">
+                          <a:lumMod val="50000"/>
+                        </a:schemeClr>
+                      </a:solidFill>
+                      <a:prstDash val="solid"/>
+                    </a:lnT>
+                    <a:lnB w="12700">
+                      <a:solidFill>
+                        <a:schemeClr val="bg1">
+                          <a:lumMod val="50000"/>
+                        </a:schemeClr>
+                      </a:solidFill>
+                      <a:prstDash val="solid"/>
+                    </a:lnB>
+                    <a:noFill/>
+                  </a:tcPr>
+                </a:tc>
+                <a:tc>
+                  <a:txBody>
+                    <a:bodyPr/>
+                    <a:lstStyle/>
+                    <a:p>
+                      <a:pPr algn="ctr"/>
+                      <a:r>
+                        <a:rPr lang="ru-RU" sz="1000" b="0" i="0" dirty="0">
+                          <a:solidFill>
+                            <a:schemeClr val="tx1"/>
+                          </a:solidFill>
+                          <a:latin typeface="Arial"/>
+                        </a:rPr>
+                        <a:t>236</a:t>
+                      </a:r>
+                    </a:p>
+                  </a:txBody>
+                  <a:tcPr marL="36000" marR="36000" marT="18000" marB="18000" anchor="ctr">
+                    <a:lnL>
+                      <a:noFill/>
+                    </a:lnL>
+                    <a:lnR w="12700">
+                      <a:solidFill>
+                        <a:schemeClr val="bg1">
+                          <a:lumMod val="50000"/>
+                        </a:schemeClr>
+                      </a:solidFill>
+                      <a:prstDash val="solid"/>
+                    </a:lnR>
+                    <a:lnT w="12700">
+                      <a:solidFill>
+                        <a:schemeClr val="bg1">
+                          <a:lumMod val="50000"/>
+                        </a:schemeClr>
+                      </a:solidFill>
+                      <a:prstDash val="solid"/>
+                    </a:lnT>
+                    <a:lnB w="12700">
+                      <a:solidFill>
+                        <a:schemeClr val="bg1">
+                          <a:lumMod val="50000"/>
+                        </a:schemeClr>
+                      </a:solidFill>
+                      <a:prstDash val="solid"/>
+                    </a:lnB>
+                    <a:noFill/>
+                  </a:tcPr>
+                </a:tc>
+              </a:tr>
+              <a:tr h="315000">
+                <a:tc>
+                  <a:txBody>
+                    <a:bodyPr/>
+                    <a:lstStyle/>
+                    <a:p>
+                      <a:pPr algn="l"/>
+                      <a:r>
+                        <a:rPr lang="ru-RU" sz="1000" b="1" i="0" dirty="0">
+                          <a:solidFill>
+                            <a:schemeClr val="tx1"/>
+                          </a:solidFill>
+                          <a:latin typeface="Arial"/>
+                        </a:rPr>
+                        <a:t>МС</a:t>
+                      </a:r>
+                    </a:p>
+                  </a:txBody>
+                  <a:tcPr marL="72000" marR="36000" marT="18000" marB="18000" anchor="ctr">
+                    <a:lnL w="12700">
+                      <a:solidFill>
+                        <a:schemeClr val="bg1">
+                          <a:lumMod val="50000"/>
+                        </a:schemeClr>
+                      </a:solidFill>
+                      <a:prstDash val="solid"/>
+                    </a:lnL>
+                    <a:lnR>
+                      <a:noFill/>
+                    </a:lnR>
+                    <a:lnT w="12700">
+                      <a:solidFill>
+                        <a:schemeClr val="bg1">
+                          <a:lumMod val="50000"/>
+                        </a:schemeClr>
+                      </a:solidFill>
+                      <a:prstDash val="solid"/>
+                    </a:lnT>
+                    <a:lnB w="12700">
+                      <a:solidFill>
+                        <a:schemeClr val="bg1">
+                          <a:lumMod val="50000"/>
+                        </a:schemeClr>
+                      </a:solidFill>
+                      <a:prstDash val="solid"/>
+                    </a:lnB>
+                    <a:noFill/>
+                  </a:tcPr>
+                </a:tc>
+                <a:tc>
+                  <a:txBody>
+                    <a:bodyPr/>
+                    <a:lstStyle/>
+                    <a:p>
+                      <a:pPr algn="ctr"/>
+                      <a:r>
+                        <a:rPr lang="ru-RU" sz="1000" b="1" i="0" dirty="0">
+                          <a:solidFill>
+                            <a:schemeClr val="tx1"/>
+                          </a:solidFill>
+                          <a:latin typeface="Arial"/>
+                        </a:rPr>
+                        <a:t>251</a:t>
+                      </a:r>
+                    </a:p>
+                  </a:txBody>
+                  <a:tcPr marL="36000" marR="36000" marT="18000" marB="18000" anchor="ctr">
+                    <a:lnL>
+                      <a:noFill/>
+                    </a:lnL>
+                    <a:lnR>
+                      <a:noFill/>
+                    </a:lnR>
+                    <a:lnT w="12700">
+                      <a:solidFill>
+                        <a:schemeClr val="bg1">
+                          <a:lumMod val="50000"/>
+                        </a:schemeClr>
+                      </a:solidFill>
+                      <a:prstDash val="solid"/>
+                    </a:lnT>
+                    <a:lnB w="12700">
+                      <a:solidFill>
+                        <a:schemeClr val="bg1">
+                          <a:lumMod val="50000"/>
+                        </a:schemeClr>
+                      </a:solidFill>
+                      <a:prstDash val="solid"/>
+                    </a:lnB>
+                    <a:noFill/>
+                  </a:tcPr>
+                </a:tc>
+                <a:tc>
+                  <a:txBody>
+                    <a:bodyPr/>
+                    <a:lstStyle/>
+                    <a:p>
+                      <a:pPr algn="ctr"/>
+                      <a:r>
+                        <a:rPr lang="ru-RU" sz="1000" b="0" i="0" dirty="0">
+                          <a:solidFill>
+                            <a:schemeClr val="tx1"/>
+                          </a:solidFill>
+                          <a:latin typeface="Arial"/>
+                        </a:rPr>
+                        <a:t>152</a:t>
+                      </a:r>
+                    </a:p>
+                  </a:txBody>
+                  <a:tcPr marL="36000" marR="36000" marT="18000" marB="18000" anchor="ctr">
+                    <a:lnL>
+                      <a:noFill/>
+                    </a:lnL>
+                    <a:lnR>
+                      <a:noFill/>
+                    </a:lnR>
+                    <a:lnT w="12700">
+                      <a:solidFill>
+                        <a:schemeClr val="bg1">
+                          <a:lumMod val="50000"/>
+                        </a:schemeClr>
+                      </a:solidFill>
+                      <a:prstDash val="solid"/>
+                    </a:lnT>
+                    <a:lnB w="12700">
+                      <a:solidFill>
+                        <a:schemeClr val="bg1">
+                          <a:lumMod val="50000"/>
+                        </a:schemeClr>
+                      </a:solidFill>
+                      <a:prstDash val="solid"/>
+                    </a:lnB>
+                    <a:noFill/>
+                  </a:tcPr>
+                </a:tc>
+                <a:tc>
+                  <a:txBody>
+                    <a:bodyPr/>
+                    <a:lstStyle/>
+                    <a:p>
+                      <a:pPr algn="ctr"/>
+                      <a:r>
+                        <a:rPr lang="ru-RU" sz="1000" b="0" i="0" dirty="0">
+                          <a:solidFill>
+                            <a:schemeClr val="tx1">
+                              <a:lumMod val="50000"/>
+                              <a:lumOff val="50000"/>
+                            </a:schemeClr>
+                          </a:solidFill>
+                          <a:latin typeface="Arial"/>
+                        </a:rPr>
+                        <a:t>+100</a:t>
+                      </a:r>
+                    </a:p>
+                  </a:txBody>
+                  <a:tcPr marL="36000" marR="36000" marT="18000" marB="18000" anchor="ctr">
+                    <a:lnL>
+                      <a:noFill/>
+                    </a:lnL>
+                    <a:lnR>
+                      <a:noFill/>
+                    </a:lnR>
+                    <a:lnT w="12700">
+                      <a:solidFill>
+                        <a:schemeClr val="bg1">
+                          <a:lumMod val="50000"/>
+                        </a:schemeClr>
+                      </a:solidFill>
+                      <a:prstDash val="solid"/>
+                    </a:lnT>
+                    <a:lnB w="12700">
+                      <a:solidFill>
+                        <a:schemeClr val="bg1">
+                          <a:lumMod val="50000"/>
+                        </a:schemeClr>
+                      </a:solidFill>
+                      <a:prstDash val="solid"/>
+                    </a:lnB>
+                    <a:noFill/>
+                  </a:tcPr>
+                </a:tc>
+                <a:tc>
+                  <a:txBody>
+                    <a:bodyPr/>
+                    <a:lstStyle/>
+                    <a:p>
+                      <a:pPr algn="ctr"/>
+                      <a:r>
+                        <a:rPr lang="ru-RU" sz="1000" b="0" i="0" dirty="0">
+                          <a:solidFill>
+                            <a:schemeClr val="tx1">
+                              <a:lumMod val="50000"/>
+                              <a:lumOff val="50000"/>
+                            </a:schemeClr>
+                          </a:solidFill>
+                          <a:latin typeface="Arial"/>
+                        </a:rPr>
+                        <a:t>+65,7%</a:t>
+                      </a:r>
+                    </a:p>
+                  </a:txBody>
+                  <a:tcPr marL="36000" marR="36000" marT="18000" marB="18000" anchor="ctr">
+                    <a:lnL>
+                      <a:noFill/>
+                    </a:lnL>
+                    <a:lnR>
+                      <a:noFill/>
+                    </a:lnR>
+                    <a:lnT w="12700">
+                      <a:solidFill>
+                        <a:schemeClr val="bg1">
+                          <a:lumMod val="50000"/>
+                        </a:schemeClr>
+                      </a:solidFill>
+                      <a:prstDash val="solid"/>
+                    </a:lnT>
+                    <a:lnB w="12700">
+                      <a:solidFill>
+                        <a:schemeClr val="bg1">
+                          <a:lumMod val="50000"/>
+                        </a:schemeClr>
+                      </a:solidFill>
+                      <a:prstDash val="solid"/>
+                    </a:lnB>
+                    <a:solidFill>
+                      <a:srgbClr val="C6EFCE"/>
+                    </a:solidFill>
+                  </a:tcPr>
+                </a:tc>
+                <a:tc>
+                  <a:txBody>
+                    <a:bodyPr/>
+                    <a:lstStyle/>
+                    <a:p>
+                      <a:pPr algn="ctr"/>
+                      <a:r>
+                        <a:rPr lang="ru-RU" sz="1000" b="0" i="0" dirty="0">
+                          <a:solidFill>
+                            <a:schemeClr val="tx1"/>
+                          </a:solidFill>
+                          <a:latin typeface="Arial"/>
+                        </a:rPr>
+                        <a:t>–</a:t>
+                      </a:r>
+                    </a:p>
+                  </a:txBody>
+                  <a:tcPr marL="36000" marR="36000" marT="18000" marB="18000" anchor="ctr">
+                    <a:lnL>
+                      <a:noFill/>
+                    </a:lnL>
+                    <a:lnR>
+                      <a:noFill/>
+                    </a:lnR>
+                    <a:lnT w="12700">
+                      <a:solidFill>
+                        <a:schemeClr val="bg1">
+                          <a:lumMod val="50000"/>
+                        </a:schemeClr>
+                      </a:solidFill>
+                      <a:prstDash val="solid"/>
+                    </a:lnT>
+                    <a:lnB w="12700">
+                      <a:solidFill>
+                        <a:schemeClr val="bg1">
+                          <a:lumMod val="50000"/>
+                        </a:schemeClr>
+                      </a:solidFill>
+                      <a:prstDash val="solid"/>
+                    </a:lnB>
+                    <a:noFill/>
+                  </a:tcPr>
+                </a:tc>
+                <a:tc>
+                  <a:txBody>
+                    <a:bodyPr/>
+                    <a:lstStyle/>
+                    <a:p>
+                      <a:pPr algn="ctr"/>
+                      <a:r>
+                        <a:rPr lang="ru-RU" sz="1000" b="0" i="0" dirty="0">
+                          <a:solidFill>
+                            <a:schemeClr val="tx1">
+                              <a:lumMod val="50000"/>
+                              <a:lumOff val="50000"/>
+                            </a:schemeClr>
+                          </a:solidFill>
+                          <a:latin typeface="Arial"/>
+                        </a:rPr>
+                        <a:t>н/п</a:t>
+                      </a:r>
+                    </a:p>
+                  </a:txBody>
+                  <a:tcPr marL="36000" marR="36000" marT="18000" marB="18000" anchor="ctr">
+                    <a:lnL>
+                      <a:noFill/>
+                    </a:lnL>
+                    <a:lnR>
+                      <a:noFill/>
+                    </a:lnR>
+                    <a:lnT w="12700">
+                      <a:solidFill>
+                        <a:schemeClr val="bg1">
+                          <a:lumMod val="50000"/>
+                        </a:schemeClr>
+                      </a:solidFill>
+                      <a:prstDash val="solid"/>
+                    </a:lnT>
+                    <a:lnB w="12700">
+                      <a:solidFill>
+                        <a:schemeClr val="bg1">
+                          <a:lumMod val="50000"/>
+                        </a:schemeClr>
+                      </a:solidFill>
+                      <a:prstDash val="solid"/>
+                    </a:lnB>
+                    <a:noFill/>
+                  </a:tcPr>
+                </a:tc>
+                <a:tc>
+                  <a:txBody>
+                    <a:bodyPr/>
+                    <a:lstStyle/>
+                    <a:p>
+                      <a:pPr algn="l"/>
+                      <a:r>
+                        <a:rPr lang="ru-RU" sz="1000" b="1" i="0" dirty="0">
+                          <a:solidFill>
+                            <a:schemeClr val="tx1"/>
+                          </a:solidFill>
+                          <a:latin typeface="Arial"/>
+                        </a:rPr>
+                        <a:t>Instore 241 + Online DMP 10</a:t>
+                      </a:r>
+                    </a:p>
+                  </a:txBody>
+                  <a:tcPr marL="72000" marR="36000" marT="18000" marB="18000" anchor="ctr">
+                    <a:lnL>
+                      <a:noFill/>
+                    </a:lnL>
+                    <a:lnR w="12700">
+                      <a:solidFill>
+                        <a:schemeClr val="bg1">
+                          <a:lumMod val="50000"/>
+                        </a:schemeClr>
+                      </a:solidFill>
+                      <a:prstDash val="solid"/>
+                    </a:lnR>
+                    <a:lnT w="12700">
+                      <a:solidFill>
+                        <a:schemeClr val="bg1">
+                          <a:lumMod val="50000"/>
+                        </a:schemeClr>
+                      </a:solidFill>
+                      <a:prstDash val="solid"/>
+                    </a:lnT>
+                    <a:lnB w="12700">
+                      <a:solidFill>
+                        <a:schemeClr val="bg1">
+                          <a:lumMod val="50000"/>
+                        </a:schemeClr>
+                      </a:solidFill>
+                      <a:prstDash val="solid"/>
+                    </a:lnB>
+                    <a:noFill/>
+                  </a:tcPr>
+                </a:tc>
+                <a:tc>
+                  <a:txBody>
+                    <a:bodyPr/>
+                    <a:lstStyle/>
+                    <a:p>
+                      <a:endParaRPr lang="ru-RU" sz="1000" dirty="0"/>
+                    </a:p>
+                  </a:txBody>
+                  <a:tcPr>
+                    <a:lnL w="12700">
+                      <a:solidFill>
+                        <a:schemeClr val="bg1">
+                          <a:lumMod val="50000"/>
+                        </a:schemeClr>
+                      </a:solidFill>
+                      <a:prstDash val="solid"/>
+                    </a:lnL>
+                    <a:lnR>
+                      <a:noFill/>
+                    </a:lnR>
+                    <a:lnT>
+                      <a:noFill/>
+                    </a:lnT>
+                    <a:lnB>
+                      <a:noFill/>
+                    </a:lnB>
+                    <a:noFill/>
+                  </a:tcPr>
+                </a:tc>
+                <a:tc>
+                  <a:txBody>
+                    <a:bodyPr/>
+                    <a:lstStyle/>
+                    <a:p>
+                      <a:pPr algn="ctr"/>
+                      <a:r>
+                        <a:rPr lang="ru-RU" sz="1000" b="0" i="0" dirty="0">
+                          <a:solidFill>
+                            <a:schemeClr val="tx1"/>
+                          </a:solidFill>
+                          <a:latin typeface="Arial"/>
+                        </a:rPr>
+                        <a:t>35</a:t>
+                      </a:r>
+                    </a:p>
+                  </a:txBody>
+                  <a:tcPr marL="36000" marR="36000" marT="18000" marB="18000" anchor="ctr">
+                    <a:lnL w="12700">
+                      <a:solidFill>
+                        <a:schemeClr val="bg1">
+                          <a:lumMod val="50000"/>
+                        </a:schemeClr>
+                      </a:solidFill>
+                      <a:prstDash val="solid"/>
+                    </a:lnL>
+                    <a:lnR>
+                      <a:noFill/>
+                    </a:lnR>
+                    <a:lnT w="12700">
+                      <a:solidFill>
+                        <a:schemeClr val="bg1">
+                          <a:lumMod val="50000"/>
+                        </a:schemeClr>
+                      </a:solidFill>
+                      <a:prstDash val="solid"/>
+                    </a:lnT>
+                    <a:lnB w="12700">
+                      <a:solidFill>
+                        <a:schemeClr val="bg1">
+                          <a:lumMod val="50000"/>
+                        </a:schemeClr>
+                      </a:solidFill>
+                      <a:prstDash val="solid"/>
+                    </a:lnB>
+                    <a:noFill/>
+                  </a:tcPr>
+                </a:tc>
+                <a:tc>
+                  <a:txBody>
+                    <a:bodyPr/>
+                    <a:lstStyle/>
+                    <a:p>
+                      <a:pPr algn="ctr"/>
+                      <a:r>
+                        <a:rPr lang="ru-RU" sz="1000" b="0" i="0" dirty="0">
+                          <a:solidFill>
+                            <a:schemeClr val="tx1"/>
+                          </a:solidFill>
+                          <a:latin typeface="Arial"/>
+                        </a:rPr>
+                        <a:t>53</a:t>
+                      </a:r>
+                    </a:p>
+                  </a:txBody>
+                  <a:tcPr marL="36000" marR="36000" marT="18000" marB="18000" anchor="ctr">
+                    <a:lnL>
+                      <a:noFill/>
+                    </a:lnL>
+                    <a:lnR>
+                      <a:noFill/>
+                    </a:lnR>
+                    <a:lnT w="12700">
+                      <a:solidFill>
+                        <a:schemeClr val="bg1">
+                          <a:lumMod val="50000"/>
+                        </a:schemeClr>
+                      </a:solidFill>
+                      <a:prstDash val="solid"/>
+                    </a:lnT>
+                    <a:lnB w="12700">
+                      <a:solidFill>
+                        <a:schemeClr val="bg1">
+                          <a:lumMod val="50000"/>
+                        </a:schemeClr>
+                      </a:solidFill>
+                      <a:prstDash val="solid"/>
+                    </a:lnB>
+                    <a:noFill/>
+                  </a:tcPr>
+                </a:tc>
+                <a:tc>
+                  <a:txBody>
+                    <a:bodyPr/>
+                    <a:lstStyle/>
+                    <a:p>
+                      <a:pPr algn="ctr"/>
+                      <a:r>
+                        <a:rPr lang="ru-RU" sz="1000" b="0" i="0" dirty="0">
+                          <a:solidFill>
+                            <a:schemeClr val="tx1"/>
+                          </a:solidFill>
+                          <a:latin typeface="Arial"/>
+                        </a:rPr>
+                        <a:t>58</a:t>
+                      </a:r>
+                    </a:p>
+                  </a:txBody>
+                  <a:tcPr marL="36000" marR="36000" marT="18000" marB="18000" anchor="ctr">
+                    <a:lnL>
+                      <a:noFill/>
+                    </a:lnL>
+                    <a:lnR>
+                      <a:noFill/>
+                    </a:lnR>
+                    <a:lnT w="12700">
+                      <a:solidFill>
+                        <a:schemeClr val="bg1">
+                          <a:lumMod val="50000"/>
+                        </a:schemeClr>
+                      </a:solidFill>
+                      <a:prstDash val="solid"/>
+                    </a:lnT>
+                    <a:lnB w="12700">
+                      <a:solidFill>
+                        <a:schemeClr val="bg1">
+                          <a:lumMod val="50000"/>
+                        </a:schemeClr>
+                      </a:solidFill>
+                      <a:prstDash val="solid"/>
+                    </a:lnB>
+                    <a:noFill/>
+                  </a:tcPr>
+                </a:tc>
+                <a:tc>
+                  <a:txBody>
+                    <a:bodyPr/>
+                    <a:lstStyle/>
+                    <a:p>
+                      <a:pPr algn="ctr"/>
+                      <a:r>
+                        <a:rPr lang="ru-RU" sz="1000" b="0" i="0" dirty="0">
+                          <a:solidFill>
+                            <a:schemeClr val="tx1"/>
+                          </a:solidFill>
+                          <a:latin typeface="Arial"/>
+                        </a:rPr>
+                        <a:t>106</a:t>
+                      </a:r>
+                    </a:p>
+                  </a:txBody>
+                  <a:tcPr marL="36000" marR="36000" marT="18000" marB="18000" anchor="ctr">
+                    <a:lnL>
+                      <a:noFill/>
+                    </a:lnL>
+                    <a:lnR w="12700">
+                      <a:solidFill>
+                        <a:schemeClr val="bg1">
+                          <a:lumMod val="50000"/>
+                        </a:schemeClr>
+                      </a:solidFill>
+                      <a:prstDash val="solid"/>
+                    </a:lnR>
+                    <a:lnT w="12700">
+                      <a:solidFill>
+                        <a:schemeClr val="bg1">
+                          <a:lumMod val="50000"/>
+                        </a:schemeClr>
+                      </a:solidFill>
+                      <a:prstDash val="solid"/>
+                    </a:lnT>
+                    <a:lnB w="12700">
+                      <a:solidFill>
+                        <a:schemeClr val="bg1">
+                          <a:lumMod val="50000"/>
+                        </a:schemeClr>
+                      </a:solidFill>
+                      <a:prstDash val="solid"/>
+                    </a:lnB>
+                    <a:noFill/>
+                  </a:tcPr>
+                </a:tc>
+              </a:tr>
+              <a:tr h="315000">
+                <a:tc>
+                  <a:txBody>
+                    <a:bodyPr/>
+                    <a:lstStyle/>
+                    <a:p>
+                      <a:pPr algn="l"/>
+                      <a:r>
+                        <a:rPr lang="ru-RU" sz="1000" b="1" i="0" dirty="0">
+                          <a:solidFill>
+                            <a:schemeClr val="tx1"/>
+                          </a:solidFill>
+                          <a:latin typeface="Arial"/>
+                        </a:rPr>
+                        <a:t>МС Лайт</a:t>
+                      </a:r>
+                    </a:p>
+                  </a:txBody>
+                  <a:tcPr marL="72000" marR="36000" marT="18000" marB="18000" anchor="ctr">
+                    <a:lnL w="12700">
+                      <a:solidFill>
+                        <a:schemeClr val="bg1">
+                          <a:lumMod val="50000"/>
+                        </a:schemeClr>
+                      </a:solidFill>
+                      <a:prstDash val="solid"/>
+                    </a:lnL>
+                    <a:lnR>
+                      <a:noFill/>
+                    </a:lnR>
+                    <a:lnT w="12700">
+                      <a:solidFill>
+                        <a:schemeClr val="bg1">
+                          <a:lumMod val="50000"/>
+                        </a:schemeClr>
+                      </a:solidFill>
+                      <a:prstDash val="solid"/>
+                    </a:lnT>
+                    <a:lnB w="12700">
+                      <a:solidFill>
+                        <a:schemeClr val="bg1">
+                          <a:lumMod val="50000"/>
+                        </a:schemeClr>
+                      </a:solidFill>
+                      <a:prstDash val="solid"/>
+                    </a:lnB>
+                    <a:noFill/>
+                  </a:tcPr>
+                </a:tc>
+                <a:tc>
+                  <a:txBody>
+                    <a:bodyPr/>
+                    <a:lstStyle/>
+                    <a:p>
+                      <a:pPr algn="ctr"/>
+                      <a:r>
+                        <a:rPr lang="ru-RU" sz="1000" b="1" i="0" dirty="0">
+                          <a:solidFill>
+                            <a:schemeClr val="tx1"/>
+                          </a:solidFill>
+                          <a:latin typeface="Arial"/>
+                        </a:rPr>
+                        <a:t>118</a:t>
+                      </a:r>
+                    </a:p>
+                  </a:txBody>
+                  <a:tcPr marL="36000" marR="36000" marT="18000" marB="18000" anchor="ctr">
+                    <a:lnL>
+                      <a:noFill/>
+                    </a:lnL>
+                    <a:lnR>
+                      <a:noFill/>
+                    </a:lnR>
+                    <a:lnT w="12700">
+                      <a:solidFill>
+                        <a:schemeClr val="bg1">
+                          <a:lumMod val="50000"/>
+                        </a:schemeClr>
+                      </a:solidFill>
+                      <a:prstDash val="solid"/>
+                    </a:lnT>
+                    <a:lnB w="12700">
+                      <a:solidFill>
+                        <a:schemeClr val="bg1">
+                          <a:lumMod val="50000"/>
+                        </a:schemeClr>
+                      </a:solidFill>
+                      <a:prstDash val="solid"/>
+                    </a:lnB>
+                    <a:noFill/>
+                  </a:tcPr>
+                </a:tc>
+                <a:tc>
+                  <a:txBody>
+                    <a:bodyPr/>
+                    <a:lstStyle/>
+                    <a:p>
+                      <a:pPr algn="ctr"/>
+                      <a:r>
+                        <a:rPr lang="ru-RU" sz="1000" b="0" i="0" dirty="0">
+                          <a:solidFill>
+                            <a:schemeClr val="tx1"/>
+                          </a:solidFill>
+                          <a:latin typeface="Arial"/>
+                        </a:rPr>
+                        <a:t>71</a:t>
+                      </a:r>
+                    </a:p>
+                  </a:txBody>
+                  <a:tcPr marL="36000" marR="36000" marT="18000" marB="18000" anchor="ctr">
+                    <a:lnL>
+                      <a:noFill/>
+                    </a:lnL>
+                    <a:lnR>
+                      <a:noFill/>
+                    </a:lnR>
+                    <a:lnT w="12700">
+                      <a:solidFill>
+                        <a:schemeClr val="bg1">
+                          <a:lumMod val="50000"/>
+                        </a:schemeClr>
+                      </a:solidFill>
+                      <a:prstDash val="solid"/>
+                    </a:lnT>
+                    <a:lnB w="12700">
+                      <a:solidFill>
+                        <a:schemeClr val="bg1">
+                          <a:lumMod val="50000"/>
+                        </a:schemeClr>
+                      </a:solidFill>
+                      <a:prstDash val="solid"/>
+                    </a:lnB>
+                    <a:noFill/>
+                  </a:tcPr>
+                </a:tc>
+                <a:tc>
+                  <a:txBody>
+                    <a:bodyPr/>
+                    <a:lstStyle/>
+                    <a:p>
+                      <a:pPr algn="ctr"/>
+                      <a:r>
+                        <a:rPr lang="ru-RU" sz="1000" b="0" i="0" dirty="0">
+                          <a:solidFill>
+                            <a:schemeClr val="tx1">
+                              <a:lumMod val="50000"/>
+                              <a:lumOff val="50000"/>
+                            </a:schemeClr>
+                          </a:solidFill>
+                          <a:latin typeface="Arial"/>
+                        </a:rPr>
+                        <a:t>+47</a:t>
+                      </a:r>
+                    </a:p>
+                  </a:txBody>
+                  <a:tcPr marL="36000" marR="36000" marT="18000" marB="18000" anchor="ctr">
+                    <a:lnL>
+                      <a:noFill/>
+                    </a:lnL>
+                    <a:lnR>
+                      <a:noFill/>
+                    </a:lnR>
+                    <a:lnT w="12700">
+                      <a:solidFill>
+                        <a:schemeClr val="bg1">
+                          <a:lumMod val="50000"/>
+                        </a:schemeClr>
+                      </a:solidFill>
+                      <a:prstDash val="solid"/>
+                    </a:lnT>
+                    <a:lnB w="12700">
+                      <a:solidFill>
+                        <a:schemeClr val="bg1">
+                          <a:lumMod val="50000"/>
+                        </a:schemeClr>
+                      </a:solidFill>
+                      <a:prstDash val="solid"/>
+                    </a:lnB>
+                    <a:noFill/>
+                  </a:tcPr>
+                </a:tc>
+                <a:tc>
+                  <a:txBody>
+                    <a:bodyPr/>
+                    <a:lstStyle/>
+                    <a:p>
+                      <a:pPr algn="ctr"/>
+                      <a:r>
+                        <a:rPr lang="ru-RU" sz="1000" b="0" i="0" dirty="0">
+                          <a:solidFill>
+                            <a:schemeClr val="tx1">
+                              <a:lumMod val="50000"/>
+                              <a:lumOff val="50000"/>
+                            </a:schemeClr>
+                          </a:solidFill>
+                          <a:latin typeface="Arial"/>
+                        </a:rPr>
+                        <a:t>+65,9%</a:t>
+                      </a:r>
+                    </a:p>
+                  </a:txBody>
+                  <a:tcPr marL="36000" marR="36000" marT="18000" marB="18000" anchor="ctr">
+                    <a:lnL>
+                      <a:noFill/>
+                    </a:lnL>
+                    <a:lnR>
+                      <a:noFill/>
+                    </a:lnR>
+                    <a:lnT w="12700">
+                      <a:solidFill>
+                        <a:schemeClr val="bg1">
+                          <a:lumMod val="50000"/>
+                        </a:schemeClr>
+                      </a:solidFill>
+                      <a:prstDash val="solid"/>
+                    </a:lnT>
+                    <a:lnB w="12700">
+                      <a:solidFill>
+                        <a:schemeClr val="bg1">
+                          <a:lumMod val="50000"/>
+                        </a:schemeClr>
+                      </a:solidFill>
+                      <a:prstDash val="solid"/>
+                    </a:lnB>
+                    <a:solidFill>
+                      <a:srgbClr val="C6EFCE"/>
+                    </a:solidFill>
+                  </a:tcPr>
+                </a:tc>
+                <a:tc>
+                  <a:txBody>
+                    <a:bodyPr/>
+                    <a:lstStyle/>
+                    <a:p>
+                      <a:pPr algn="ctr"/>
+                      <a:r>
+                        <a:rPr lang="ru-RU" sz="1000" b="0" i="0" dirty="0">
+                          <a:solidFill>
+                            <a:schemeClr val="tx1"/>
+                          </a:solidFill>
+                          <a:latin typeface="Arial"/>
+                        </a:rPr>
+                        <a:t>–</a:t>
+                      </a:r>
+                    </a:p>
+                  </a:txBody>
+                  <a:tcPr marL="36000" marR="36000" marT="18000" marB="18000" anchor="ctr">
+                    <a:lnL>
+                      <a:noFill/>
+                    </a:lnL>
+                    <a:lnR>
+                      <a:noFill/>
+                    </a:lnR>
+                    <a:lnT w="12700">
+                      <a:solidFill>
+                        <a:schemeClr val="bg1">
+                          <a:lumMod val="50000"/>
+                        </a:schemeClr>
+                      </a:solidFill>
+                      <a:prstDash val="solid"/>
+                    </a:lnT>
+                    <a:lnB w="12700">
+                      <a:solidFill>
+                        <a:schemeClr val="bg1">
+                          <a:lumMod val="50000"/>
+                        </a:schemeClr>
+                      </a:solidFill>
+                      <a:prstDash val="solid"/>
+                    </a:lnB>
+                    <a:noFill/>
+                  </a:tcPr>
+                </a:tc>
+                <a:tc>
+                  <a:txBody>
+                    <a:bodyPr/>
+                    <a:lstStyle/>
+                    <a:p>
+                      <a:pPr algn="ctr"/>
+                      <a:r>
+                        <a:rPr lang="ru-RU" sz="1000" b="0" i="0" dirty="0">
+                          <a:solidFill>
+                            <a:schemeClr val="tx1">
+                              <a:lumMod val="50000"/>
+                              <a:lumOff val="50000"/>
+                            </a:schemeClr>
+                          </a:solidFill>
+                          <a:latin typeface="Arial"/>
+                        </a:rPr>
+                        <a:t>н/п</a:t>
+                      </a:r>
+                    </a:p>
+                  </a:txBody>
+                  <a:tcPr marL="36000" marR="36000" marT="18000" marB="18000" anchor="ctr">
+                    <a:lnL>
+                      <a:noFill/>
+                    </a:lnL>
+                    <a:lnR>
+                      <a:noFill/>
+                    </a:lnR>
+                    <a:lnT w="12700">
+                      <a:solidFill>
+                        <a:schemeClr val="bg1">
+                          <a:lumMod val="50000"/>
+                        </a:schemeClr>
+                      </a:solidFill>
+                      <a:prstDash val="solid"/>
+                    </a:lnT>
+                    <a:lnB w="12700">
+                      <a:solidFill>
+                        <a:schemeClr val="bg1">
+                          <a:lumMod val="50000"/>
+                        </a:schemeClr>
+                      </a:solidFill>
+                      <a:prstDash val="solid"/>
+                    </a:lnB>
+                    <a:noFill/>
+                  </a:tcPr>
+                </a:tc>
+                <a:tc>
+                  <a:txBody>
+                    <a:bodyPr/>
+                    <a:lstStyle/>
+                    <a:p>
+                      <a:pPr algn="l"/>
+                      <a:r>
+                        <a:rPr lang="ru-RU" sz="1000" b="1" i="0" dirty="0">
+                          <a:solidFill>
+                            <a:schemeClr val="tx1"/>
+                          </a:solidFill>
+                          <a:latin typeface="Arial"/>
+                        </a:rPr>
+                        <a:t>Instore</a:t>
+                      </a:r>
+                    </a:p>
+                  </a:txBody>
+                  <a:tcPr marL="72000" marR="36000" marT="18000" marB="18000" anchor="ctr">
+                    <a:lnL>
+                      <a:noFill/>
+                    </a:lnL>
+                    <a:lnR w="12700">
+                      <a:solidFill>
+                        <a:schemeClr val="bg1">
+                          <a:lumMod val="50000"/>
+                        </a:schemeClr>
+                      </a:solidFill>
+                      <a:prstDash val="solid"/>
+                    </a:lnR>
+                    <a:lnT w="12700">
+                      <a:solidFill>
+                        <a:schemeClr val="bg1">
+                          <a:lumMod val="50000"/>
+                        </a:schemeClr>
+                      </a:solidFill>
+                      <a:prstDash val="solid"/>
+                    </a:lnT>
+                    <a:lnB w="12700">
+                      <a:solidFill>
+                        <a:schemeClr val="bg1">
+                          <a:lumMod val="50000"/>
+                        </a:schemeClr>
+                      </a:solidFill>
+                      <a:prstDash val="solid"/>
+                    </a:lnB>
+                    <a:noFill/>
+                  </a:tcPr>
+                </a:tc>
+                <a:tc>
+                  <a:txBody>
+                    <a:bodyPr/>
+                    <a:lstStyle/>
+                    <a:p>
+                      <a:endParaRPr lang="ru-RU" sz="1000" dirty="0"/>
+                    </a:p>
+                  </a:txBody>
+                  <a:tcPr>
+                    <a:lnL w="12700">
+                      <a:solidFill>
+                        <a:schemeClr val="bg1">
+                          <a:lumMod val="50000"/>
+                        </a:schemeClr>
+                      </a:solidFill>
+                      <a:prstDash val="solid"/>
+                    </a:lnL>
+                    <a:lnR>
+                      <a:noFill/>
+                    </a:lnR>
+                    <a:lnT>
+                      <a:noFill/>
+                    </a:lnT>
+                    <a:lnB>
+                      <a:noFill/>
+                    </a:lnB>
+                    <a:noFill/>
+                  </a:tcPr>
+                </a:tc>
+                <a:tc>
+                  <a:txBody>
+                    <a:bodyPr/>
+                    <a:lstStyle/>
+                    <a:p>
+                      <a:pPr algn="ctr"/>
+                      <a:r>
+                        <a:rPr lang="ru-RU" sz="1000" b="0" i="0" dirty="0">
+                          <a:solidFill>
+                            <a:schemeClr val="tx1"/>
+                          </a:solidFill>
+                          <a:latin typeface="Arial"/>
+                        </a:rPr>
+                        <a:t>17</a:t>
+                      </a:r>
+                    </a:p>
+                  </a:txBody>
+                  <a:tcPr marL="36000" marR="36000" marT="18000" marB="18000" anchor="ctr">
+                    <a:lnL w="12700">
+                      <a:solidFill>
+                        <a:schemeClr val="bg1">
+                          <a:lumMod val="50000"/>
+                        </a:schemeClr>
+                      </a:solidFill>
+                      <a:prstDash val="solid"/>
+                    </a:lnL>
+                    <a:lnR>
+                      <a:noFill/>
+                    </a:lnR>
+                    <a:lnT w="12700">
+                      <a:solidFill>
+                        <a:schemeClr val="bg1">
+                          <a:lumMod val="50000"/>
+                        </a:schemeClr>
+                      </a:solidFill>
+                      <a:prstDash val="solid"/>
+                    </a:lnT>
+                    <a:lnB w="12700">
+                      <a:solidFill>
+                        <a:schemeClr val="bg1">
+                          <a:lumMod val="50000"/>
+                        </a:schemeClr>
+                      </a:solidFill>
+                      <a:prstDash val="solid"/>
+                    </a:lnB>
+                    <a:noFill/>
+                  </a:tcPr>
+                </a:tc>
+                <a:tc>
+                  <a:txBody>
+                    <a:bodyPr/>
+                    <a:lstStyle/>
+                    <a:p>
+                      <a:pPr algn="ctr"/>
+                      <a:r>
+                        <a:rPr lang="ru-RU" sz="1000" b="0" i="0" dirty="0">
+                          <a:solidFill>
+                            <a:schemeClr val="tx1"/>
+                          </a:solidFill>
+                          <a:latin typeface="Arial"/>
+                        </a:rPr>
+                        <a:t>25</a:t>
+                      </a:r>
+                    </a:p>
+                  </a:txBody>
+                  <a:tcPr marL="36000" marR="36000" marT="18000" marB="18000" anchor="ctr">
+                    <a:lnL>
+                      <a:noFill/>
+                    </a:lnL>
+                    <a:lnR>
+                      <a:noFill/>
+                    </a:lnR>
+                    <a:lnT w="12700">
+                      <a:solidFill>
+                        <a:schemeClr val="bg1">
+                          <a:lumMod val="50000"/>
+                        </a:schemeClr>
+                      </a:solidFill>
+                      <a:prstDash val="solid"/>
+                    </a:lnT>
+                    <a:lnB w="12700">
+                      <a:solidFill>
+                        <a:schemeClr val="bg1">
+                          <a:lumMod val="50000"/>
+                        </a:schemeClr>
+                      </a:solidFill>
+                      <a:prstDash val="solid"/>
+                    </a:lnB>
+                    <a:noFill/>
+                  </a:tcPr>
+                </a:tc>
+                <a:tc>
+                  <a:txBody>
+                    <a:bodyPr/>
+                    <a:lstStyle/>
+                    <a:p>
+                      <a:pPr algn="ctr"/>
+                      <a:r>
+                        <a:rPr lang="ru-RU" sz="1000" b="0" i="0" dirty="0">
+                          <a:solidFill>
+                            <a:schemeClr val="tx1"/>
+                          </a:solidFill>
+                          <a:latin typeface="Arial"/>
+                        </a:rPr>
+                        <a:t>27</a:t>
+                      </a:r>
+                    </a:p>
+                  </a:txBody>
+                  <a:tcPr marL="36000" marR="36000" marT="18000" marB="18000" anchor="ctr">
+                    <a:lnL>
+                      <a:noFill/>
+                    </a:lnL>
+                    <a:lnR>
+                      <a:noFill/>
+                    </a:lnR>
+                    <a:lnT w="12700">
+                      <a:solidFill>
+                        <a:schemeClr val="bg1">
+                          <a:lumMod val="50000"/>
+                        </a:schemeClr>
+                      </a:solidFill>
+                      <a:prstDash val="solid"/>
+                    </a:lnT>
+                    <a:lnB w="12700">
+                      <a:solidFill>
+                        <a:schemeClr val="bg1">
+                          <a:lumMod val="50000"/>
+                        </a:schemeClr>
+                      </a:solidFill>
+                      <a:prstDash val="solid"/>
+                    </a:lnB>
+                    <a:noFill/>
+                  </a:tcPr>
+                </a:tc>
+                <a:tc>
+                  <a:txBody>
+                    <a:bodyPr/>
+                    <a:lstStyle/>
+                    <a:p>
+                      <a:pPr algn="ctr"/>
+                      <a:r>
+                        <a:rPr lang="ru-RU" sz="1000" b="0" i="0" dirty="0">
+                          <a:solidFill>
+                            <a:schemeClr val="tx1"/>
+                          </a:solidFill>
+                          <a:latin typeface="Arial"/>
+                        </a:rPr>
+                        <a:t>50</a:t>
+                      </a:r>
+                    </a:p>
+                  </a:txBody>
+                  <a:tcPr marL="36000" marR="36000" marT="18000" marB="18000" anchor="ctr">
+                    <a:lnL>
+                      <a:noFill/>
+                    </a:lnL>
+                    <a:lnR w="12700">
+                      <a:solidFill>
+                        <a:schemeClr val="bg1">
+                          <a:lumMod val="50000"/>
+                        </a:schemeClr>
+                      </a:solidFill>
+                      <a:prstDash val="solid"/>
+                    </a:lnR>
+                    <a:lnT w="12700">
+                      <a:solidFill>
+                        <a:schemeClr val="bg1">
+                          <a:lumMod val="50000"/>
+                        </a:schemeClr>
+                      </a:solidFill>
+                      <a:prstDash val="solid"/>
+                    </a:lnT>
+                    <a:lnB w="12700">
+                      <a:solidFill>
+                        <a:schemeClr val="bg1">
+                          <a:lumMod val="50000"/>
+                        </a:schemeClr>
+                      </a:solidFill>
+                      <a:prstDash val="solid"/>
+                    </a:lnB>
+                    <a:noFill/>
+                  </a:tcPr>
+                </a:tc>
+              </a:tr>
+              <a:tr h="315000">
+                <a:tc>
+                  <a:txBody>
+                    <a:bodyPr/>
+                    <a:lstStyle/>
+                    <a:p>
+                      <a:pPr algn="l"/>
+                      <a:r>
+                        <a:rPr lang="ru-RU" sz="1000" b="1" i="0" dirty="0">
+                          <a:solidFill>
+                            <a:schemeClr val="tx1"/>
+                          </a:solidFill>
+                          <a:latin typeface="Arial"/>
+                        </a:rPr>
+                        <a:t>Без формата</a:t>
+                      </a:r>
+                    </a:p>
+                  </a:txBody>
+                  <a:tcPr marL="72000" marR="36000" marT="18000" marB="18000" anchor="ctr">
+                    <a:lnL w="12700">
+                      <a:solidFill>
+                        <a:schemeClr val="bg1">
+                          <a:lumMod val="50000"/>
+                        </a:schemeClr>
+                      </a:solidFill>
+                      <a:prstDash val="solid"/>
+                    </a:lnL>
+                    <a:lnR>
+                      <a:noFill/>
+                    </a:lnR>
+                    <a:lnT w="12700">
+                      <a:solidFill>
+                        <a:schemeClr val="bg1">
+                          <a:lumMod val="50000"/>
+                        </a:schemeClr>
+                      </a:solidFill>
+                      <a:prstDash val="solid"/>
+                    </a:lnT>
+                    <a:lnB w="12700">
+                      <a:solidFill>
+                        <a:schemeClr val="bg1">
+                          <a:lumMod val="50000"/>
+                        </a:schemeClr>
+                      </a:solidFill>
+                      <a:prstDash val="solid"/>
+                    </a:lnB>
+                    <a:noFill/>
+                  </a:tcPr>
+                </a:tc>
+                <a:tc>
+                  <a:txBody>
+                    <a:bodyPr/>
+                    <a:lstStyle/>
+                    <a:p>
+                      <a:pPr algn="ctr"/>
+                      <a:r>
+                        <a:rPr lang="ru-RU" sz="1000" b="1" i="0" dirty="0">
+                          <a:solidFill>
+                            <a:schemeClr val="tx1"/>
+                          </a:solidFill>
+                          <a:latin typeface="Arial"/>
+                        </a:rPr>
+                        <a:t>1 393</a:t>
+                      </a:r>
+                    </a:p>
+                  </a:txBody>
+                  <a:tcPr marL="36000" marR="36000" marT="18000" marB="18000" anchor="ctr">
+                    <a:lnL>
+                      <a:noFill/>
+                    </a:lnL>
+                    <a:lnR>
+                      <a:noFill/>
+                    </a:lnR>
+                    <a:lnT w="12700">
+                      <a:solidFill>
+                        <a:schemeClr val="bg1">
+                          <a:lumMod val="50000"/>
+                        </a:schemeClr>
+                      </a:solidFill>
+                      <a:prstDash val="solid"/>
+                    </a:lnT>
+                    <a:lnB w="12700">
+                      <a:solidFill>
+                        <a:schemeClr val="bg1">
+                          <a:lumMod val="50000"/>
+                        </a:schemeClr>
+                      </a:solidFill>
+                      <a:prstDash val="solid"/>
+                    </a:lnB>
+                    <a:noFill/>
+                  </a:tcPr>
+                </a:tc>
+                <a:tc>
+                  <a:txBody>
+                    <a:bodyPr/>
+                    <a:lstStyle/>
+                    <a:p>
+                      <a:pPr algn="ctr"/>
+                      <a:r>
+                        <a:rPr lang="ru-RU" sz="1000" b="0" i="0" dirty="0">
+                          <a:solidFill>
+                            <a:schemeClr val="tx1"/>
+                          </a:solidFill>
+                          <a:latin typeface="Arial"/>
+                        </a:rPr>
+                        <a:t>706</a:t>
+                      </a:r>
+                    </a:p>
+                  </a:txBody>
+                  <a:tcPr marL="36000" marR="36000" marT="18000" marB="18000" anchor="ctr">
+                    <a:lnL>
+                      <a:noFill/>
+                    </a:lnL>
+                    <a:lnR>
+                      <a:noFill/>
+                    </a:lnR>
+                    <a:lnT w="12700">
+                      <a:solidFill>
+                        <a:schemeClr val="bg1">
+                          <a:lumMod val="50000"/>
+                        </a:schemeClr>
+                      </a:solidFill>
+                      <a:prstDash val="solid"/>
+                    </a:lnT>
+                    <a:lnB w="12700">
+                      <a:solidFill>
+                        <a:schemeClr val="bg1">
+                          <a:lumMod val="50000"/>
+                        </a:schemeClr>
+                      </a:solidFill>
+                      <a:prstDash val="solid"/>
+                    </a:lnB>
+                    <a:noFill/>
+                  </a:tcPr>
+                </a:tc>
+                <a:tc>
+                  <a:txBody>
+                    <a:bodyPr/>
+                    <a:lstStyle/>
+                    <a:p>
+                      <a:pPr algn="ctr"/>
+                      <a:r>
+                        <a:rPr lang="ru-RU" sz="1000" b="0" i="0" dirty="0">
+                          <a:solidFill>
+                            <a:schemeClr val="tx1">
+                              <a:lumMod val="50000"/>
+                              <a:lumOff val="50000"/>
+                            </a:schemeClr>
+                          </a:solidFill>
+                          <a:latin typeface="Arial"/>
+                        </a:rPr>
+                        <a:t>+686</a:t>
+                      </a:r>
+                    </a:p>
+                  </a:txBody>
+                  <a:tcPr marL="36000" marR="36000" marT="18000" marB="18000" anchor="ctr">
+                    <a:lnL>
+                      <a:noFill/>
+                    </a:lnL>
+                    <a:lnR>
+                      <a:noFill/>
+                    </a:lnR>
+                    <a:lnT w="12700">
+                      <a:solidFill>
+                        <a:schemeClr val="bg1">
+                          <a:lumMod val="50000"/>
+                        </a:schemeClr>
+                      </a:solidFill>
+                      <a:prstDash val="solid"/>
+                    </a:lnT>
+                    <a:lnB w="12700">
+                      <a:solidFill>
+                        <a:schemeClr val="bg1">
+                          <a:lumMod val="50000"/>
+                        </a:schemeClr>
+                      </a:solidFill>
+                      <a:prstDash val="solid"/>
+                    </a:lnB>
+                    <a:noFill/>
+                  </a:tcPr>
+                </a:tc>
+                <a:tc>
+                  <a:txBody>
+                    <a:bodyPr/>
+                    <a:lstStyle/>
+                    <a:p>
+                      <a:pPr algn="ctr"/>
+                      <a:r>
+                        <a:rPr lang="ru-RU" sz="1000" b="0" i="0" dirty="0">
+                          <a:solidFill>
+                            <a:schemeClr val="tx1">
+                              <a:lumMod val="50000"/>
+                              <a:lumOff val="50000"/>
+                            </a:schemeClr>
+                          </a:solidFill>
+                          <a:latin typeface="Arial"/>
+                        </a:rPr>
+                        <a:t>+97,2%</a:t>
+                      </a:r>
+                    </a:p>
+                  </a:txBody>
+                  <a:tcPr marL="36000" marR="36000" marT="18000" marB="18000" anchor="ctr">
+                    <a:lnL>
+                      <a:noFill/>
+                    </a:lnL>
+                    <a:lnR>
+                      <a:noFill/>
+                    </a:lnR>
+                    <a:lnT w="12700">
+                      <a:solidFill>
+                        <a:schemeClr val="bg1">
+                          <a:lumMod val="50000"/>
+                        </a:schemeClr>
+                      </a:solidFill>
+                      <a:prstDash val="solid"/>
+                    </a:lnT>
+                    <a:lnB w="12700">
+                      <a:solidFill>
+                        <a:schemeClr val="bg1">
+                          <a:lumMod val="50000"/>
+                        </a:schemeClr>
+                      </a:solidFill>
+                      <a:prstDash val="solid"/>
+                    </a:lnB>
+                    <a:solidFill>
+                      <a:srgbClr val="C6EFCE"/>
+                    </a:solidFill>
+                  </a:tcPr>
+                </a:tc>
+                <a:tc>
+                  <a:txBody>
+                    <a:bodyPr/>
+                    <a:lstStyle/>
+                    <a:p>
+                      <a:pPr algn="ctr"/>
+                      <a:r>
+                        <a:rPr lang="ru-RU" sz="1000" b="0" i="0" dirty="0">
+                          <a:solidFill>
+                            <a:schemeClr val="tx1"/>
+                          </a:solidFill>
+                          <a:latin typeface="Arial"/>
+                        </a:rPr>
+                        <a:t>–</a:t>
+                      </a:r>
+                    </a:p>
+                  </a:txBody>
+                  <a:tcPr marL="36000" marR="36000" marT="18000" marB="18000" anchor="ctr">
+                    <a:lnL>
+                      <a:noFill/>
+                    </a:lnL>
+                    <a:lnR>
+                      <a:noFill/>
+                    </a:lnR>
+                    <a:lnT w="12700">
+                      <a:solidFill>
+                        <a:schemeClr val="bg1">
+                          <a:lumMod val="50000"/>
+                        </a:schemeClr>
+                      </a:solidFill>
+                      <a:prstDash val="solid"/>
+                    </a:lnT>
+                    <a:lnB w="12700">
+                      <a:solidFill>
+                        <a:schemeClr val="bg1">
+                          <a:lumMod val="50000"/>
+                        </a:schemeClr>
+                      </a:solidFill>
+                      <a:prstDash val="solid"/>
+                    </a:lnB>
+                    <a:noFill/>
+                  </a:tcPr>
+                </a:tc>
+                <a:tc>
+                  <a:txBody>
+                    <a:bodyPr/>
+                    <a:lstStyle/>
+                    <a:p>
+                      <a:pPr algn="ctr"/>
+                      <a:r>
+                        <a:rPr lang="ru-RU" sz="1000" b="0" i="0" dirty="0">
+                          <a:solidFill>
+                            <a:schemeClr val="tx1">
+                              <a:lumMod val="50000"/>
+                              <a:lumOff val="50000"/>
+                            </a:schemeClr>
+                          </a:solidFill>
+                          <a:latin typeface="Arial"/>
+                        </a:rPr>
+                        <a:t>н/п</a:t>
+                      </a:r>
+                    </a:p>
+                  </a:txBody>
+                  <a:tcPr marL="36000" marR="36000" marT="18000" marB="18000" anchor="ctr">
+                    <a:lnL>
+                      <a:noFill/>
+                    </a:lnL>
+                    <a:lnR>
+                      <a:noFill/>
+                    </a:lnR>
+                    <a:lnT w="12700">
+                      <a:solidFill>
+                        <a:schemeClr val="bg1">
+                          <a:lumMod val="50000"/>
+                        </a:schemeClr>
+                      </a:solidFill>
+                      <a:prstDash val="solid"/>
+                    </a:lnT>
+                    <a:lnB w="12700">
+                      <a:solidFill>
+                        <a:schemeClr val="bg1">
+                          <a:lumMod val="50000"/>
+                        </a:schemeClr>
+                      </a:solidFill>
+                      <a:prstDash val="solid"/>
+                    </a:lnB>
+                    <a:noFill/>
+                  </a:tcPr>
+                </a:tc>
+                <a:tc>
+                  <a:txBody>
+                    <a:bodyPr/>
+                    <a:lstStyle/>
+                    <a:p>
+                      <a:pPr algn="l"/>
+                      <a:r>
+                        <a:rPr lang="ru-RU" sz="1000" b="1" i="0" dirty="0">
+                          <a:solidFill>
+                            <a:schemeClr val="tx1"/>
+                          </a:solidFill>
+                          <a:latin typeface="Arial"/>
+                        </a:rPr>
+                        <a:t>RMN 850, Content factory 356, DMP 187</a:t>
+                      </a:r>
+                    </a:p>
+                  </a:txBody>
+                  <a:tcPr marL="72000" marR="36000" marT="18000" marB="18000" anchor="ctr">
+                    <a:lnL>
+                      <a:noFill/>
+                    </a:lnL>
+                    <a:lnR w="12700">
+                      <a:solidFill>
+                        <a:schemeClr val="bg1">
+                          <a:lumMod val="50000"/>
+                        </a:schemeClr>
+                      </a:solidFill>
+                      <a:prstDash val="solid"/>
+                    </a:lnR>
+                    <a:lnT w="12700">
+                      <a:solidFill>
+                        <a:schemeClr val="bg1">
+                          <a:lumMod val="50000"/>
+                        </a:schemeClr>
+                      </a:solidFill>
+                      <a:prstDash val="solid"/>
+                    </a:lnT>
+                    <a:lnB w="12700">
+                      <a:solidFill>
+                        <a:schemeClr val="bg1">
+                          <a:lumMod val="50000"/>
+                        </a:schemeClr>
+                      </a:solidFill>
+                      <a:prstDash val="solid"/>
+                    </a:lnB>
+                    <a:noFill/>
+                  </a:tcPr>
+                </a:tc>
+                <a:tc>
+                  <a:txBody>
+                    <a:bodyPr/>
+                    <a:lstStyle/>
+                    <a:p>
+                      <a:endParaRPr lang="ru-RU" sz="1000" dirty="0"/>
+                    </a:p>
+                  </a:txBody>
+                  <a:tcPr>
+                    <a:lnL w="12700">
+                      <a:solidFill>
+                        <a:schemeClr val="bg1">
+                          <a:lumMod val="50000"/>
+                        </a:schemeClr>
+                      </a:solidFill>
+                      <a:prstDash val="solid"/>
+                    </a:lnL>
+                    <a:lnR>
+                      <a:noFill/>
+                    </a:lnR>
+                    <a:lnT>
+                      <a:noFill/>
+                    </a:lnT>
+                    <a:lnB>
+                      <a:noFill/>
+                    </a:lnB>
+                    <a:noFill/>
+                  </a:tcPr>
+                </a:tc>
+                <a:tc>
+                  <a:txBody>
+                    <a:bodyPr/>
+                    <a:lstStyle/>
+                    <a:p>
+                      <a:pPr algn="ctr"/>
+                      <a:r>
+                        <a:rPr lang="ru-RU" sz="1000" b="0" i="0" dirty="0">
+                          <a:solidFill>
+                            <a:schemeClr val="tx1"/>
+                          </a:solidFill>
+                          <a:latin typeface="Arial"/>
+                        </a:rPr>
+                        <a:t>195</a:t>
+                      </a:r>
+                    </a:p>
+                  </a:txBody>
+                  <a:tcPr marL="36000" marR="36000" marT="18000" marB="18000" anchor="ctr">
+                    <a:lnL w="12700">
+                      <a:solidFill>
+                        <a:schemeClr val="bg1">
+                          <a:lumMod val="50000"/>
+                        </a:schemeClr>
+                      </a:solidFill>
+                      <a:prstDash val="solid"/>
+                    </a:lnL>
+                    <a:lnR>
+                      <a:noFill/>
+                    </a:lnR>
+                    <a:lnT w="12700">
+                      <a:solidFill>
+                        <a:schemeClr val="bg1">
+                          <a:lumMod val="50000"/>
+                        </a:schemeClr>
+                      </a:solidFill>
+                      <a:prstDash val="solid"/>
+                    </a:lnT>
+                    <a:lnB w="12700">
+                      <a:solidFill>
+                        <a:schemeClr val="bg1">
+                          <a:lumMod val="50000"/>
+                        </a:schemeClr>
+                      </a:solidFill>
+                      <a:prstDash val="solid"/>
+                    </a:lnB>
+                    <a:noFill/>
+                  </a:tcPr>
+                </a:tc>
+                <a:tc>
+                  <a:txBody>
+                    <a:bodyPr/>
+                    <a:lstStyle/>
+                    <a:p>
+                      <a:pPr algn="ctr"/>
+                      <a:r>
+                        <a:rPr lang="ru-RU" sz="1000" b="0" i="0" dirty="0">
+                          <a:solidFill>
+                            <a:schemeClr val="tx1"/>
+                          </a:solidFill>
+                          <a:latin typeface="Arial"/>
+                        </a:rPr>
+                        <a:t>292</a:t>
+                      </a:r>
+                    </a:p>
+                  </a:txBody>
+                  <a:tcPr marL="36000" marR="36000" marT="18000" marB="18000" anchor="ctr">
+                    <a:lnL>
+                      <a:noFill/>
+                    </a:lnL>
+                    <a:lnR>
+                      <a:noFill/>
+                    </a:lnR>
+                    <a:lnT w="12700">
+                      <a:solidFill>
+                        <a:schemeClr val="bg1">
+                          <a:lumMod val="50000"/>
+                        </a:schemeClr>
+                      </a:solidFill>
+                      <a:prstDash val="solid"/>
+                    </a:lnT>
+                    <a:lnB w="12700">
+                      <a:solidFill>
+                        <a:schemeClr val="bg1">
+                          <a:lumMod val="50000"/>
+                        </a:schemeClr>
+                      </a:solidFill>
+                      <a:prstDash val="solid"/>
+                    </a:lnB>
+                    <a:noFill/>
+                  </a:tcPr>
+                </a:tc>
+                <a:tc>
+                  <a:txBody>
+                    <a:bodyPr/>
+                    <a:lstStyle/>
+                    <a:p>
+                      <a:pPr algn="ctr"/>
+                      <a:r>
+                        <a:rPr lang="ru-RU" sz="1000" b="0" i="0" dirty="0">
+                          <a:solidFill>
+                            <a:schemeClr val="tx1"/>
+                          </a:solidFill>
+                          <a:latin typeface="Arial"/>
+                        </a:rPr>
+                        <a:t>320</a:t>
+                      </a:r>
+                    </a:p>
+                  </a:txBody>
+                  <a:tcPr marL="36000" marR="36000" marT="18000" marB="18000" anchor="ctr">
+                    <a:lnL>
+                      <a:noFill/>
+                    </a:lnL>
+                    <a:lnR>
+                      <a:noFill/>
+                    </a:lnR>
+                    <a:lnT w="12700">
+                      <a:solidFill>
+                        <a:schemeClr val="bg1">
+                          <a:lumMod val="50000"/>
+                        </a:schemeClr>
+                      </a:solidFill>
+                      <a:prstDash val="solid"/>
+                    </a:lnT>
+                    <a:lnB w="12700">
+                      <a:solidFill>
+                        <a:schemeClr val="bg1">
+                          <a:lumMod val="50000"/>
+                        </a:schemeClr>
+                      </a:solidFill>
+                      <a:prstDash val="solid"/>
+                    </a:lnB>
+                    <a:noFill/>
+                  </a:tcPr>
+                </a:tc>
+                <a:tc>
+                  <a:txBody>
+                    <a:bodyPr/>
+                    <a:lstStyle/>
+                    <a:p>
+                      <a:pPr algn="ctr"/>
+                      <a:r>
+                        <a:rPr lang="ru-RU" sz="1000" b="0" i="0" dirty="0">
+                          <a:solidFill>
+                            <a:schemeClr val="tx1"/>
+                          </a:solidFill>
+                          <a:latin typeface="Arial"/>
+                        </a:rPr>
+                        <a:t>585</a:t>
+                      </a:r>
+                    </a:p>
+                  </a:txBody>
+                  <a:tcPr marL="36000" marR="36000" marT="18000" marB="18000" anchor="ctr">
+                    <a:lnL>
+                      <a:noFill/>
+                    </a:lnL>
+                    <a:lnR w="12700">
+                      <a:solidFill>
+                        <a:schemeClr val="bg1">
+                          <a:lumMod val="50000"/>
+                        </a:schemeClr>
+                      </a:solidFill>
+                      <a:prstDash val="solid"/>
+                    </a:lnR>
+                    <a:lnT w="12700">
+                      <a:solidFill>
+                        <a:schemeClr val="bg1">
+                          <a:lumMod val="50000"/>
+                        </a:schemeClr>
+                      </a:solidFill>
+                      <a:prstDash val="solid"/>
+                    </a:lnT>
+                    <a:lnB w="12700">
+                      <a:solidFill>
+                        <a:schemeClr val="bg1">
+                          <a:lumMod val="50000"/>
+                        </a:schemeClr>
+                      </a:solidFill>
+                      <a:prstDash val="solid"/>
+                    </a:lnB>
+                    <a:noFill/>
+                  </a:tcPr>
+                </a:tc>
+              </a:tr>
+              <a:tr h="315000">
+                <a:tc>
+                  <a:txBody>
+                    <a:bodyPr/>
+                    <a:lstStyle/>
+                    <a:p>
+                      <a:pPr algn="l"/>
+                      <a:r>
+                        <a:rPr lang="ru-RU" sz="1000" b="1" i="0" dirty="0">
+                          <a:solidFill>
+                            <a:schemeClr val="tx1"/>
+                          </a:solidFill>
+                          <a:latin typeface="Arial"/>
+                        </a:rPr>
+                        <a:t>Gross Revenue</a:t>
+                      </a:r>
+                    </a:p>
+                  </a:txBody>
+                  <a:tcPr marL="72000" marR="36000" marT="18000" marB="18000" anchor="ctr">
+                    <a:lnL w="12700">
+                      <a:solidFill>
+                        <a:schemeClr val="bg1">
+                          <a:lumMod val="50000"/>
+                        </a:schemeClr>
+                      </a:solidFill>
+                      <a:prstDash val="solid"/>
+                    </a:lnL>
+                    <a:lnR>
+                      <a:noFill/>
+                    </a:lnR>
+                    <a:lnT w="12700">
+                      <a:solidFill>
+                        <a:schemeClr val="bg1">
+                          <a:lumMod val="50000"/>
+                        </a:schemeClr>
+                      </a:solidFill>
+                      <a:prstDash val="solid"/>
+                    </a:lnT>
+                    <a:lnB w="12700">
+                      <a:solidFill>
+                        <a:schemeClr val="bg1">
+                          <a:lumMod val="50000"/>
+                        </a:schemeClr>
+                      </a:solidFill>
+                      <a:prstDash val="solid"/>
+                    </a:lnB>
+                    <a:solidFill>
+                      <a:srgbClr val="EDEDED"/>
+                    </a:solidFill>
+                  </a:tcPr>
+                </a:tc>
+                <a:tc>
+                  <a:txBody>
+                    <a:bodyPr/>
+                    <a:lstStyle/>
+                    <a:p>
+                      <a:pPr algn="ctr"/>
+                      <a:r>
+                        <a:rPr lang="ru-RU" sz="1000" b="1" i="0" dirty="0">
+                          <a:solidFill>
+                            <a:schemeClr val="tx1"/>
+                          </a:solidFill>
+                          <a:latin typeface="Arial"/>
+                        </a:rPr>
+                        <a:t>14 747</a:t>
+                      </a:r>
+                    </a:p>
+                  </a:txBody>
+                  <a:tcPr marL="36000" marR="36000" marT="18000" marB="18000" anchor="ctr">
+                    <a:lnL>
+                      <a:noFill/>
+                    </a:lnL>
+                    <a:lnR>
+                      <a:noFill/>
+                    </a:lnR>
+                    <a:lnT w="12700">
+                      <a:solidFill>
+                        <a:schemeClr val="bg1">
+                          <a:lumMod val="50000"/>
+                        </a:schemeClr>
+                      </a:solidFill>
+                      <a:prstDash val="solid"/>
+                    </a:lnT>
+                    <a:lnB w="12700">
+                      <a:solidFill>
+                        <a:schemeClr val="bg1">
+                          <a:lumMod val="50000"/>
+                        </a:schemeClr>
+                      </a:solidFill>
+                      <a:prstDash val="solid"/>
+                    </a:lnB>
+                    <a:solidFill>
+                      <a:srgbClr val="EDEDED"/>
+                    </a:solidFill>
+                  </a:tcPr>
+                </a:tc>
+                <a:tc>
+                  <a:txBody>
+                    <a:bodyPr/>
+                    <a:lstStyle/>
+                    <a:p>
+                      <a:pPr algn="ctr"/>
+                      <a:r>
+                        <a:rPr lang="ru-RU" sz="1000" b="0" i="0" dirty="0">
+                          <a:solidFill>
+                            <a:schemeClr val="tx1"/>
+                          </a:solidFill>
+                          <a:latin typeface="Arial"/>
+                        </a:rPr>
+                        <a:t>10 335</a:t>
+                      </a:r>
+                    </a:p>
+                  </a:txBody>
+                  <a:tcPr marL="36000" marR="36000" marT="18000" marB="18000" anchor="ctr">
+                    <a:lnL>
+                      <a:noFill/>
+                    </a:lnL>
+                    <a:lnR>
+                      <a:noFill/>
+                    </a:lnR>
+                    <a:lnT w="12700">
+                      <a:solidFill>
+                        <a:schemeClr val="bg1">
+                          <a:lumMod val="50000"/>
+                        </a:schemeClr>
+                      </a:solidFill>
+                      <a:prstDash val="solid"/>
+                    </a:lnT>
+                    <a:lnB w="12700">
+                      <a:solidFill>
+                        <a:schemeClr val="bg1">
+                          <a:lumMod val="50000"/>
+                        </a:schemeClr>
+                      </a:solidFill>
+                      <a:prstDash val="solid"/>
+                    </a:lnB>
+                    <a:solidFill>
+                      <a:srgbClr val="EDEDED"/>
+                    </a:solidFill>
+                  </a:tcPr>
+                </a:tc>
+                <a:tc>
+                  <a:txBody>
+                    <a:bodyPr/>
+                    <a:lstStyle/>
+                    <a:p>
+                      <a:pPr algn="ctr"/>
+                      <a:r>
+                        <a:rPr lang="ru-RU" sz="1000" b="0" i="0" dirty="0">
+                          <a:solidFill>
+                            <a:schemeClr val="tx1">
+                              <a:lumMod val="50000"/>
+                              <a:lumOff val="50000"/>
+                            </a:schemeClr>
+                          </a:solidFill>
+                          <a:latin typeface="Arial"/>
+                        </a:rPr>
+                        <a:t>+4 412</a:t>
+                      </a:r>
+                    </a:p>
+                  </a:txBody>
+                  <a:tcPr marL="36000" marR="36000" marT="18000" marB="18000" anchor="ctr">
+                    <a:lnL>
+                      <a:noFill/>
+                    </a:lnL>
+                    <a:lnR>
+                      <a:noFill/>
+                    </a:lnR>
+                    <a:lnT w="12700">
+                      <a:solidFill>
+                        <a:schemeClr val="bg1">
+                          <a:lumMod val="50000"/>
+                        </a:schemeClr>
+                      </a:solidFill>
+                      <a:prstDash val="solid"/>
+                    </a:lnT>
+                    <a:lnB w="12700">
+                      <a:solidFill>
+                        <a:schemeClr val="bg1">
+                          <a:lumMod val="50000"/>
+                        </a:schemeClr>
+                      </a:solidFill>
+                      <a:prstDash val="solid"/>
+                    </a:lnB>
+                    <a:solidFill>
+                      <a:srgbClr val="EDEDED"/>
+                    </a:solidFill>
+                  </a:tcPr>
+                </a:tc>
+                <a:tc>
+                  <a:txBody>
+                    <a:bodyPr/>
+                    <a:lstStyle/>
+                    <a:p>
+                      <a:pPr algn="ctr"/>
+                      <a:r>
+                        <a:rPr lang="ru-RU" sz="1000" b="0" i="0" dirty="0">
+                          <a:solidFill>
+                            <a:schemeClr val="tx1">
+                              <a:lumMod val="50000"/>
+                              <a:lumOff val="50000"/>
+                            </a:schemeClr>
+                          </a:solidFill>
+                          <a:latin typeface="Arial"/>
+                        </a:rPr>
+                        <a:t>+42,7%</a:t>
+                      </a:r>
+                    </a:p>
+                  </a:txBody>
+                  <a:tcPr marL="36000" marR="36000" marT="18000" marB="18000" anchor="ctr">
+                    <a:lnL>
+                      <a:noFill/>
+                    </a:lnL>
+                    <a:lnR>
+                      <a:noFill/>
+                    </a:lnR>
+                    <a:lnT w="12700">
+                      <a:solidFill>
+                        <a:schemeClr val="bg1">
+                          <a:lumMod val="50000"/>
+                        </a:schemeClr>
+                      </a:solidFill>
+                      <a:prstDash val="solid"/>
+                    </a:lnT>
+                    <a:lnB w="12700">
+                      <a:solidFill>
+                        <a:schemeClr val="bg1">
+                          <a:lumMod val="50000"/>
+                        </a:schemeClr>
+                      </a:solidFill>
+                      <a:prstDash val="solid"/>
+                    </a:lnB>
+                    <a:solidFill>
+                      <a:srgbClr val="C6EFCE"/>
+                    </a:solidFill>
+                  </a:tcPr>
+                </a:tc>
+                <a:tc>
+                  <a:txBody>
+                    <a:bodyPr/>
+                    <a:lstStyle/>
+                    <a:p>
+                      <a:pPr algn="ctr"/>
+                      <a:r>
+                        <a:rPr lang="ru-RU" sz="1000" b="0" i="0" dirty="0">
+                          <a:solidFill>
+                            <a:schemeClr val="tx1"/>
+                          </a:solidFill>
+                          <a:latin typeface="Arial"/>
+                        </a:rPr>
+                        <a:t>13 210</a:t>
+                      </a:r>
+                    </a:p>
+                  </a:txBody>
+                  <a:tcPr marL="36000" marR="36000" marT="18000" marB="18000" anchor="ctr">
+                    <a:lnL>
+                      <a:noFill/>
+                    </a:lnL>
+                    <a:lnR>
+                      <a:noFill/>
+                    </a:lnR>
+                    <a:lnT w="12700">
+                      <a:solidFill>
+                        <a:schemeClr val="bg1">
+                          <a:lumMod val="50000"/>
+                        </a:schemeClr>
+                      </a:solidFill>
+                      <a:prstDash val="solid"/>
+                    </a:lnT>
+                    <a:lnB w="12700">
+                      <a:solidFill>
+                        <a:schemeClr val="bg1">
+                          <a:lumMod val="50000"/>
+                        </a:schemeClr>
+                      </a:solidFill>
+                      <a:prstDash val="solid"/>
+                    </a:lnB>
+                    <a:solidFill>
+                      <a:srgbClr val="EDEDED"/>
+                    </a:solidFill>
+                  </a:tcPr>
+                </a:tc>
+                <a:tc>
+                  <a:txBody>
+                    <a:bodyPr/>
+                    <a:lstStyle/>
+                    <a:p>
+                      <a:pPr algn="ctr"/>
+                      <a:r>
+                        <a:rPr lang="ru-RU" sz="1000" b="0" i="0" dirty="0">
+                          <a:solidFill>
+                            <a:schemeClr val="tx1">
+                              <a:lumMod val="50000"/>
+                              <a:lumOff val="50000"/>
+                            </a:schemeClr>
+                          </a:solidFill>
+                          <a:latin typeface="Arial"/>
+                        </a:rPr>
+                        <a:t>+11,6%</a:t>
+                      </a:r>
+                    </a:p>
+                  </a:txBody>
+                  <a:tcPr marL="36000" marR="36000" marT="18000" marB="18000" anchor="ctr">
+                    <a:lnL>
+                      <a:noFill/>
+                    </a:lnL>
+                    <a:lnR>
+                      <a:noFill/>
+                    </a:lnR>
+                    <a:lnT w="12700">
+                      <a:solidFill>
+                        <a:schemeClr val="bg1">
+                          <a:lumMod val="50000"/>
+                        </a:schemeClr>
+                      </a:solidFill>
+                      <a:prstDash val="solid"/>
+                    </a:lnT>
+                    <a:lnB w="12700">
+                      <a:solidFill>
+                        <a:schemeClr val="bg1">
+                          <a:lumMod val="50000"/>
+                        </a:schemeClr>
+                      </a:solidFill>
+                      <a:prstDash val="solid"/>
+                    </a:lnB>
+                    <a:solidFill>
+                      <a:srgbClr val="C6EFCE"/>
+                    </a:solidFill>
+                  </a:tcPr>
+                </a:tc>
+                <a:tc>
+                  <a:txBody>
+                    <a:bodyPr/>
+                    <a:lstStyle/>
+                    <a:p>
+                      <a:pPr algn="l"/>
+                      <a:r>
+                        <a:rPr lang="ru-RU" sz="1000" b="1" i="0" dirty="0">
+                          <a:solidFill>
+                            <a:schemeClr val="tx1"/>
+                          </a:solidFill>
+                          <a:latin typeface="Arial"/>
+                        </a:rPr>
+                        <a:t>+4,4 млрд к 2026; выше стратегии на 1,5 млрд</a:t>
+                      </a:r>
+                    </a:p>
+                  </a:txBody>
+                  <a:tcPr marL="72000" marR="36000" marT="18000" marB="18000" anchor="ctr">
+                    <a:lnL>
+                      <a:noFill/>
+                    </a:lnL>
+                    <a:lnR w="12700">
+                      <a:solidFill>
+                        <a:schemeClr val="bg1">
+                          <a:lumMod val="50000"/>
+                        </a:schemeClr>
+                      </a:solidFill>
+                      <a:prstDash val="solid"/>
+                    </a:lnR>
+                    <a:lnT w="12700">
+                      <a:solidFill>
+                        <a:schemeClr val="bg1">
+                          <a:lumMod val="50000"/>
+                        </a:schemeClr>
+                      </a:solidFill>
+                      <a:prstDash val="solid"/>
+                    </a:lnT>
+                    <a:lnB w="12700">
+                      <a:solidFill>
+                        <a:schemeClr val="bg1">
+                          <a:lumMod val="50000"/>
+                        </a:schemeClr>
+                      </a:solidFill>
+                      <a:prstDash val="solid"/>
+                    </a:lnB>
+                    <a:solidFill>
+                      <a:srgbClr val="EDEDED"/>
+                    </a:solidFill>
+                  </a:tcPr>
+                </a:tc>
+                <a:tc>
+                  <a:txBody>
+                    <a:bodyPr/>
+                    <a:lstStyle/>
+                    <a:p>
+                      <a:endParaRPr lang="ru-RU" sz="1000" dirty="0"/>
+                    </a:p>
+                  </a:txBody>
+                  <a:tcPr>
+                    <a:lnL w="12700">
+                      <a:solidFill>
+                        <a:schemeClr val="bg1">
+                          <a:lumMod val="50000"/>
+                        </a:schemeClr>
+                      </a:solidFill>
+                      <a:prstDash val="solid"/>
+                    </a:lnL>
+                    <a:lnR>
+                      <a:noFill/>
+                    </a:lnR>
+                    <a:lnT>
+                      <a:noFill/>
+                    </a:lnT>
+                    <a:lnB>
+                      <a:noFill/>
+                    </a:lnB>
+                    <a:noFill/>
+                  </a:tcPr>
+                </a:tc>
+                <a:tc>
+                  <a:txBody>
+                    <a:bodyPr/>
+                    <a:lstStyle/>
+                    <a:p>
+                      <a:pPr algn="ctr"/>
+                      <a:r>
+                        <a:rPr lang="ru-RU" sz="1000" b="0" i="0" dirty="0">
+                          <a:solidFill>
+                            <a:schemeClr val="tx1"/>
+                          </a:solidFill>
+                          <a:latin typeface="Arial"/>
+                        </a:rPr>
+                        <a:t>2 065</a:t>
+                      </a:r>
+                    </a:p>
+                  </a:txBody>
+                  <a:tcPr marL="36000" marR="36000" marT="18000" marB="18000" anchor="ctr">
+                    <a:lnL w="12700">
+                      <a:solidFill>
+                        <a:schemeClr val="bg1">
+                          <a:lumMod val="50000"/>
+                        </a:schemeClr>
+                      </a:solidFill>
+                      <a:prstDash val="solid"/>
+                    </a:lnL>
+                    <a:lnR>
+                      <a:noFill/>
+                    </a:lnR>
+                    <a:lnT w="12700">
+                      <a:solidFill>
+                        <a:schemeClr val="bg1">
+                          <a:lumMod val="50000"/>
+                        </a:schemeClr>
+                      </a:solidFill>
+                      <a:prstDash val="solid"/>
+                    </a:lnT>
+                    <a:lnB w="12700">
+                      <a:solidFill>
+                        <a:schemeClr val="bg1">
+                          <a:lumMod val="50000"/>
+                        </a:schemeClr>
+                      </a:solidFill>
+                      <a:prstDash val="solid"/>
+                    </a:lnB>
+                    <a:solidFill>
+                      <a:srgbClr val="EDEDED"/>
+                    </a:solidFill>
+                  </a:tcPr>
+                </a:tc>
+                <a:tc>
+                  <a:txBody>
+                    <a:bodyPr/>
+                    <a:lstStyle/>
+                    <a:p>
+                      <a:pPr algn="ctr"/>
+                      <a:r>
+                        <a:rPr lang="ru-RU" sz="1000" b="0" i="0" dirty="0">
+                          <a:solidFill>
+                            <a:schemeClr val="tx1"/>
+                          </a:solidFill>
+                          <a:latin typeface="Arial"/>
+                        </a:rPr>
+                        <a:t>3 097</a:t>
+                      </a:r>
+                    </a:p>
+                  </a:txBody>
+                  <a:tcPr marL="36000" marR="36000" marT="18000" marB="18000" anchor="ctr">
+                    <a:lnL>
+                      <a:noFill/>
+                    </a:lnL>
+                    <a:lnR>
+                      <a:noFill/>
+                    </a:lnR>
+                    <a:lnT w="12700">
+                      <a:solidFill>
+                        <a:schemeClr val="bg1">
+                          <a:lumMod val="50000"/>
+                        </a:schemeClr>
+                      </a:solidFill>
+                      <a:prstDash val="solid"/>
+                    </a:lnT>
+                    <a:lnB w="12700">
+                      <a:solidFill>
+                        <a:schemeClr val="bg1">
+                          <a:lumMod val="50000"/>
+                        </a:schemeClr>
+                      </a:solidFill>
+                      <a:prstDash val="solid"/>
+                    </a:lnB>
+                    <a:solidFill>
+                      <a:srgbClr val="EDEDED"/>
+                    </a:solidFill>
+                  </a:tcPr>
+                </a:tc>
+                <a:tc>
+                  <a:txBody>
+                    <a:bodyPr/>
+                    <a:lstStyle/>
+                    <a:p>
+                      <a:pPr algn="ctr"/>
+                      <a:r>
+                        <a:rPr lang="ru-RU" sz="1000" b="0" i="0" dirty="0">
+                          <a:solidFill>
+                            <a:schemeClr val="tx1"/>
+                          </a:solidFill>
+                          <a:latin typeface="Arial"/>
+                        </a:rPr>
+                        <a:t>3 392</a:t>
+                      </a:r>
+                    </a:p>
+                  </a:txBody>
+                  <a:tcPr marL="36000" marR="36000" marT="18000" marB="18000" anchor="ctr">
+                    <a:lnL>
+                      <a:noFill/>
+                    </a:lnL>
+                    <a:lnR>
+                      <a:noFill/>
+                    </a:lnR>
+                    <a:lnT w="12700">
+                      <a:solidFill>
+                        <a:schemeClr val="bg1">
+                          <a:lumMod val="50000"/>
+                        </a:schemeClr>
+                      </a:solidFill>
+                      <a:prstDash val="solid"/>
+                    </a:lnT>
+                    <a:lnB w="12700">
+                      <a:solidFill>
+                        <a:schemeClr val="bg1">
+                          <a:lumMod val="50000"/>
+                        </a:schemeClr>
+                      </a:solidFill>
+                      <a:prstDash val="solid"/>
+                    </a:lnB>
+                    <a:solidFill>
+                      <a:srgbClr val="EDEDED"/>
+                    </a:solidFill>
+                  </a:tcPr>
+                </a:tc>
+                <a:tc>
+                  <a:txBody>
+                    <a:bodyPr/>
+                    <a:lstStyle/>
+                    <a:p>
+                      <a:pPr algn="ctr"/>
+                      <a:r>
+                        <a:rPr lang="ru-RU" sz="1000" b="0" i="0" dirty="0">
+                          <a:solidFill>
+                            <a:schemeClr val="tx1"/>
+                          </a:solidFill>
+                          <a:latin typeface="Arial"/>
+                        </a:rPr>
+                        <a:t>6 194</a:t>
+                      </a:r>
+                    </a:p>
+                  </a:txBody>
+                  <a:tcPr marL="36000" marR="36000" marT="18000" marB="18000" anchor="ctr">
+                    <a:lnL>
+                      <a:noFill/>
+                    </a:lnL>
+                    <a:lnR w="12700">
+                      <a:solidFill>
+                        <a:schemeClr val="bg1">
+                          <a:lumMod val="50000"/>
+                        </a:schemeClr>
+                      </a:solidFill>
+                      <a:prstDash val="solid"/>
+                    </a:lnR>
+                    <a:lnT w="12700">
+                      <a:solidFill>
+                        <a:schemeClr val="bg1">
+                          <a:lumMod val="50000"/>
+                        </a:schemeClr>
+                      </a:solidFill>
+                      <a:prstDash val="solid"/>
+                    </a:lnT>
+                    <a:lnB w="12700">
+                      <a:solidFill>
+                        <a:schemeClr val="bg1">
+                          <a:lumMod val="50000"/>
+                        </a:schemeClr>
+                      </a:solidFill>
+                      <a:prstDash val="solid"/>
+                    </a:lnB>
+                    <a:solidFill>
+                      <a:srgbClr val="EDEDED"/>
+                    </a:solidFill>
+                  </a:tcPr>
+                </a:tc>
+              </a:tr>
+              <a:tr h="315000">
+                <a:tc>
+                  <a:txBody>
+                    <a:bodyPr/>
+                    <a:lstStyle/>
+                    <a:p>
+                      <a:pPr algn="l"/>
+                      <a:r>
+                        <a:rPr lang="ru-RU" sz="1000" b="1" i="0" dirty="0">
+                          <a:solidFill>
+                            <a:schemeClr val="tx1"/>
+                          </a:solidFill>
+                          <a:latin typeface="Arial"/>
+                        </a:rPr>
+                        <a:t>Incremental Revenue**</a:t>
+                      </a:r>
+                    </a:p>
+                  </a:txBody>
+                  <a:tcPr marL="72000" marR="36000" marT="18000" marB="18000" anchor="ctr">
+                    <a:lnL w="12700">
+                      <a:solidFill>
+                        <a:schemeClr val="bg1">
+                          <a:lumMod val="50000"/>
+                        </a:schemeClr>
+                      </a:solidFill>
+                      <a:prstDash val="solid"/>
+                    </a:lnL>
+                    <a:lnR>
+                      <a:noFill/>
+                    </a:lnR>
+                    <a:lnT w="12700">
+                      <a:solidFill>
+                        <a:schemeClr val="bg1">
+                          <a:lumMod val="50000"/>
+                        </a:schemeClr>
+                      </a:solidFill>
+                      <a:prstDash val="solid"/>
+                    </a:lnT>
+                    <a:lnB w="12700">
+                      <a:solidFill>
+                        <a:schemeClr val="bg1">
+                          <a:lumMod val="50000"/>
+                        </a:schemeClr>
+                      </a:solidFill>
+                      <a:prstDash val="solid"/>
+                    </a:lnB>
+                    <a:noFill/>
+                  </a:tcPr>
+                </a:tc>
+                <a:tc>
+                  <a:txBody>
+                    <a:bodyPr/>
+                    <a:lstStyle/>
+                    <a:p>
+                      <a:pPr algn="ctr"/>
+                      <a:r>
+                        <a:rPr lang="ru-RU" sz="1000" b="1" i="0" dirty="0">
+                          <a:solidFill>
+                            <a:schemeClr val="tx1"/>
+                          </a:solidFill>
+                          <a:latin typeface="Arial"/>
+                        </a:rPr>
+                        <a:t>4 281</a:t>
+                      </a:r>
+                    </a:p>
+                  </a:txBody>
+                  <a:tcPr marL="36000" marR="36000" marT="18000" marB="18000" anchor="ctr">
+                    <a:lnL>
+                      <a:noFill/>
+                    </a:lnL>
+                    <a:lnR>
+                      <a:noFill/>
+                    </a:lnR>
+                    <a:lnT w="12700">
+                      <a:solidFill>
+                        <a:schemeClr val="bg1">
+                          <a:lumMod val="50000"/>
+                        </a:schemeClr>
+                      </a:solidFill>
+                      <a:prstDash val="solid"/>
+                    </a:lnT>
+                    <a:lnB w="12700">
+                      <a:solidFill>
+                        <a:schemeClr val="bg1">
+                          <a:lumMod val="50000"/>
+                        </a:schemeClr>
+                      </a:solidFill>
+                      <a:prstDash val="solid"/>
+                    </a:lnB>
+                    <a:noFill/>
+                  </a:tcPr>
+                </a:tc>
+                <a:tc>
+                  <a:txBody>
+                    <a:bodyPr/>
+                    <a:lstStyle/>
+                    <a:p>
+                      <a:pPr algn="ctr"/>
+                      <a:r>
+                        <a:rPr lang="ru-RU" sz="1000" b="0" i="0" dirty="0">
+                          <a:solidFill>
+                            <a:schemeClr val="tx1"/>
+                          </a:solidFill>
+                          <a:latin typeface="Arial"/>
+                        </a:rPr>
+                        <a:t>–</a:t>
+                      </a:r>
+                    </a:p>
+                  </a:txBody>
+                  <a:tcPr marL="36000" marR="36000" marT="18000" marB="18000" anchor="ctr">
+                    <a:lnL>
+                      <a:noFill/>
+                    </a:lnL>
+                    <a:lnR>
+                      <a:noFill/>
+                    </a:lnR>
+                    <a:lnT w="12700">
+                      <a:solidFill>
+                        <a:schemeClr val="bg1">
+                          <a:lumMod val="50000"/>
+                        </a:schemeClr>
+                      </a:solidFill>
+                      <a:prstDash val="solid"/>
+                    </a:lnT>
+                    <a:lnB w="12700">
+                      <a:solidFill>
+                        <a:schemeClr val="bg1">
+                          <a:lumMod val="50000"/>
+                        </a:schemeClr>
+                      </a:solidFill>
+                      <a:prstDash val="solid"/>
+                    </a:lnB>
+                    <a:noFill/>
+                  </a:tcPr>
+                </a:tc>
+                <a:tc>
+                  <a:txBody>
+                    <a:bodyPr/>
+                    <a:lstStyle/>
+                    <a:p>
+                      <a:pPr algn="ctr"/>
+                      <a:r>
+                        <a:rPr lang="ru-RU" sz="1000" b="0" i="0" dirty="0">
+                          <a:solidFill>
+                            <a:schemeClr val="tx1">
+                              <a:lumMod val="50000"/>
+                              <a:lumOff val="50000"/>
+                            </a:schemeClr>
+                          </a:solidFill>
+                          <a:latin typeface="Arial"/>
+                        </a:rPr>
+                        <a:t>–</a:t>
+                      </a:r>
+                    </a:p>
+                  </a:txBody>
+                  <a:tcPr marL="36000" marR="36000" marT="18000" marB="18000" anchor="ctr">
+                    <a:lnL>
+                      <a:noFill/>
+                    </a:lnL>
+                    <a:lnR>
+                      <a:noFill/>
+                    </a:lnR>
+                    <a:lnT w="12700">
+                      <a:solidFill>
+                        <a:schemeClr val="bg1">
+                          <a:lumMod val="50000"/>
+                        </a:schemeClr>
+                      </a:solidFill>
+                      <a:prstDash val="solid"/>
+                    </a:lnT>
+                    <a:lnB w="12700">
+                      <a:solidFill>
+                        <a:schemeClr val="bg1">
+                          <a:lumMod val="50000"/>
+                        </a:schemeClr>
+                      </a:solidFill>
+                      <a:prstDash val="solid"/>
+                    </a:lnB>
+                    <a:noFill/>
+                  </a:tcPr>
+                </a:tc>
+                <a:tc>
+                  <a:txBody>
+                    <a:bodyPr/>
+                    <a:lstStyle/>
+                    <a:p>
+                      <a:pPr algn="ctr"/>
+                      <a:r>
+                        <a:rPr lang="ru-RU" sz="1000" b="0" i="0" dirty="0">
+                          <a:solidFill>
+                            <a:schemeClr val="tx1">
+                              <a:lumMod val="50000"/>
+                              <a:lumOff val="50000"/>
+                            </a:schemeClr>
+                          </a:solidFill>
+                          <a:latin typeface="Arial"/>
+                        </a:rPr>
+                        <a:t>–</a:t>
+                      </a:r>
+                    </a:p>
+                  </a:txBody>
+                  <a:tcPr marL="36000" marR="36000" marT="18000" marB="18000" anchor="ctr">
+                    <a:lnL>
+                      <a:noFill/>
+                    </a:lnL>
+                    <a:lnR>
+                      <a:noFill/>
+                    </a:lnR>
+                    <a:lnT w="12700">
+                      <a:solidFill>
+                        <a:schemeClr val="bg1">
+                          <a:lumMod val="50000"/>
+                        </a:schemeClr>
+                      </a:solidFill>
+                      <a:prstDash val="solid"/>
+                    </a:lnT>
+                    <a:lnB w="12700">
+                      <a:solidFill>
+                        <a:schemeClr val="bg1">
+                          <a:lumMod val="50000"/>
+                        </a:schemeClr>
+                      </a:solidFill>
+                      <a:prstDash val="solid"/>
+                    </a:lnB>
+                    <a:noFill/>
+                  </a:tcPr>
+                </a:tc>
+                <a:tc>
+                  <a:txBody>
+                    <a:bodyPr/>
+                    <a:lstStyle/>
+                    <a:p>
+                      <a:pPr algn="ctr"/>
+                      <a:r>
+                        <a:rPr lang="ru-RU" sz="1000" b="0" i="0" dirty="0">
+                          <a:solidFill>
+                            <a:schemeClr val="tx1"/>
+                          </a:solidFill>
+                          <a:latin typeface="Arial"/>
+                        </a:rPr>
+                        <a:t>3 479</a:t>
+                      </a:r>
+                    </a:p>
+                  </a:txBody>
+                  <a:tcPr marL="36000" marR="36000" marT="18000" marB="18000" anchor="ctr">
+                    <a:lnL>
+                      <a:noFill/>
+                    </a:lnL>
+                    <a:lnR>
+                      <a:noFill/>
+                    </a:lnR>
+                    <a:lnT w="12700">
+                      <a:solidFill>
+                        <a:schemeClr val="bg1">
+                          <a:lumMod val="50000"/>
+                        </a:schemeClr>
+                      </a:solidFill>
+                      <a:prstDash val="solid"/>
+                    </a:lnT>
+                    <a:lnB w="12700">
+                      <a:solidFill>
+                        <a:schemeClr val="bg1">
+                          <a:lumMod val="50000"/>
+                        </a:schemeClr>
+                      </a:solidFill>
+                      <a:prstDash val="solid"/>
+                    </a:lnB>
+                    <a:noFill/>
+                  </a:tcPr>
+                </a:tc>
+                <a:tc>
+                  <a:txBody>
+                    <a:bodyPr/>
+                    <a:lstStyle/>
+                    <a:p>
+                      <a:pPr algn="ctr"/>
+                      <a:r>
+                        <a:rPr lang="ru-RU" sz="1000" b="0" i="0" dirty="0">
+                          <a:solidFill>
+                            <a:schemeClr val="tx1">
+                              <a:lumMod val="50000"/>
+                              <a:lumOff val="50000"/>
+                            </a:schemeClr>
+                          </a:solidFill>
+                          <a:latin typeface="Arial"/>
+                        </a:rPr>
+                        <a:t>+23,0%</a:t>
+                      </a:r>
+                    </a:p>
+                  </a:txBody>
+                  <a:tcPr marL="36000" marR="36000" marT="18000" marB="18000" anchor="ctr">
+                    <a:lnL>
+                      <a:noFill/>
+                    </a:lnL>
+                    <a:lnR>
+                      <a:noFill/>
+                    </a:lnR>
+                    <a:lnT w="12700">
+                      <a:solidFill>
+                        <a:schemeClr val="bg1">
+                          <a:lumMod val="50000"/>
+                        </a:schemeClr>
+                      </a:solidFill>
+                      <a:prstDash val="solid"/>
+                    </a:lnT>
+                    <a:lnB w="12700">
+                      <a:solidFill>
+                        <a:schemeClr val="bg1">
+                          <a:lumMod val="50000"/>
+                        </a:schemeClr>
+                      </a:solidFill>
+                      <a:prstDash val="solid"/>
+                    </a:lnB>
+                    <a:solidFill>
+                      <a:srgbClr val="C6EFCE"/>
+                    </a:solidFill>
+                  </a:tcPr>
+                </a:tc>
+                <a:tc>
+                  <a:txBody>
+                    <a:bodyPr/>
+                    <a:lstStyle/>
+                    <a:p>
+                      <a:pPr algn="l"/>
+                      <a:r>
+                        <a:rPr lang="ru-RU" sz="1000" b="1" i="0" dirty="0">
+                          <a:solidFill>
+                            <a:schemeClr val="tx1"/>
+                          </a:solidFill>
+                          <a:latin typeface="Arial"/>
+                        </a:rPr>
+                        <a:t>Прирост к 2026: E-comm +1 501, Offline +2 781</a:t>
+                      </a:r>
+                    </a:p>
+                  </a:txBody>
+                  <a:tcPr marL="72000" marR="36000" marT="18000" marB="18000" anchor="ctr">
+                    <a:lnL>
+                      <a:noFill/>
+                    </a:lnL>
+                    <a:lnR w="12700">
+                      <a:solidFill>
+                        <a:schemeClr val="bg1">
+                          <a:lumMod val="50000"/>
+                        </a:schemeClr>
+                      </a:solidFill>
+                      <a:prstDash val="solid"/>
+                    </a:lnR>
+                    <a:lnT w="12700">
+                      <a:solidFill>
+                        <a:schemeClr val="bg1">
+                          <a:lumMod val="50000"/>
+                        </a:schemeClr>
+                      </a:solidFill>
+                      <a:prstDash val="solid"/>
+                    </a:lnT>
+                    <a:lnB w="12700">
+                      <a:solidFill>
+                        <a:schemeClr val="bg1">
+                          <a:lumMod val="50000"/>
+                        </a:schemeClr>
+                      </a:solidFill>
+                      <a:prstDash val="solid"/>
+                    </a:lnB>
+                    <a:noFill/>
+                  </a:tcPr>
+                </a:tc>
+                <a:tc>
+                  <a:txBody>
+                    <a:bodyPr/>
+                    <a:lstStyle/>
+                    <a:p>
+                      <a:endParaRPr lang="ru-RU" sz="1000" dirty="0"/>
+                    </a:p>
+                  </a:txBody>
+                  <a:tcPr>
+                    <a:lnL w="12700">
+                      <a:solidFill>
+                        <a:schemeClr val="bg1">
+                          <a:lumMod val="50000"/>
+                        </a:schemeClr>
+                      </a:solidFill>
+                      <a:prstDash val="solid"/>
+                    </a:lnL>
+                    <a:lnR>
+                      <a:noFill/>
+                    </a:lnR>
+                    <a:lnT>
+                      <a:noFill/>
+                    </a:lnT>
+                    <a:lnB>
+                      <a:noFill/>
+                    </a:lnB>
+                    <a:noFill/>
+                  </a:tcPr>
+                </a:tc>
+                <a:tc>
+                  <a:txBody>
+                    <a:bodyPr/>
+                    <a:lstStyle/>
+                    <a:p>
+                      <a:pPr algn="ctr"/>
+                      <a:r>
+                        <a:rPr lang="ru-RU" sz="1000" b="0" i="0" dirty="0">
+                          <a:solidFill>
+                            <a:schemeClr val="tx1">
+                              <a:lumMod val="50000"/>
+                              <a:lumOff val="50000"/>
+                            </a:schemeClr>
+                          </a:solidFill>
+                          <a:latin typeface="Arial"/>
+                        </a:rPr>
+                        <a:t>–</a:t>
+                      </a:r>
+                    </a:p>
+                  </a:txBody>
+                  <a:tcPr marL="36000" marR="36000" marT="18000" marB="18000" anchor="ctr">
+                    <a:lnL w="12700">
+                      <a:solidFill>
+                        <a:schemeClr val="bg1">
+                          <a:lumMod val="50000"/>
+                        </a:schemeClr>
+                      </a:solidFill>
+                      <a:prstDash val="solid"/>
+                    </a:lnL>
+                    <a:lnR>
+                      <a:noFill/>
+                    </a:lnR>
+                    <a:lnT w="12700">
+                      <a:solidFill>
+                        <a:schemeClr val="bg1">
+                          <a:lumMod val="50000"/>
+                        </a:schemeClr>
+                      </a:solidFill>
+                      <a:prstDash val="solid"/>
+                    </a:lnT>
+                    <a:lnB w="12700">
+                      <a:solidFill>
+                        <a:schemeClr val="bg1">
+                          <a:lumMod val="50000"/>
+                        </a:schemeClr>
+                      </a:solidFill>
+                      <a:prstDash val="solid"/>
+                    </a:lnB>
+                    <a:noFill/>
+                  </a:tcPr>
+                </a:tc>
+                <a:tc>
+                  <a:txBody>
+                    <a:bodyPr/>
+                    <a:lstStyle/>
+                    <a:p>
+                      <a:pPr algn="ctr"/>
+                      <a:r>
+                        <a:rPr lang="ru-RU" sz="1000" b="0" i="0" dirty="0">
+                          <a:solidFill>
+                            <a:schemeClr val="tx1">
+                              <a:lumMod val="50000"/>
+                              <a:lumOff val="50000"/>
+                            </a:schemeClr>
+                          </a:solidFill>
+                          <a:latin typeface="Arial"/>
+                        </a:rPr>
+                        <a:t>–</a:t>
+                      </a:r>
+                    </a:p>
+                  </a:txBody>
+                  <a:tcPr marL="36000" marR="36000" marT="18000" marB="18000" anchor="ctr">
+                    <a:lnL>
+                      <a:noFill/>
+                    </a:lnL>
+                    <a:lnR>
+                      <a:noFill/>
+                    </a:lnR>
+                    <a:lnT w="12700">
+                      <a:solidFill>
+                        <a:schemeClr val="bg1">
+                          <a:lumMod val="50000"/>
+                        </a:schemeClr>
+                      </a:solidFill>
+                      <a:prstDash val="solid"/>
+                    </a:lnT>
+                    <a:lnB w="12700">
+                      <a:solidFill>
+                        <a:schemeClr val="bg1">
+                          <a:lumMod val="50000"/>
+                        </a:schemeClr>
+                      </a:solidFill>
+                      <a:prstDash val="solid"/>
+                    </a:lnB>
+                    <a:noFill/>
+                  </a:tcPr>
+                </a:tc>
+                <a:tc>
+                  <a:txBody>
+                    <a:bodyPr/>
+                    <a:lstStyle/>
+                    <a:p>
+                      <a:pPr algn="ctr"/>
+                      <a:r>
+                        <a:rPr lang="ru-RU" sz="1000" b="0" i="0" dirty="0">
+                          <a:solidFill>
+                            <a:schemeClr val="tx1">
+                              <a:lumMod val="50000"/>
+                              <a:lumOff val="50000"/>
+                            </a:schemeClr>
+                          </a:solidFill>
+                          <a:latin typeface="Arial"/>
+                        </a:rPr>
+                        <a:t>–</a:t>
+                      </a:r>
+                    </a:p>
+                  </a:txBody>
+                  <a:tcPr marL="36000" marR="36000" marT="18000" marB="18000" anchor="ctr">
+                    <a:lnL>
+                      <a:noFill/>
+                    </a:lnL>
+                    <a:lnR>
+                      <a:noFill/>
+                    </a:lnR>
+                    <a:lnT w="12700">
+                      <a:solidFill>
+                        <a:schemeClr val="bg1">
+                          <a:lumMod val="50000"/>
+                        </a:schemeClr>
+                      </a:solidFill>
+                      <a:prstDash val="solid"/>
+                    </a:lnT>
+                    <a:lnB w="12700">
+                      <a:solidFill>
+                        <a:schemeClr val="bg1">
+                          <a:lumMod val="50000"/>
+                        </a:schemeClr>
+                      </a:solidFill>
+                      <a:prstDash val="solid"/>
+                    </a:lnB>
+                    <a:noFill/>
+                  </a:tcPr>
+                </a:tc>
+                <a:tc>
+                  <a:txBody>
+                    <a:bodyPr/>
+                    <a:lstStyle/>
+                    <a:p>
+                      <a:pPr algn="ctr"/>
+                      <a:r>
+                        <a:rPr lang="ru-RU" sz="1000" b="0" i="0" dirty="0">
+                          <a:solidFill>
+                            <a:schemeClr val="tx1">
+                              <a:lumMod val="50000"/>
+                              <a:lumOff val="50000"/>
+                            </a:schemeClr>
+                          </a:solidFill>
+                          <a:latin typeface="Arial"/>
+                        </a:rPr>
+                        <a:t>–</a:t>
+                      </a:r>
+                    </a:p>
+                  </a:txBody>
+                  <a:tcPr marL="36000" marR="36000" marT="18000" marB="18000" anchor="ctr">
+                    <a:lnL>
+                      <a:noFill/>
+                    </a:lnL>
+                    <a:lnR w="12700">
+                      <a:solidFill>
+                        <a:schemeClr val="bg1">
+                          <a:lumMod val="50000"/>
+                        </a:schemeClr>
+                      </a:solidFill>
+                      <a:prstDash val="solid"/>
+                    </a:lnR>
+                    <a:lnT w="12700">
+                      <a:solidFill>
+                        <a:schemeClr val="bg1">
+                          <a:lumMod val="50000"/>
+                        </a:schemeClr>
+                      </a:solidFill>
+                      <a:prstDash val="solid"/>
+                    </a:lnT>
+                    <a:lnB w="12700">
+                      <a:solidFill>
+                        <a:schemeClr val="bg1">
+                          <a:lumMod val="50000"/>
+                        </a:schemeClr>
+                      </a:solidFill>
+                      <a:prstDash val="solid"/>
+                    </a:lnB>
+                    <a:noFill/>
+                  </a:tcPr>
+                </a:tc>
+              </a:tr>
+              <a:tr h="315000">
+                <a:tc>
+                  <a:txBody>
+                    <a:bodyPr/>
+                    <a:lstStyle/>
+                    <a:p>
+                      <a:pPr algn="l"/>
+                      <a:r>
+                        <a:rPr lang="ru-RU" sz="1000" b="1" i="0" dirty="0">
+                          <a:solidFill>
+                            <a:schemeClr val="tx1"/>
+                          </a:solidFill>
+                          <a:latin typeface="Arial"/>
+                        </a:rPr>
+                        <a:t>PEX (вкл. Other PEX)</a:t>
+                      </a:r>
+                    </a:p>
+                  </a:txBody>
+                  <a:tcPr marL="72000" marR="36000" marT="18000" marB="18000" anchor="ctr">
+                    <a:lnL w="12700">
+                      <a:solidFill>
+                        <a:schemeClr val="bg1">
+                          <a:lumMod val="50000"/>
+                        </a:schemeClr>
+                      </a:solidFill>
+                      <a:prstDash val="solid"/>
+                    </a:lnL>
+                    <a:lnR>
+                      <a:noFill/>
+                    </a:lnR>
+                    <a:lnT w="12700">
+                      <a:solidFill>
+                        <a:schemeClr val="bg1">
+                          <a:lumMod val="50000"/>
+                        </a:schemeClr>
+                      </a:solidFill>
+                      <a:prstDash val="solid"/>
+                    </a:lnT>
+                    <a:lnB w="12700">
+                      <a:solidFill>
+                        <a:schemeClr val="bg1">
+                          <a:lumMod val="50000"/>
+                        </a:schemeClr>
+                      </a:solidFill>
+                      <a:prstDash val="solid"/>
+                    </a:lnB>
+                    <a:noFill/>
+                  </a:tcPr>
+                </a:tc>
+                <a:tc>
+                  <a:txBody>
+                    <a:bodyPr/>
+                    <a:lstStyle/>
+                    <a:p>
+                      <a:pPr algn="ctr"/>
+                      <a:r>
+                        <a:rPr lang="ru-RU" sz="1000" b="1" i="0" dirty="0">
+                          <a:solidFill>
+                            <a:schemeClr val="tx1"/>
+                          </a:solidFill>
+                          <a:latin typeface="Arial"/>
+                        </a:rPr>
+                        <a:t>-1 477</a:t>
+                      </a:r>
+                    </a:p>
+                  </a:txBody>
+                  <a:tcPr marL="36000" marR="36000" marT="18000" marB="18000" anchor="ctr">
+                    <a:lnL>
+                      <a:noFill/>
+                    </a:lnL>
+                    <a:lnR>
+                      <a:noFill/>
+                    </a:lnR>
+                    <a:lnT w="12700">
+                      <a:solidFill>
+                        <a:schemeClr val="bg1">
+                          <a:lumMod val="50000"/>
+                        </a:schemeClr>
+                      </a:solidFill>
+                      <a:prstDash val="solid"/>
+                    </a:lnT>
+                    <a:lnB w="12700">
+                      <a:solidFill>
+                        <a:schemeClr val="bg1">
+                          <a:lumMod val="50000"/>
+                        </a:schemeClr>
+                      </a:solidFill>
+                      <a:prstDash val="solid"/>
+                    </a:lnB>
+                    <a:noFill/>
+                  </a:tcPr>
+                </a:tc>
+                <a:tc>
+                  <a:txBody>
+                    <a:bodyPr/>
+                    <a:lstStyle/>
+                    <a:p>
+                      <a:pPr algn="ctr"/>
+                      <a:r>
+                        <a:rPr lang="ru-RU" sz="1000" b="0" i="0" dirty="0">
+                          <a:solidFill>
+                            <a:schemeClr val="tx1"/>
+                          </a:solidFill>
+                          <a:latin typeface="Arial"/>
+                        </a:rPr>
+                        <a:t>-1 153</a:t>
+                      </a:r>
+                    </a:p>
+                  </a:txBody>
+                  <a:tcPr marL="36000" marR="36000" marT="18000" marB="18000" anchor="ctr">
+                    <a:lnL>
+                      <a:noFill/>
+                    </a:lnL>
+                    <a:lnR>
+                      <a:noFill/>
+                    </a:lnR>
+                    <a:lnT w="12700">
+                      <a:solidFill>
+                        <a:schemeClr val="bg1">
+                          <a:lumMod val="50000"/>
+                        </a:schemeClr>
+                      </a:solidFill>
+                      <a:prstDash val="solid"/>
+                    </a:lnT>
+                    <a:lnB w="12700">
+                      <a:solidFill>
+                        <a:schemeClr val="bg1">
+                          <a:lumMod val="50000"/>
+                        </a:schemeClr>
+                      </a:solidFill>
+                      <a:prstDash val="solid"/>
+                    </a:lnB>
+                    <a:noFill/>
+                  </a:tcPr>
+                </a:tc>
+                <a:tc>
+                  <a:txBody>
+                    <a:bodyPr/>
+                    <a:lstStyle/>
+                    <a:p>
+                      <a:pPr algn="ctr"/>
+                      <a:r>
+                        <a:rPr lang="ru-RU" sz="1000" b="0" i="0" dirty="0">
+                          <a:solidFill>
+                            <a:schemeClr val="tx1">
+                              <a:lumMod val="50000"/>
+                              <a:lumOff val="50000"/>
+                            </a:schemeClr>
+                          </a:solidFill>
+                          <a:latin typeface="Arial"/>
+                        </a:rPr>
+                        <a:t>-324</a:t>
+                      </a:r>
+                    </a:p>
+                  </a:txBody>
+                  <a:tcPr marL="36000" marR="36000" marT="18000" marB="18000" anchor="ctr">
+                    <a:lnL>
+                      <a:noFill/>
+                    </a:lnL>
+                    <a:lnR>
+                      <a:noFill/>
+                    </a:lnR>
+                    <a:lnT w="12700">
+                      <a:solidFill>
+                        <a:schemeClr val="bg1">
+                          <a:lumMod val="50000"/>
+                        </a:schemeClr>
+                      </a:solidFill>
+                      <a:prstDash val="solid"/>
+                    </a:lnT>
+                    <a:lnB w="12700">
+                      <a:solidFill>
+                        <a:schemeClr val="bg1">
+                          <a:lumMod val="50000"/>
+                        </a:schemeClr>
+                      </a:solidFill>
+                      <a:prstDash val="solid"/>
+                    </a:lnB>
+                    <a:noFill/>
+                  </a:tcPr>
+                </a:tc>
+                <a:tc>
+                  <a:txBody>
+                    <a:bodyPr/>
+                    <a:lstStyle/>
+                    <a:p>
+                      <a:pPr algn="ctr"/>
+                      <a:r>
+                        <a:rPr lang="ru-RU" sz="1000" b="0" i="0" dirty="0">
+                          <a:solidFill>
+                            <a:schemeClr val="tx1">
+                              <a:lumMod val="50000"/>
+                              <a:lumOff val="50000"/>
+                            </a:schemeClr>
+                          </a:solidFill>
+                          <a:latin typeface="Arial"/>
+                        </a:rPr>
+                        <a:t>-28,1%</a:t>
+                      </a:r>
+                    </a:p>
+                  </a:txBody>
+                  <a:tcPr marL="36000" marR="36000" marT="18000" marB="18000" anchor="ctr">
+                    <a:lnL>
+                      <a:noFill/>
+                    </a:lnL>
+                    <a:lnR>
+                      <a:noFill/>
+                    </a:lnR>
+                    <a:lnT w="12700">
+                      <a:solidFill>
+                        <a:schemeClr val="bg1">
+                          <a:lumMod val="50000"/>
+                        </a:schemeClr>
+                      </a:solidFill>
+                      <a:prstDash val="solid"/>
+                    </a:lnT>
+                    <a:lnB w="12700">
+                      <a:solidFill>
+                        <a:schemeClr val="bg1">
+                          <a:lumMod val="50000"/>
+                        </a:schemeClr>
+                      </a:solidFill>
+                      <a:prstDash val="solid"/>
+                    </a:lnB>
+                    <a:noFill/>
+                  </a:tcPr>
+                </a:tc>
+                <a:tc>
+                  <a:txBody>
+                    <a:bodyPr/>
+                    <a:lstStyle/>
+                    <a:p>
+                      <a:pPr algn="ctr"/>
+                      <a:r>
+                        <a:rPr lang="ru-RU" sz="1000" b="0" i="0" dirty="0">
+                          <a:solidFill>
+                            <a:schemeClr val="tx1"/>
+                          </a:solidFill>
+                          <a:latin typeface="Arial"/>
+                        </a:rPr>
+                        <a:t>-1 505</a:t>
+                      </a:r>
+                    </a:p>
+                  </a:txBody>
+                  <a:tcPr marL="36000" marR="36000" marT="18000" marB="18000" anchor="ctr">
+                    <a:lnL>
+                      <a:noFill/>
+                    </a:lnL>
+                    <a:lnR>
+                      <a:noFill/>
+                    </a:lnR>
+                    <a:lnT w="12700">
+                      <a:solidFill>
+                        <a:schemeClr val="bg1">
+                          <a:lumMod val="50000"/>
+                        </a:schemeClr>
+                      </a:solidFill>
+                      <a:prstDash val="solid"/>
+                    </a:lnT>
+                    <a:lnB w="12700">
+                      <a:solidFill>
+                        <a:schemeClr val="bg1">
+                          <a:lumMod val="50000"/>
+                        </a:schemeClr>
+                      </a:solidFill>
+                      <a:prstDash val="solid"/>
+                    </a:lnB>
+                    <a:noFill/>
+                  </a:tcPr>
+                </a:tc>
+                <a:tc>
+                  <a:txBody>
+                    <a:bodyPr/>
+                    <a:lstStyle/>
+                    <a:p>
+                      <a:pPr algn="ctr"/>
+                      <a:r>
+                        <a:rPr lang="ru-RU" sz="1000" b="0" i="0" dirty="0">
+                          <a:solidFill>
+                            <a:schemeClr val="tx1">
+                              <a:lumMod val="50000"/>
+                              <a:lumOff val="50000"/>
+                            </a:schemeClr>
+                          </a:solidFill>
+                          <a:latin typeface="Arial"/>
+                        </a:rPr>
+                        <a:t>+1,9%</a:t>
+                      </a:r>
+                    </a:p>
+                  </a:txBody>
+                  <a:tcPr marL="36000" marR="36000" marT="18000" marB="18000" anchor="ctr">
+                    <a:lnL>
+                      <a:noFill/>
+                    </a:lnL>
+                    <a:lnR>
+                      <a:noFill/>
+                    </a:lnR>
+                    <a:lnT w="12700">
+                      <a:solidFill>
+                        <a:schemeClr val="bg1">
+                          <a:lumMod val="50000"/>
+                        </a:schemeClr>
+                      </a:solidFill>
+                      <a:prstDash val="solid"/>
+                    </a:lnT>
+                    <a:lnB w="12700">
+                      <a:solidFill>
+                        <a:schemeClr val="bg1">
+                          <a:lumMod val="50000"/>
+                        </a:schemeClr>
+                      </a:solidFill>
+                      <a:prstDash val="solid"/>
+                    </a:lnB>
+                    <a:solidFill>
+                      <a:srgbClr val="C6EFCE"/>
+                    </a:solidFill>
+                  </a:tcPr>
+                </a:tc>
+                <a:tc>
+                  <a:txBody>
+                    <a:bodyPr/>
+                    <a:lstStyle/>
+                    <a:p>
+                      <a:pPr algn="l"/>
+                      <a:r>
+                        <a:rPr lang="ru-RU" sz="1000" b="1" i="0" dirty="0">
+                          <a:solidFill>
+                            <a:schemeClr val="tx1"/>
+                          </a:solidFill>
+                          <a:latin typeface="Arial"/>
+                        </a:rPr>
+                        <a:t>ФОТ +28% к 2026; в рамках стратегии</a:t>
+                      </a:r>
+                    </a:p>
+                  </a:txBody>
+                  <a:tcPr marL="72000" marR="36000" marT="18000" marB="18000" anchor="ctr">
+                    <a:lnL>
+                      <a:noFill/>
+                    </a:lnL>
+                    <a:lnR w="12700">
+                      <a:solidFill>
+                        <a:schemeClr val="bg1">
+                          <a:lumMod val="50000"/>
+                        </a:schemeClr>
+                      </a:solidFill>
+                      <a:prstDash val="solid"/>
+                    </a:lnR>
+                    <a:lnT w="12700">
+                      <a:solidFill>
+                        <a:schemeClr val="bg1">
+                          <a:lumMod val="50000"/>
+                        </a:schemeClr>
+                      </a:solidFill>
+                      <a:prstDash val="solid"/>
+                    </a:lnT>
+                    <a:lnB w="12700">
+                      <a:solidFill>
+                        <a:schemeClr val="bg1">
+                          <a:lumMod val="50000"/>
+                        </a:schemeClr>
+                      </a:solidFill>
+                      <a:prstDash val="solid"/>
+                    </a:lnB>
+                    <a:noFill/>
+                  </a:tcPr>
+                </a:tc>
+                <a:tc>
+                  <a:txBody>
+                    <a:bodyPr/>
+                    <a:lstStyle/>
+                    <a:p>
+                      <a:endParaRPr lang="ru-RU" sz="1000" dirty="0"/>
+                    </a:p>
+                  </a:txBody>
+                  <a:tcPr>
+                    <a:lnL w="12700">
+                      <a:solidFill>
+                        <a:schemeClr val="bg1">
+                          <a:lumMod val="50000"/>
+                        </a:schemeClr>
+                      </a:solidFill>
+                      <a:prstDash val="solid"/>
+                    </a:lnL>
+                    <a:lnR>
+                      <a:noFill/>
+                    </a:lnR>
+                    <a:lnT>
+                      <a:noFill/>
+                    </a:lnT>
+                    <a:lnB>
+                      <a:noFill/>
+                    </a:lnB>
+                    <a:noFill/>
+                  </a:tcPr>
+                </a:tc>
+                <a:tc>
+                  <a:txBody>
+                    <a:bodyPr/>
+                    <a:lstStyle/>
+                    <a:p>
+                      <a:pPr algn="ctr"/>
+                      <a:r>
+                        <a:rPr lang="ru-RU" sz="1000" b="0" i="0" dirty="0">
+                          <a:solidFill>
+                            <a:schemeClr val="tx1"/>
+                          </a:solidFill>
+                          <a:latin typeface="Arial"/>
+                        </a:rPr>
+                        <a:t>-355</a:t>
+                      </a:r>
+                    </a:p>
+                  </a:txBody>
+                  <a:tcPr marL="36000" marR="36000" marT="18000" marB="18000" anchor="ctr">
+                    <a:lnL w="12700">
+                      <a:solidFill>
+                        <a:schemeClr val="bg1">
+                          <a:lumMod val="50000"/>
+                        </a:schemeClr>
+                      </a:solidFill>
+                      <a:prstDash val="solid"/>
+                    </a:lnL>
+                    <a:lnR>
+                      <a:noFill/>
+                    </a:lnR>
+                    <a:lnT w="12700">
+                      <a:solidFill>
+                        <a:schemeClr val="bg1">
+                          <a:lumMod val="50000"/>
+                        </a:schemeClr>
+                      </a:solidFill>
+                      <a:prstDash val="solid"/>
+                    </a:lnT>
+                    <a:lnB w="12700">
+                      <a:solidFill>
+                        <a:schemeClr val="bg1">
+                          <a:lumMod val="50000"/>
+                        </a:schemeClr>
+                      </a:solidFill>
+                      <a:prstDash val="solid"/>
+                    </a:lnB>
+                    <a:noFill/>
+                  </a:tcPr>
+                </a:tc>
+                <a:tc>
+                  <a:txBody>
+                    <a:bodyPr/>
+                    <a:lstStyle/>
+                    <a:p>
+                      <a:pPr algn="ctr"/>
+                      <a:r>
+                        <a:rPr lang="ru-RU" sz="1000" b="0" i="0" dirty="0">
+                          <a:solidFill>
+                            <a:schemeClr val="tx1"/>
+                          </a:solidFill>
+                          <a:latin typeface="Arial"/>
+                        </a:rPr>
+                        <a:t>-373</a:t>
+                      </a:r>
+                    </a:p>
+                  </a:txBody>
+                  <a:tcPr marL="36000" marR="36000" marT="18000" marB="18000" anchor="ctr">
+                    <a:lnL>
+                      <a:noFill/>
+                    </a:lnL>
+                    <a:lnR>
+                      <a:noFill/>
+                    </a:lnR>
+                    <a:lnT w="12700">
+                      <a:solidFill>
+                        <a:schemeClr val="bg1">
+                          <a:lumMod val="50000"/>
+                        </a:schemeClr>
+                      </a:solidFill>
+                      <a:prstDash val="solid"/>
+                    </a:lnT>
+                    <a:lnB w="12700">
+                      <a:solidFill>
+                        <a:schemeClr val="bg1">
+                          <a:lumMod val="50000"/>
+                        </a:schemeClr>
+                      </a:solidFill>
+                      <a:prstDash val="solid"/>
+                    </a:lnB>
+                    <a:noFill/>
+                  </a:tcPr>
+                </a:tc>
+                <a:tc>
+                  <a:txBody>
+                    <a:bodyPr/>
+                    <a:lstStyle/>
+                    <a:p>
+                      <a:pPr algn="ctr"/>
+                      <a:r>
+                        <a:rPr lang="ru-RU" sz="1000" b="0" i="0" dirty="0">
+                          <a:solidFill>
+                            <a:schemeClr val="tx1"/>
+                          </a:solidFill>
+                          <a:latin typeface="Arial"/>
+                        </a:rPr>
+                        <a:t>-355</a:t>
+                      </a:r>
+                    </a:p>
+                  </a:txBody>
+                  <a:tcPr marL="36000" marR="36000" marT="18000" marB="18000" anchor="ctr">
+                    <a:lnL>
+                      <a:noFill/>
+                    </a:lnL>
+                    <a:lnR>
+                      <a:noFill/>
+                    </a:lnR>
+                    <a:lnT w="12700">
+                      <a:solidFill>
+                        <a:schemeClr val="bg1">
+                          <a:lumMod val="50000"/>
+                        </a:schemeClr>
+                      </a:solidFill>
+                      <a:prstDash val="solid"/>
+                    </a:lnT>
+                    <a:lnB w="12700">
+                      <a:solidFill>
+                        <a:schemeClr val="bg1">
+                          <a:lumMod val="50000"/>
+                        </a:schemeClr>
+                      </a:solidFill>
+                      <a:prstDash val="solid"/>
+                    </a:lnB>
+                    <a:noFill/>
+                  </a:tcPr>
+                </a:tc>
+                <a:tc>
+                  <a:txBody>
+                    <a:bodyPr/>
+                    <a:lstStyle/>
+                    <a:p>
+                      <a:pPr algn="ctr"/>
+                      <a:r>
+                        <a:rPr lang="ru-RU" sz="1000" b="0" i="0" dirty="0">
+                          <a:solidFill>
+                            <a:schemeClr val="tx1"/>
+                          </a:solidFill>
+                          <a:latin typeface="Arial"/>
+                        </a:rPr>
+                        <a:t>-394</a:t>
+                      </a:r>
+                    </a:p>
+                  </a:txBody>
+                  <a:tcPr marL="36000" marR="36000" marT="18000" marB="18000" anchor="ctr">
+                    <a:lnL>
+                      <a:noFill/>
+                    </a:lnL>
+                    <a:lnR w="12700">
+                      <a:solidFill>
+                        <a:schemeClr val="bg1">
+                          <a:lumMod val="50000"/>
+                        </a:schemeClr>
+                      </a:solidFill>
+                      <a:prstDash val="solid"/>
+                    </a:lnR>
+                    <a:lnT w="12700">
+                      <a:solidFill>
+                        <a:schemeClr val="bg1">
+                          <a:lumMod val="50000"/>
+                        </a:schemeClr>
+                      </a:solidFill>
+                      <a:prstDash val="solid"/>
+                    </a:lnT>
+                    <a:lnB w="12700">
+                      <a:solidFill>
+                        <a:schemeClr val="bg1">
+                          <a:lumMod val="50000"/>
+                        </a:schemeClr>
+                      </a:solidFill>
+                      <a:prstDash val="solid"/>
+                    </a:lnB>
+                    <a:noFill/>
+                  </a:tcPr>
+                </a:tc>
+              </a:tr>
+              <a:tr h="315000">
+                <a:tc>
+                  <a:txBody>
+                    <a:bodyPr/>
+                    <a:lstStyle/>
+                    <a:p>
+                      <a:pPr algn="l"/>
+                      <a:r>
+                        <a:rPr lang="ru-RU" sz="1000" b="1" i="0" dirty="0">
+                          <a:solidFill>
+                            <a:schemeClr val="tx1"/>
+                          </a:solidFill>
+                          <a:latin typeface="Arial"/>
+                        </a:rPr>
+                        <a:t>Marketing</a:t>
+                      </a:r>
+                    </a:p>
+                  </a:txBody>
+                  <a:tcPr marL="72000" marR="36000" marT="18000" marB="18000" anchor="ctr">
+                    <a:lnL w="12700">
+                      <a:solidFill>
+                        <a:schemeClr val="bg1">
+                          <a:lumMod val="50000"/>
+                        </a:schemeClr>
+                      </a:solidFill>
+                      <a:prstDash val="solid"/>
+                    </a:lnL>
+                    <a:lnR>
+                      <a:noFill/>
+                    </a:lnR>
+                    <a:lnT w="12700">
+                      <a:solidFill>
+                        <a:schemeClr val="bg1">
+                          <a:lumMod val="50000"/>
+                        </a:schemeClr>
+                      </a:solidFill>
+                      <a:prstDash val="solid"/>
+                    </a:lnT>
+                    <a:lnB w="12700">
+                      <a:solidFill>
+                        <a:schemeClr val="bg1">
+                          <a:lumMod val="50000"/>
+                        </a:schemeClr>
+                      </a:solidFill>
+                      <a:prstDash val="solid"/>
+                    </a:lnB>
+                    <a:noFill/>
+                  </a:tcPr>
+                </a:tc>
+                <a:tc>
+                  <a:txBody>
+                    <a:bodyPr/>
+                    <a:lstStyle/>
+                    <a:p>
+                      <a:pPr algn="ctr"/>
+                      <a:r>
+                        <a:rPr lang="ru-RU" sz="1000" b="1" i="0" dirty="0">
+                          <a:solidFill>
+                            <a:schemeClr val="tx1"/>
+                          </a:solidFill>
+                          <a:latin typeface="Arial"/>
+                        </a:rPr>
+                        <a:t>-2 110</a:t>
+                      </a:r>
+                    </a:p>
+                  </a:txBody>
+                  <a:tcPr marL="36000" marR="36000" marT="18000" marB="18000" anchor="ctr">
+                    <a:lnL>
+                      <a:noFill/>
+                    </a:lnL>
+                    <a:lnR>
+                      <a:noFill/>
+                    </a:lnR>
+                    <a:lnT w="12700">
+                      <a:solidFill>
+                        <a:schemeClr val="bg1">
+                          <a:lumMod val="50000"/>
+                        </a:schemeClr>
+                      </a:solidFill>
+                      <a:prstDash val="solid"/>
+                    </a:lnT>
+                    <a:lnB w="12700">
+                      <a:solidFill>
+                        <a:schemeClr val="bg1">
+                          <a:lumMod val="50000"/>
+                        </a:schemeClr>
+                      </a:solidFill>
+                      <a:prstDash val="solid"/>
+                    </a:lnB>
+                    <a:noFill/>
+                  </a:tcPr>
+                </a:tc>
+                <a:tc>
+                  <a:txBody>
+                    <a:bodyPr/>
+                    <a:lstStyle/>
+                    <a:p>
+                      <a:pPr algn="ctr"/>
+                      <a:r>
+                        <a:rPr lang="ru-RU" sz="1000" b="0" i="0" dirty="0">
+                          <a:solidFill>
+                            <a:schemeClr val="tx1"/>
+                          </a:solidFill>
+                          <a:latin typeface="Arial"/>
+                        </a:rPr>
+                        <a:t>-936</a:t>
+                      </a:r>
+                    </a:p>
+                  </a:txBody>
+                  <a:tcPr marL="36000" marR="36000" marT="18000" marB="18000" anchor="ctr">
+                    <a:lnL>
+                      <a:noFill/>
+                    </a:lnL>
+                    <a:lnR>
+                      <a:noFill/>
+                    </a:lnR>
+                    <a:lnT w="12700">
+                      <a:solidFill>
+                        <a:schemeClr val="bg1">
+                          <a:lumMod val="50000"/>
+                        </a:schemeClr>
+                      </a:solidFill>
+                      <a:prstDash val="solid"/>
+                    </a:lnT>
+                    <a:lnB w="12700">
+                      <a:solidFill>
+                        <a:schemeClr val="bg1">
+                          <a:lumMod val="50000"/>
+                        </a:schemeClr>
+                      </a:solidFill>
+                      <a:prstDash val="solid"/>
+                    </a:lnB>
+                    <a:noFill/>
+                  </a:tcPr>
+                </a:tc>
+                <a:tc>
+                  <a:txBody>
+                    <a:bodyPr/>
+                    <a:lstStyle/>
+                    <a:p>
+                      <a:pPr algn="ctr"/>
+                      <a:r>
+                        <a:rPr lang="ru-RU" sz="1000" b="0" i="0" dirty="0">
+                          <a:solidFill>
+                            <a:schemeClr val="tx1">
+                              <a:lumMod val="50000"/>
+                              <a:lumOff val="50000"/>
+                            </a:schemeClr>
+                          </a:solidFill>
+                          <a:latin typeface="Arial"/>
+                        </a:rPr>
+                        <a:t>-1 174</a:t>
+                      </a:r>
+                    </a:p>
+                  </a:txBody>
+                  <a:tcPr marL="36000" marR="36000" marT="18000" marB="18000" anchor="ctr">
+                    <a:lnL>
+                      <a:noFill/>
+                    </a:lnL>
+                    <a:lnR>
+                      <a:noFill/>
+                    </a:lnR>
+                    <a:lnT w="12700">
+                      <a:solidFill>
+                        <a:schemeClr val="bg1">
+                          <a:lumMod val="50000"/>
+                        </a:schemeClr>
+                      </a:solidFill>
+                      <a:prstDash val="solid"/>
+                    </a:lnT>
+                    <a:lnB w="12700">
+                      <a:solidFill>
+                        <a:schemeClr val="bg1">
+                          <a:lumMod val="50000"/>
+                        </a:schemeClr>
+                      </a:solidFill>
+                      <a:prstDash val="solid"/>
+                    </a:lnB>
+                    <a:noFill/>
+                  </a:tcPr>
+                </a:tc>
+                <a:tc>
+                  <a:txBody>
+                    <a:bodyPr/>
+                    <a:lstStyle/>
+                    <a:p>
+                      <a:pPr algn="ctr"/>
+                      <a:r>
+                        <a:rPr lang="ru-RU" sz="1000" b="0" i="0" dirty="0">
+                          <a:solidFill>
+                            <a:schemeClr val="tx1">
+                              <a:lumMod val="50000"/>
+                              <a:lumOff val="50000"/>
+                            </a:schemeClr>
+                          </a:solidFill>
+                          <a:latin typeface="Arial"/>
+                        </a:rPr>
+                        <a:t>-125,5%</a:t>
+                      </a:r>
+                    </a:p>
+                  </a:txBody>
+                  <a:tcPr marL="36000" marR="36000" marT="18000" marB="18000" anchor="ctr">
+                    <a:lnL>
+                      <a:noFill/>
+                    </a:lnL>
+                    <a:lnR>
+                      <a:noFill/>
+                    </a:lnR>
+                    <a:lnT w="12700">
+                      <a:solidFill>
+                        <a:schemeClr val="bg1">
+                          <a:lumMod val="50000"/>
+                        </a:schemeClr>
+                      </a:solidFill>
+                      <a:prstDash val="solid"/>
+                    </a:lnT>
+                    <a:lnB w="12700">
+                      <a:solidFill>
+                        <a:schemeClr val="bg1">
+                          <a:lumMod val="50000"/>
+                        </a:schemeClr>
+                      </a:solidFill>
+                      <a:prstDash val="solid"/>
+                    </a:lnB>
+                    <a:noFill/>
+                  </a:tcPr>
+                </a:tc>
+                <a:tc>
+                  <a:txBody>
+                    <a:bodyPr/>
+                    <a:lstStyle/>
+                    <a:p>
+                      <a:pPr algn="ctr"/>
+                      <a:r>
+                        <a:rPr lang="ru-RU" sz="1000" b="0" i="0" dirty="0">
+                          <a:solidFill>
+                            <a:schemeClr val="tx1"/>
+                          </a:solidFill>
+                          <a:latin typeface="Arial"/>
+                        </a:rPr>
+                        <a:t>-1 330</a:t>
+                      </a:r>
+                    </a:p>
+                  </a:txBody>
+                  <a:tcPr marL="36000" marR="36000" marT="18000" marB="18000" anchor="ctr">
+                    <a:lnL>
+                      <a:noFill/>
+                    </a:lnL>
+                    <a:lnR>
+                      <a:noFill/>
+                    </a:lnR>
+                    <a:lnT w="12700">
+                      <a:solidFill>
+                        <a:schemeClr val="bg1">
+                          <a:lumMod val="50000"/>
+                        </a:schemeClr>
+                      </a:solidFill>
+                      <a:prstDash val="solid"/>
+                    </a:lnT>
+                    <a:lnB w="12700">
+                      <a:solidFill>
+                        <a:schemeClr val="bg1">
+                          <a:lumMod val="50000"/>
+                        </a:schemeClr>
+                      </a:solidFill>
+                      <a:prstDash val="solid"/>
+                    </a:lnB>
+                    <a:noFill/>
+                  </a:tcPr>
+                </a:tc>
+                <a:tc>
+                  <a:txBody>
+                    <a:bodyPr/>
+                    <a:lstStyle/>
+                    <a:p>
+                      <a:pPr algn="ctr"/>
+                      <a:r>
+                        <a:rPr lang="ru-RU" sz="1000" b="0" i="0" dirty="0">
+                          <a:solidFill>
+                            <a:schemeClr val="tx1">
+                              <a:lumMod val="50000"/>
+                              <a:lumOff val="50000"/>
+                            </a:schemeClr>
+                          </a:solidFill>
+                          <a:latin typeface="Arial"/>
+                        </a:rPr>
+                        <a:t>-58,7%</a:t>
+                      </a:r>
+                    </a:p>
+                  </a:txBody>
+                  <a:tcPr marL="36000" marR="36000" marT="18000" marB="18000" anchor="ctr">
+                    <a:lnL>
+                      <a:noFill/>
+                    </a:lnL>
+                    <a:lnR>
+                      <a:noFill/>
+                    </a:lnR>
+                    <a:lnT w="12700">
+                      <a:solidFill>
+                        <a:schemeClr val="bg1">
+                          <a:lumMod val="50000"/>
+                        </a:schemeClr>
+                      </a:solidFill>
+                      <a:prstDash val="solid"/>
+                    </a:lnT>
+                    <a:lnB w="12700">
+                      <a:solidFill>
+                        <a:schemeClr val="bg1">
+                          <a:lumMod val="50000"/>
+                        </a:schemeClr>
+                      </a:solidFill>
+                      <a:prstDash val="solid"/>
+                    </a:lnB>
+                    <a:noFill/>
+                  </a:tcPr>
+                </a:tc>
+                <a:tc>
+                  <a:txBody>
+                    <a:bodyPr/>
+                    <a:lstStyle/>
+                    <a:p>
+                      <a:pPr algn="l"/>
+                      <a:r>
+                        <a:rPr lang="ru-RU" sz="1000" b="1" i="0" dirty="0">
+                          <a:solidFill>
+                            <a:schemeClr val="tx1"/>
+                          </a:solidFill>
+                          <a:latin typeface="Arial"/>
+                        </a:rPr>
+                        <a:t>Интернет −1 000, агентства −795, креаторы −215</a:t>
+                      </a:r>
+                    </a:p>
+                  </a:txBody>
+                  <a:tcPr marL="72000" marR="36000" marT="18000" marB="18000" anchor="ctr">
+                    <a:lnL>
+                      <a:noFill/>
+                    </a:lnL>
+                    <a:lnR w="12700">
+                      <a:solidFill>
+                        <a:schemeClr val="bg1">
+                          <a:lumMod val="50000"/>
+                        </a:schemeClr>
+                      </a:solidFill>
+                      <a:prstDash val="solid"/>
+                    </a:lnR>
+                    <a:lnT w="12700">
+                      <a:solidFill>
+                        <a:schemeClr val="bg1">
+                          <a:lumMod val="50000"/>
+                        </a:schemeClr>
+                      </a:solidFill>
+                      <a:prstDash val="solid"/>
+                    </a:lnT>
+                    <a:lnB w="12700">
+                      <a:solidFill>
+                        <a:schemeClr val="bg1">
+                          <a:lumMod val="50000"/>
+                        </a:schemeClr>
+                      </a:solidFill>
+                      <a:prstDash val="solid"/>
+                    </a:lnB>
+                    <a:noFill/>
+                  </a:tcPr>
+                </a:tc>
+                <a:tc>
+                  <a:txBody>
+                    <a:bodyPr/>
+                    <a:lstStyle/>
+                    <a:p>
+                      <a:endParaRPr lang="ru-RU" sz="1000" dirty="0"/>
+                    </a:p>
+                  </a:txBody>
+                  <a:tcPr>
+                    <a:lnL w="12700">
+                      <a:solidFill>
+                        <a:schemeClr val="bg1">
+                          <a:lumMod val="50000"/>
+                        </a:schemeClr>
+                      </a:solidFill>
+                      <a:prstDash val="solid"/>
+                    </a:lnL>
+                    <a:lnR>
+                      <a:noFill/>
+                    </a:lnR>
+                    <a:lnT>
+                      <a:noFill/>
+                    </a:lnT>
+                    <a:lnB>
+                      <a:noFill/>
+                    </a:lnB>
+                    <a:noFill/>
+                  </a:tcPr>
+                </a:tc>
+                <a:tc>
+                  <a:txBody>
+                    <a:bodyPr/>
+                    <a:lstStyle/>
+                    <a:p>
+                      <a:pPr algn="ctr"/>
+                      <a:r>
+                        <a:rPr lang="ru-RU" sz="1000" b="0" i="0" dirty="0">
+                          <a:solidFill>
+                            <a:schemeClr val="tx1"/>
+                          </a:solidFill>
+                          <a:latin typeface="Arial"/>
+                        </a:rPr>
+                        <a:t>-399</a:t>
+                      </a:r>
+                    </a:p>
+                  </a:txBody>
+                  <a:tcPr marL="36000" marR="36000" marT="18000" marB="18000" anchor="ctr">
+                    <a:lnL w="12700">
+                      <a:solidFill>
+                        <a:schemeClr val="bg1">
+                          <a:lumMod val="50000"/>
+                        </a:schemeClr>
+                      </a:solidFill>
+                      <a:prstDash val="solid"/>
+                    </a:lnL>
+                    <a:lnR>
+                      <a:noFill/>
+                    </a:lnR>
+                    <a:lnT w="12700">
+                      <a:solidFill>
+                        <a:schemeClr val="bg1">
+                          <a:lumMod val="50000"/>
+                        </a:schemeClr>
+                      </a:solidFill>
+                      <a:prstDash val="solid"/>
+                    </a:lnT>
+                    <a:lnB w="12700">
+                      <a:solidFill>
+                        <a:schemeClr val="bg1">
+                          <a:lumMod val="50000"/>
+                        </a:schemeClr>
+                      </a:solidFill>
+                      <a:prstDash val="solid"/>
+                    </a:lnB>
+                    <a:noFill/>
+                  </a:tcPr>
+                </a:tc>
+                <a:tc>
+                  <a:txBody>
+                    <a:bodyPr/>
+                    <a:lstStyle/>
+                    <a:p>
+                      <a:pPr algn="ctr"/>
+                      <a:r>
+                        <a:rPr lang="ru-RU" sz="1000" b="0" i="0" dirty="0">
+                          <a:solidFill>
+                            <a:schemeClr val="tx1"/>
+                          </a:solidFill>
+                          <a:latin typeface="Arial"/>
+                        </a:rPr>
+                        <a:t>-492</a:t>
+                      </a:r>
+                    </a:p>
+                  </a:txBody>
+                  <a:tcPr marL="36000" marR="36000" marT="18000" marB="18000" anchor="ctr">
+                    <a:lnL>
+                      <a:noFill/>
+                    </a:lnL>
+                    <a:lnR>
+                      <a:noFill/>
+                    </a:lnR>
+                    <a:lnT w="12700">
+                      <a:solidFill>
+                        <a:schemeClr val="bg1">
+                          <a:lumMod val="50000"/>
+                        </a:schemeClr>
+                      </a:solidFill>
+                      <a:prstDash val="solid"/>
+                    </a:lnT>
+                    <a:lnB w="12700">
+                      <a:solidFill>
+                        <a:schemeClr val="bg1">
+                          <a:lumMod val="50000"/>
+                        </a:schemeClr>
+                      </a:solidFill>
+                      <a:prstDash val="solid"/>
+                    </a:lnB>
+                    <a:noFill/>
+                  </a:tcPr>
+                </a:tc>
+                <a:tc>
+                  <a:txBody>
+                    <a:bodyPr/>
+                    <a:lstStyle/>
+                    <a:p>
+                      <a:pPr algn="ctr"/>
+                      <a:r>
+                        <a:rPr lang="ru-RU" sz="1000" b="0" i="0" dirty="0">
+                          <a:solidFill>
+                            <a:schemeClr val="tx1"/>
+                          </a:solidFill>
+                          <a:latin typeface="Arial"/>
+                        </a:rPr>
+                        <a:t>-518</a:t>
+                      </a:r>
+                    </a:p>
+                  </a:txBody>
+                  <a:tcPr marL="36000" marR="36000" marT="18000" marB="18000" anchor="ctr">
+                    <a:lnL>
+                      <a:noFill/>
+                    </a:lnL>
+                    <a:lnR>
+                      <a:noFill/>
+                    </a:lnR>
+                    <a:lnT w="12700">
+                      <a:solidFill>
+                        <a:schemeClr val="bg1">
+                          <a:lumMod val="50000"/>
+                        </a:schemeClr>
+                      </a:solidFill>
+                      <a:prstDash val="solid"/>
+                    </a:lnT>
+                    <a:lnB w="12700">
+                      <a:solidFill>
+                        <a:schemeClr val="bg1">
+                          <a:lumMod val="50000"/>
+                        </a:schemeClr>
+                      </a:solidFill>
+                      <a:prstDash val="solid"/>
+                    </a:lnB>
+                    <a:noFill/>
+                  </a:tcPr>
+                </a:tc>
+                <a:tc>
+                  <a:txBody>
+                    <a:bodyPr/>
+                    <a:lstStyle/>
+                    <a:p>
+                      <a:pPr algn="ctr"/>
+                      <a:r>
+                        <a:rPr lang="ru-RU" sz="1000" b="0" i="0" dirty="0">
+                          <a:solidFill>
+                            <a:schemeClr val="tx1"/>
+                          </a:solidFill>
+                          <a:latin typeface="Arial"/>
+                        </a:rPr>
+                        <a:t>-701</a:t>
+                      </a:r>
+                    </a:p>
+                  </a:txBody>
+                  <a:tcPr marL="36000" marR="36000" marT="18000" marB="18000" anchor="ctr">
+                    <a:lnL>
+                      <a:noFill/>
+                    </a:lnL>
+                    <a:lnR w="12700">
+                      <a:solidFill>
+                        <a:schemeClr val="bg1">
+                          <a:lumMod val="50000"/>
+                        </a:schemeClr>
+                      </a:solidFill>
+                      <a:prstDash val="solid"/>
+                    </a:lnR>
+                    <a:lnT w="12700">
+                      <a:solidFill>
+                        <a:schemeClr val="bg1">
+                          <a:lumMod val="50000"/>
+                        </a:schemeClr>
+                      </a:solidFill>
+                      <a:prstDash val="solid"/>
+                    </a:lnT>
+                    <a:lnB w="12700">
+                      <a:solidFill>
+                        <a:schemeClr val="bg1">
+                          <a:lumMod val="50000"/>
+                        </a:schemeClr>
+                      </a:solidFill>
+                      <a:prstDash val="solid"/>
+                    </a:lnB>
+                    <a:noFill/>
+                  </a:tcPr>
+                </a:tc>
+              </a:tr>
+              <a:tr h="315000">
+                <a:tc>
+                  <a:txBody>
+                    <a:bodyPr/>
+                    <a:lstStyle/>
+                    <a:p>
+                      <a:pPr algn="l"/>
+                      <a:r>
+                        <a:rPr lang="ru-RU" sz="1000" b="1" i="0" dirty="0">
+                          <a:solidFill>
+                            <a:schemeClr val="tx1"/>
+                          </a:solidFill>
+                          <a:latin typeface="Arial"/>
+                        </a:rPr>
+                        <a:t>OPEX</a:t>
+                      </a:r>
+                    </a:p>
+                  </a:txBody>
+                  <a:tcPr marL="72000" marR="36000" marT="18000" marB="18000" anchor="ctr">
+                    <a:lnL w="12700">
+                      <a:solidFill>
+                        <a:schemeClr val="bg1">
+                          <a:lumMod val="50000"/>
+                        </a:schemeClr>
+                      </a:solidFill>
+                      <a:prstDash val="solid"/>
+                    </a:lnL>
+                    <a:lnR>
+                      <a:noFill/>
+                    </a:lnR>
+                    <a:lnT w="12700">
+                      <a:solidFill>
+                        <a:schemeClr val="bg1">
+                          <a:lumMod val="50000"/>
+                        </a:schemeClr>
+                      </a:solidFill>
+                      <a:prstDash val="solid"/>
+                    </a:lnT>
+                    <a:lnB w="12700">
+                      <a:solidFill>
+                        <a:schemeClr val="bg1">
+                          <a:lumMod val="50000"/>
+                        </a:schemeClr>
+                      </a:solidFill>
+                      <a:prstDash val="solid"/>
+                    </a:lnB>
+                    <a:solidFill>
+                      <a:srgbClr val="EDEDED"/>
+                    </a:solidFill>
+                  </a:tcPr>
+                </a:tc>
+                <a:tc>
+                  <a:txBody>
+                    <a:bodyPr/>
+                    <a:lstStyle/>
+                    <a:p>
+                      <a:pPr algn="ctr"/>
+                      <a:r>
+                        <a:rPr lang="ru-RU" sz="1000" b="1" i="0" dirty="0">
+                          <a:solidFill>
+                            <a:schemeClr val="tx1"/>
+                          </a:solidFill>
+                          <a:latin typeface="Arial"/>
+                        </a:rPr>
+                        <a:t>-3 781</a:t>
+                      </a:r>
+                    </a:p>
+                  </a:txBody>
+                  <a:tcPr marL="36000" marR="36000" marT="18000" marB="18000" anchor="ctr">
+                    <a:lnL>
+                      <a:noFill/>
+                    </a:lnL>
+                    <a:lnR>
+                      <a:noFill/>
+                    </a:lnR>
+                    <a:lnT w="12700">
+                      <a:solidFill>
+                        <a:schemeClr val="bg1">
+                          <a:lumMod val="50000"/>
+                        </a:schemeClr>
+                      </a:solidFill>
+                      <a:prstDash val="solid"/>
+                    </a:lnT>
+                    <a:lnB w="12700">
+                      <a:solidFill>
+                        <a:schemeClr val="bg1">
+                          <a:lumMod val="50000"/>
+                        </a:schemeClr>
+                      </a:solidFill>
+                      <a:prstDash val="solid"/>
+                    </a:lnB>
+                    <a:solidFill>
+                      <a:srgbClr val="EDEDED"/>
+                    </a:solidFill>
+                  </a:tcPr>
+                </a:tc>
+                <a:tc>
+                  <a:txBody>
+                    <a:bodyPr/>
+                    <a:lstStyle/>
+                    <a:p>
+                      <a:pPr algn="ctr"/>
+                      <a:r>
+                        <a:rPr lang="ru-RU" sz="1000" b="0" i="0" dirty="0">
+                          <a:solidFill>
+                            <a:schemeClr val="tx1"/>
+                          </a:solidFill>
+                          <a:latin typeface="Arial"/>
+                        </a:rPr>
+                        <a:t>-2 239</a:t>
+                      </a:r>
+                    </a:p>
+                  </a:txBody>
+                  <a:tcPr marL="36000" marR="36000" marT="18000" marB="18000" anchor="ctr">
+                    <a:lnL>
+                      <a:noFill/>
+                    </a:lnL>
+                    <a:lnR>
+                      <a:noFill/>
+                    </a:lnR>
+                    <a:lnT w="12700">
+                      <a:solidFill>
+                        <a:schemeClr val="bg1">
+                          <a:lumMod val="50000"/>
+                        </a:schemeClr>
+                      </a:solidFill>
+                      <a:prstDash val="solid"/>
+                    </a:lnT>
+                    <a:lnB w="12700">
+                      <a:solidFill>
+                        <a:schemeClr val="bg1">
+                          <a:lumMod val="50000"/>
+                        </a:schemeClr>
+                      </a:solidFill>
+                      <a:prstDash val="solid"/>
+                    </a:lnB>
+                    <a:solidFill>
+                      <a:srgbClr val="EDEDED"/>
+                    </a:solidFill>
+                  </a:tcPr>
+                </a:tc>
+                <a:tc>
+                  <a:txBody>
+                    <a:bodyPr/>
+                    <a:lstStyle/>
+                    <a:p>
+                      <a:pPr algn="ctr"/>
+                      <a:r>
+                        <a:rPr lang="ru-RU" sz="1000" b="0" i="0" dirty="0">
+                          <a:solidFill>
+                            <a:schemeClr val="tx1">
+                              <a:lumMod val="50000"/>
+                              <a:lumOff val="50000"/>
+                            </a:schemeClr>
+                          </a:solidFill>
+                          <a:latin typeface="Arial"/>
+                        </a:rPr>
+                        <a:t>-1 543</a:t>
+                      </a:r>
+                    </a:p>
+                  </a:txBody>
+                  <a:tcPr marL="36000" marR="36000" marT="18000" marB="18000" anchor="ctr">
+                    <a:lnL>
+                      <a:noFill/>
+                    </a:lnL>
+                    <a:lnR>
+                      <a:noFill/>
+                    </a:lnR>
+                    <a:lnT w="12700">
+                      <a:solidFill>
+                        <a:schemeClr val="bg1">
+                          <a:lumMod val="50000"/>
+                        </a:schemeClr>
+                      </a:solidFill>
+                      <a:prstDash val="solid"/>
+                    </a:lnT>
+                    <a:lnB w="12700">
+                      <a:solidFill>
+                        <a:schemeClr val="bg1">
+                          <a:lumMod val="50000"/>
+                        </a:schemeClr>
+                      </a:solidFill>
+                      <a:prstDash val="solid"/>
+                    </a:lnB>
+                    <a:solidFill>
+                      <a:srgbClr val="EDEDED"/>
+                    </a:solidFill>
+                  </a:tcPr>
+                </a:tc>
+                <a:tc>
+                  <a:txBody>
+                    <a:bodyPr/>
+                    <a:lstStyle/>
+                    <a:p>
+                      <a:pPr algn="ctr"/>
+                      <a:r>
+                        <a:rPr lang="ru-RU" sz="1000" b="0" i="0" dirty="0">
+                          <a:solidFill>
+                            <a:schemeClr val="tx1">
+                              <a:lumMod val="50000"/>
+                              <a:lumOff val="50000"/>
+                            </a:schemeClr>
+                          </a:solidFill>
+                          <a:latin typeface="Arial"/>
+                        </a:rPr>
+                        <a:t>-68,9%</a:t>
+                      </a:r>
+                    </a:p>
+                  </a:txBody>
+                  <a:tcPr marL="36000" marR="36000" marT="18000" marB="18000" anchor="ctr">
+                    <a:lnL>
+                      <a:noFill/>
+                    </a:lnL>
+                    <a:lnR>
+                      <a:noFill/>
+                    </a:lnR>
+                    <a:lnT w="12700">
+                      <a:solidFill>
+                        <a:schemeClr val="bg1">
+                          <a:lumMod val="50000"/>
+                        </a:schemeClr>
+                      </a:solidFill>
+                      <a:prstDash val="solid"/>
+                    </a:lnT>
+                    <a:lnB w="12700">
+                      <a:solidFill>
+                        <a:schemeClr val="bg1">
+                          <a:lumMod val="50000"/>
+                        </a:schemeClr>
+                      </a:solidFill>
+                      <a:prstDash val="solid"/>
+                    </a:lnB>
+                    <a:solidFill>
+                      <a:srgbClr val="EDEDED"/>
+                    </a:solidFill>
+                  </a:tcPr>
+                </a:tc>
+                <a:tc>
+                  <a:txBody>
+                    <a:bodyPr/>
+                    <a:lstStyle/>
+                    <a:p>
+                      <a:pPr algn="ctr"/>
+                      <a:r>
+                        <a:rPr lang="ru-RU" sz="1000" b="0" i="0" dirty="0">
+                          <a:solidFill>
+                            <a:schemeClr val="tx1"/>
+                          </a:solidFill>
+                          <a:latin typeface="Arial"/>
+                        </a:rPr>
+                        <a:t>-2 995</a:t>
+                      </a:r>
+                    </a:p>
+                  </a:txBody>
+                  <a:tcPr marL="36000" marR="36000" marT="18000" marB="18000" anchor="ctr">
+                    <a:lnL>
+                      <a:noFill/>
+                    </a:lnL>
+                    <a:lnR>
+                      <a:noFill/>
+                    </a:lnR>
+                    <a:lnT w="12700">
+                      <a:solidFill>
+                        <a:schemeClr val="bg1">
+                          <a:lumMod val="50000"/>
+                        </a:schemeClr>
+                      </a:solidFill>
+                      <a:prstDash val="solid"/>
+                    </a:lnT>
+                    <a:lnB w="12700">
+                      <a:solidFill>
+                        <a:schemeClr val="bg1">
+                          <a:lumMod val="50000"/>
+                        </a:schemeClr>
+                      </a:solidFill>
+                      <a:prstDash val="solid"/>
+                    </a:lnB>
+                    <a:solidFill>
+                      <a:srgbClr val="EDEDED"/>
+                    </a:solidFill>
+                  </a:tcPr>
+                </a:tc>
+                <a:tc>
+                  <a:txBody>
+                    <a:bodyPr/>
+                    <a:lstStyle/>
+                    <a:p>
+                      <a:pPr algn="ctr"/>
+                      <a:r>
+                        <a:rPr lang="ru-RU" sz="1000" b="0" i="0" dirty="0">
+                          <a:solidFill>
+                            <a:schemeClr val="tx1">
+                              <a:lumMod val="50000"/>
+                              <a:lumOff val="50000"/>
+                            </a:schemeClr>
+                          </a:solidFill>
+                          <a:latin typeface="Arial"/>
+                        </a:rPr>
+                        <a:t>-26,3%</a:t>
+                      </a:r>
+                    </a:p>
+                  </a:txBody>
+                  <a:tcPr marL="36000" marR="36000" marT="18000" marB="18000" anchor="ctr">
+                    <a:lnL>
+                      <a:noFill/>
+                    </a:lnL>
+                    <a:lnR>
+                      <a:noFill/>
+                    </a:lnR>
+                    <a:lnT w="12700">
+                      <a:solidFill>
+                        <a:schemeClr val="bg1">
+                          <a:lumMod val="50000"/>
+                        </a:schemeClr>
+                      </a:solidFill>
+                      <a:prstDash val="solid"/>
+                    </a:lnT>
+                    <a:lnB w="12700">
+                      <a:solidFill>
+                        <a:schemeClr val="bg1">
+                          <a:lumMod val="50000"/>
+                        </a:schemeClr>
+                      </a:solidFill>
+                      <a:prstDash val="solid"/>
+                    </a:lnB>
+                    <a:solidFill>
+                      <a:srgbClr val="EDEDED"/>
+                    </a:solidFill>
+                  </a:tcPr>
+                </a:tc>
+                <a:tc>
+                  <a:txBody>
+                    <a:bodyPr/>
+                    <a:lstStyle/>
+                    <a:p>
+                      <a:pPr algn="l"/>
+                      <a:r>
+                        <a:rPr lang="ru-RU" sz="1000" b="1" i="0" dirty="0">
+                          <a:solidFill>
+                            <a:schemeClr val="tx1"/>
+                          </a:solidFill>
+                          <a:latin typeface="Arial"/>
+                        </a:rPr>
+                        <a:t>Рост за счёт маркетинга</a:t>
+                      </a:r>
+                    </a:p>
+                  </a:txBody>
+                  <a:tcPr marL="72000" marR="36000" marT="18000" marB="18000" anchor="ctr">
+                    <a:lnL>
+                      <a:noFill/>
+                    </a:lnL>
+                    <a:lnR w="12700">
+                      <a:solidFill>
+                        <a:schemeClr val="bg1">
+                          <a:lumMod val="50000"/>
+                        </a:schemeClr>
+                      </a:solidFill>
+                      <a:prstDash val="solid"/>
+                    </a:lnR>
+                    <a:lnT w="12700">
+                      <a:solidFill>
+                        <a:schemeClr val="bg1">
+                          <a:lumMod val="50000"/>
+                        </a:schemeClr>
+                      </a:solidFill>
+                      <a:prstDash val="solid"/>
+                    </a:lnT>
+                    <a:lnB w="12700">
+                      <a:solidFill>
+                        <a:schemeClr val="bg1">
+                          <a:lumMod val="50000"/>
+                        </a:schemeClr>
+                      </a:solidFill>
+                      <a:prstDash val="solid"/>
+                    </a:lnB>
+                    <a:solidFill>
+                      <a:srgbClr val="EDEDED"/>
+                    </a:solidFill>
+                  </a:tcPr>
+                </a:tc>
+                <a:tc>
+                  <a:txBody>
+                    <a:bodyPr/>
+                    <a:lstStyle/>
+                    <a:p>
+                      <a:endParaRPr lang="ru-RU" sz="1000" dirty="0"/>
+                    </a:p>
+                  </a:txBody>
+                  <a:tcPr>
+                    <a:lnL w="12700">
+                      <a:solidFill>
+                        <a:schemeClr val="bg1">
+                          <a:lumMod val="50000"/>
+                        </a:schemeClr>
+                      </a:solidFill>
+                      <a:prstDash val="solid"/>
+                    </a:lnL>
+                    <a:lnR>
+                      <a:noFill/>
+                    </a:lnR>
+                    <a:lnT>
+                      <a:noFill/>
+                    </a:lnT>
+                    <a:lnB>
+                      <a:noFill/>
+                    </a:lnB>
+                    <a:noFill/>
+                  </a:tcPr>
+                </a:tc>
+                <a:tc>
+                  <a:txBody>
+                    <a:bodyPr/>
+                    <a:lstStyle/>
+                    <a:p>
+                      <a:pPr algn="ctr"/>
+                      <a:r>
+                        <a:rPr lang="ru-RU" sz="1000" b="0" i="0" dirty="0">
+                          <a:solidFill>
+                            <a:schemeClr val="tx1"/>
+                          </a:solidFill>
+                          <a:latin typeface="Arial"/>
+                        </a:rPr>
+                        <a:t>-789</a:t>
+                      </a:r>
+                    </a:p>
+                  </a:txBody>
+                  <a:tcPr marL="36000" marR="36000" marT="18000" marB="18000" anchor="ctr">
+                    <a:lnL w="12700">
+                      <a:solidFill>
+                        <a:schemeClr val="bg1">
+                          <a:lumMod val="50000"/>
+                        </a:schemeClr>
+                      </a:solidFill>
+                      <a:prstDash val="solid"/>
+                    </a:lnL>
+                    <a:lnR>
+                      <a:noFill/>
+                    </a:lnR>
+                    <a:lnT w="12700">
+                      <a:solidFill>
+                        <a:schemeClr val="bg1">
+                          <a:lumMod val="50000"/>
+                        </a:schemeClr>
+                      </a:solidFill>
+                      <a:prstDash val="solid"/>
+                    </a:lnT>
+                    <a:lnB w="12700">
+                      <a:solidFill>
+                        <a:schemeClr val="bg1">
+                          <a:lumMod val="50000"/>
+                        </a:schemeClr>
+                      </a:solidFill>
+                      <a:prstDash val="solid"/>
+                    </a:lnB>
+                    <a:solidFill>
+                      <a:srgbClr val="EDEDED"/>
+                    </a:solidFill>
+                  </a:tcPr>
+                </a:tc>
+                <a:tc>
+                  <a:txBody>
+                    <a:bodyPr/>
+                    <a:lstStyle/>
+                    <a:p>
+                      <a:pPr algn="ctr"/>
+                      <a:r>
+                        <a:rPr lang="ru-RU" sz="1000" b="0" i="0" dirty="0">
+                          <a:solidFill>
+                            <a:schemeClr val="tx1"/>
+                          </a:solidFill>
+                          <a:latin typeface="Arial"/>
+                        </a:rPr>
+                        <a:t>-908</a:t>
+                      </a:r>
+                    </a:p>
+                  </a:txBody>
+                  <a:tcPr marL="36000" marR="36000" marT="18000" marB="18000" anchor="ctr">
+                    <a:lnL>
+                      <a:noFill/>
+                    </a:lnL>
+                    <a:lnR>
+                      <a:noFill/>
+                    </a:lnR>
+                    <a:lnT w="12700">
+                      <a:solidFill>
+                        <a:schemeClr val="bg1">
+                          <a:lumMod val="50000"/>
+                        </a:schemeClr>
+                      </a:solidFill>
+                      <a:prstDash val="solid"/>
+                    </a:lnT>
+                    <a:lnB w="12700">
+                      <a:solidFill>
+                        <a:schemeClr val="bg1">
+                          <a:lumMod val="50000"/>
+                        </a:schemeClr>
+                      </a:solidFill>
+                      <a:prstDash val="solid"/>
+                    </a:lnB>
+                    <a:solidFill>
+                      <a:srgbClr val="EDEDED"/>
+                    </a:solidFill>
+                  </a:tcPr>
+                </a:tc>
+                <a:tc>
+                  <a:txBody>
+                    <a:bodyPr/>
+                    <a:lstStyle/>
+                    <a:p>
+                      <a:pPr algn="ctr"/>
+                      <a:r>
+                        <a:rPr lang="ru-RU" sz="1000" b="0" i="0" dirty="0">
+                          <a:solidFill>
+                            <a:schemeClr val="tx1"/>
+                          </a:solidFill>
+                          <a:latin typeface="Arial"/>
+                        </a:rPr>
+                        <a:t>-920</a:t>
+                      </a:r>
+                    </a:p>
+                  </a:txBody>
+                  <a:tcPr marL="36000" marR="36000" marT="18000" marB="18000" anchor="ctr">
+                    <a:lnL>
+                      <a:noFill/>
+                    </a:lnL>
+                    <a:lnR>
+                      <a:noFill/>
+                    </a:lnR>
+                    <a:lnT w="12700">
+                      <a:solidFill>
+                        <a:schemeClr val="bg1">
+                          <a:lumMod val="50000"/>
+                        </a:schemeClr>
+                      </a:solidFill>
+                      <a:prstDash val="solid"/>
+                    </a:lnT>
+                    <a:lnB w="12700">
+                      <a:solidFill>
+                        <a:schemeClr val="bg1">
+                          <a:lumMod val="50000"/>
+                        </a:schemeClr>
+                      </a:solidFill>
+                      <a:prstDash val="solid"/>
+                    </a:lnB>
+                    <a:solidFill>
+                      <a:srgbClr val="EDEDED"/>
+                    </a:solidFill>
+                  </a:tcPr>
+                </a:tc>
+                <a:tc>
+                  <a:txBody>
+                    <a:bodyPr/>
+                    <a:lstStyle/>
+                    <a:p>
+                      <a:pPr algn="ctr"/>
+                      <a:r>
+                        <a:rPr lang="ru-RU" sz="1000" b="0" i="0" dirty="0">
+                          <a:solidFill>
+                            <a:schemeClr val="tx1"/>
+                          </a:solidFill>
+                          <a:latin typeface="Arial"/>
+                        </a:rPr>
+                        <a:t>-1 165</a:t>
+                      </a:r>
+                    </a:p>
+                  </a:txBody>
+                  <a:tcPr marL="36000" marR="36000" marT="18000" marB="18000" anchor="ctr">
+                    <a:lnL>
+                      <a:noFill/>
+                    </a:lnL>
+                    <a:lnR w="12700">
+                      <a:solidFill>
+                        <a:schemeClr val="bg1">
+                          <a:lumMod val="50000"/>
+                        </a:schemeClr>
+                      </a:solidFill>
+                      <a:prstDash val="solid"/>
+                    </a:lnR>
+                    <a:lnT w="12700">
+                      <a:solidFill>
+                        <a:schemeClr val="bg1">
+                          <a:lumMod val="50000"/>
+                        </a:schemeClr>
+                      </a:solidFill>
+                      <a:prstDash val="solid"/>
+                    </a:lnT>
+                    <a:lnB w="12700">
+                      <a:solidFill>
+                        <a:schemeClr val="bg1">
+                          <a:lumMod val="50000"/>
+                        </a:schemeClr>
+                      </a:solidFill>
+                      <a:prstDash val="solid"/>
+                    </a:lnB>
+                    <a:solidFill>
+                      <a:srgbClr val="EDEDED"/>
+                    </a:solidFill>
+                  </a:tcPr>
+                </a:tc>
+              </a:tr>
+              <a:tr h="315000">
+                <a:tc>
+                  <a:txBody>
+                    <a:bodyPr/>
+                    <a:lstStyle/>
+                    <a:p>
+                      <a:pPr algn="l"/>
+                      <a:r>
+                        <a:rPr lang="ru-RU" sz="1000" b="1" i="0" dirty="0">
+                          <a:solidFill>
+                            <a:schemeClr val="tx1"/>
+                          </a:solidFill>
+                          <a:latin typeface="Arial"/>
+                        </a:rPr>
+                        <a:t>EBITDA</a:t>
+                      </a:r>
+                    </a:p>
+                  </a:txBody>
+                  <a:tcPr marL="72000" marR="36000" marT="18000" marB="18000" anchor="ctr">
+                    <a:lnL w="12700">
+                      <a:solidFill>
+                        <a:schemeClr val="bg1">
+                          <a:lumMod val="50000"/>
+                        </a:schemeClr>
+                      </a:solidFill>
+                      <a:prstDash val="solid"/>
+                    </a:lnL>
+                    <a:lnR>
+                      <a:noFill/>
+                    </a:lnR>
+                    <a:lnT w="12700">
+                      <a:solidFill>
+                        <a:schemeClr val="bg1">
+                          <a:lumMod val="50000"/>
+                        </a:schemeClr>
+                      </a:solidFill>
+                      <a:prstDash val="solid"/>
+                    </a:lnT>
+                    <a:lnB w="12700">
+                      <a:solidFill>
+                        <a:schemeClr val="bg1">
+                          <a:lumMod val="50000"/>
+                        </a:schemeClr>
+                      </a:solidFill>
+                      <a:prstDash val="solid"/>
+                    </a:lnB>
+                    <a:solidFill>
+                      <a:srgbClr val="EDEDED"/>
+                    </a:solidFill>
+                  </a:tcPr>
+                </a:tc>
+                <a:tc>
+                  <a:txBody>
+                    <a:bodyPr/>
+                    <a:lstStyle/>
+                    <a:p>
+                      <a:pPr algn="ctr"/>
+                      <a:r>
+                        <a:rPr lang="ru-RU" sz="1000" b="1" i="0" dirty="0">
+                          <a:solidFill>
+                            <a:schemeClr val="tx1"/>
+                          </a:solidFill>
+                          <a:latin typeface="Arial"/>
+                        </a:rPr>
+                        <a:t>10 966</a:t>
+                      </a:r>
+                    </a:p>
+                  </a:txBody>
+                  <a:tcPr marL="36000" marR="36000" marT="18000" marB="18000" anchor="ctr">
+                    <a:lnL>
+                      <a:noFill/>
+                    </a:lnL>
+                    <a:lnR>
+                      <a:noFill/>
+                    </a:lnR>
+                    <a:lnT w="12700">
+                      <a:solidFill>
+                        <a:schemeClr val="bg1">
+                          <a:lumMod val="50000"/>
+                        </a:schemeClr>
+                      </a:solidFill>
+                      <a:prstDash val="solid"/>
+                    </a:lnT>
+                    <a:lnB w="12700">
+                      <a:solidFill>
+                        <a:schemeClr val="bg1">
+                          <a:lumMod val="50000"/>
+                        </a:schemeClr>
+                      </a:solidFill>
+                      <a:prstDash val="solid"/>
+                    </a:lnB>
+                    <a:solidFill>
+                      <a:srgbClr val="EDEDED"/>
+                    </a:solidFill>
+                  </a:tcPr>
+                </a:tc>
+                <a:tc>
+                  <a:txBody>
+                    <a:bodyPr/>
+                    <a:lstStyle/>
+                    <a:p>
+                      <a:pPr algn="ctr"/>
+                      <a:r>
+                        <a:rPr lang="ru-RU" sz="1000" b="0" i="0" dirty="0">
+                          <a:solidFill>
+                            <a:schemeClr val="tx1"/>
+                          </a:solidFill>
+                          <a:latin typeface="Arial"/>
+                        </a:rPr>
+                        <a:t>8 096</a:t>
+                      </a:r>
+                    </a:p>
+                  </a:txBody>
+                  <a:tcPr marL="36000" marR="36000" marT="18000" marB="18000" anchor="ctr">
+                    <a:lnL>
+                      <a:noFill/>
+                    </a:lnL>
+                    <a:lnR>
+                      <a:noFill/>
+                    </a:lnR>
+                    <a:lnT w="12700">
+                      <a:solidFill>
+                        <a:schemeClr val="bg1">
+                          <a:lumMod val="50000"/>
+                        </a:schemeClr>
+                      </a:solidFill>
+                      <a:prstDash val="solid"/>
+                    </a:lnT>
+                    <a:lnB w="12700">
+                      <a:solidFill>
+                        <a:schemeClr val="bg1">
+                          <a:lumMod val="50000"/>
+                        </a:schemeClr>
+                      </a:solidFill>
+                      <a:prstDash val="solid"/>
+                    </a:lnB>
+                    <a:solidFill>
+                      <a:srgbClr val="EDEDED"/>
+                    </a:solidFill>
+                  </a:tcPr>
+                </a:tc>
+                <a:tc>
+                  <a:txBody>
+                    <a:bodyPr/>
+                    <a:lstStyle/>
+                    <a:p>
+                      <a:pPr algn="ctr"/>
+                      <a:r>
+                        <a:rPr lang="ru-RU" sz="1000" b="0" i="0" dirty="0">
+                          <a:solidFill>
+                            <a:schemeClr val="tx1">
+                              <a:lumMod val="50000"/>
+                              <a:lumOff val="50000"/>
+                            </a:schemeClr>
+                          </a:solidFill>
+                          <a:latin typeface="Arial"/>
+                        </a:rPr>
+                        <a:t>+2 870</a:t>
+                      </a:r>
+                    </a:p>
+                  </a:txBody>
+                  <a:tcPr marL="36000" marR="36000" marT="18000" marB="18000" anchor="ctr">
+                    <a:lnL>
+                      <a:noFill/>
+                    </a:lnL>
+                    <a:lnR>
+                      <a:noFill/>
+                    </a:lnR>
+                    <a:lnT w="12700">
+                      <a:solidFill>
+                        <a:schemeClr val="bg1">
+                          <a:lumMod val="50000"/>
+                        </a:schemeClr>
+                      </a:solidFill>
+                      <a:prstDash val="solid"/>
+                    </a:lnT>
+                    <a:lnB w="12700">
+                      <a:solidFill>
+                        <a:schemeClr val="bg1">
+                          <a:lumMod val="50000"/>
+                        </a:schemeClr>
+                      </a:solidFill>
+                      <a:prstDash val="solid"/>
+                    </a:lnB>
+                    <a:solidFill>
+                      <a:srgbClr val="EDEDED"/>
+                    </a:solidFill>
+                  </a:tcPr>
+                </a:tc>
+                <a:tc>
+                  <a:txBody>
+                    <a:bodyPr/>
+                    <a:lstStyle/>
+                    <a:p>
+                      <a:pPr algn="ctr"/>
+                      <a:r>
+                        <a:rPr lang="ru-RU" sz="1000" b="0" i="0" dirty="0">
+                          <a:solidFill>
+                            <a:schemeClr val="tx1">
+                              <a:lumMod val="50000"/>
+                              <a:lumOff val="50000"/>
+                            </a:schemeClr>
+                          </a:solidFill>
+                          <a:latin typeface="Arial"/>
+                        </a:rPr>
+                        <a:t>+35,4%</a:t>
+                      </a:r>
+                    </a:p>
+                  </a:txBody>
+                  <a:tcPr marL="36000" marR="36000" marT="18000" marB="18000" anchor="ctr">
+                    <a:lnL>
+                      <a:noFill/>
+                    </a:lnL>
+                    <a:lnR>
+                      <a:noFill/>
+                    </a:lnR>
+                    <a:lnT w="12700">
+                      <a:solidFill>
+                        <a:schemeClr val="bg1">
+                          <a:lumMod val="50000"/>
+                        </a:schemeClr>
+                      </a:solidFill>
+                      <a:prstDash val="solid"/>
+                    </a:lnT>
+                    <a:lnB w="12700">
+                      <a:solidFill>
+                        <a:schemeClr val="bg1">
+                          <a:lumMod val="50000"/>
+                        </a:schemeClr>
+                      </a:solidFill>
+                      <a:prstDash val="solid"/>
+                    </a:lnB>
+                    <a:solidFill>
+                      <a:srgbClr val="C6EFCE"/>
+                    </a:solidFill>
+                  </a:tcPr>
+                </a:tc>
+                <a:tc>
+                  <a:txBody>
+                    <a:bodyPr/>
+                    <a:lstStyle/>
+                    <a:p>
+                      <a:pPr algn="ctr"/>
+                      <a:r>
+                        <a:rPr lang="ru-RU" sz="1000" b="0" i="0" dirty="0">
+                          <a:solidFill>
+                            <a:schemeClr val="tx1"/>
+                          </a:solidFill>
+                          <a:latin typeface="Arial"/>
+                        </a:rPr>
+                        <a:t>10 215</a:t>
+                      </a:r>
+                    </a:p>
+                  </a:txBody>
+                  <a:tcPr marL="36000" marR="36000" marT="18000" marB="18000" anchor="ctr">
+                    <a:lnL>
+                      <a:noFill/>
+                    </a:lnL>
+                    <a:lnR>
+                      <a:noFill/>
+                    </a:lnR>
+                    <a:lnT w="12700">
+                      <a:solidFill>
+                        <a:schemeClr val="bg1">
+                          <a:lumMod val="50000"/>
+                        </a:schemeClr>
+                      </a:solidFill>
+                      <a:prstDash val="solid"/>
+                    </a:lnT>
+                    <a:lnB w="12700">
+                      <a:solidFill>
+                        <a:schemeClr val="bg1">
+                          <a:lumMod val="50000"/>
+                        </a:schemeClr>
+                      </a:solidFill>
+                      <a:prstDash val="solid"/>
+                    </a:lnB>
+                    <a:solidFill>
+                      <a:srgbClr val="EDEDED"/>
+                    </a:solidFill>
+                  </a:tcPr>
+                </a:tc>
+                <a:tc>
+                  <a:txBody>
+                    <a:bodyPr/>
+                    <a:lstStyle/>
+                    <a:p>
+                      <a:pPr algn="ctr"/>
+                      <a:r>
+                        <a:rPr lang="ru-RU" sz="1000" b="0" i="0" dirty="0">
+                          <a:solidFill>
+                            <a:schemeClr val="tx1">
+                              <a:lumMod val="50000"/>
+                              <a:lumOff val="50000"/>
+                            </a:schemeClr>
+                          </a:solidFill>
+                          <a:latin typeface="Arial"/>
+                        </a:rPr>
+                        <a:t>+7,3%</a:t>
+                      </a:r>
+                    </a:p>
+                  </a:txBody>
+                  <a:tcPr marL="36000" marR="36000" marT="18000" marB="18000" anchor="ctr">
+                    <a:lnL>
+                      <a:noFill/>
+                    </a:lnL>
+                    <a:lnR>
+                      <a:noFill/>
+                    </a:lnR>
+                    <a:lnT w="12700">
+                      <a:solidFill>
+                        <a:schemeClr val="bg1">
+                          <a:lumMod val="50000"/>
+                        </a:schemeClr>
+                      </a:solidFill>
+                      <a:prstDash val="solid"/>
+                    </a:lnT>
+                    <a:lnB w="12700">
+                      <a:solidFill>
+                        <a:schemeClr val="bg1">
+                          <a:lumMod val="50000"/>
+                        </a:schemeClr>
+                      </a:solidFill>
+                      <a:prstDash val="solid"/>
+                    </a:lnB>
+                    <a:solidFill>
+                      <a:srgbClr val="C6EFCE"/>
+                    </a:solidFill>
+                  </a:tcPr>
+                </a:tc>
+                <a:tc>
+                  <a:txBody>
+                    <a:bodyPr/>
+                    <a:lstStyle/>
+                    <a:p>
+                      <a:pPr algn="l"/>
+                      <a:r>
+                        <a:rPr lang="ru-RU" sz="1000" b="1" i="0" dirty="0">
+                          <a:solidFill>
+                            <a:schemeClr val="tx1"/>
+                          </a:solidFill>
+                          <a:latin typeface="Arial"/>
+                        </a:rPr>
+                        <a:t>+2,9 млрд к 2026; выше стратегии на 750</a:t>
+                      </a:r>
+                    </a:p>
+                  </a:txBody>
+                  <a:tcPr marL="72000" marR="36000" marT="18000" marB="18000" anchor="ctr">
+                    <a:lnL>
+                      <a:noFill/>
+                    </a:lnL>
+                    <a:lnR w="12700">
+                      <a:solidFill>
+                        <a:schemeClr val="bg1">
+                          <a:lumMod val="50000"/>
+                        </a:schemeClr>
+                      </a:solidFill>
+                      <a:prstDash val="solid"/>
+                    </a:lnR>
+                    <a:lnT w="12700">
+                      <a:solidFill>
+                        <a:schemeClr val="bg1">
+                          <a:lumMod val="50000"/>
+                        </a:schemeClr>
+                      </a:solidFill>
+                      <a:prstDash val="solid"/>
+                    </a:lnT>
+                    <a:lnB w="12700">
+                      <a:solidFill>
+                        <a:schemeClr val="bg1">
+                          <a:lumMod val="50000"/>
+                        </a:schemeClr>
+                      </a:solidFill>
+                      <a:prstDash val="solid"/>
+                    </a:lnB>
+                    <a:solidFill>
+                      <a:srgbClr val="EDEDED"/>
+                    </a:solidFill>
+                  </a:tcPr>
+                </a:tc>
+                <a:tc>
+                  <a:txBody>
+                    <a:bodyPr/>
+                    <a:lstStyle/>
+                    <a:p>
+                      <a:endParaRPr lang="ru-RU" sz="1000" dirty="0"/>
+                    </a:p>
+                  </a:txBody>
+                  <a:tcPr>
+                    <a:lnL w="12700">
+                      <a:solidFill>
+                        <a:schemeClr val="bg1">
+                          <a:lumMod val="50000"/>
+                        </a:schemeClr>
+                      </a:solidFill>
+                      <a:prstDash val="solid"/>
+                    </a:lnL>
+                    <a:lnR>
+                      <a:noFill/>
+                    </a:lnR>
+                    <a:lnT>
+                      <a:noFill/>
+                    </a:lnT>
+                    <a:lnB>
+                      <a:noFill/>
+                    </a:lnB>
+                    <a:noFill/>
+                  </a:tcPr>
+                </a:tc>
+                <a:tc>
+                  <a:txBody>
+                    <a:bodyPr/>
+                    <a:lstStyle/>
+                    <a:p>
+                      <a:pPr algn="ctr"/>
+                      <a:r>
+                        <a:rPr lang="ru-RU" sz="1000" b="0" i="0" dirty="0">
+                          <a:solidFill>
+                            <a:schemeClr val="tx1"/>
+                          </a:solidFill>
+                          <a:latin typeface="Arial"/>
+                        </a:rPr>
+                        <a:t>1 276</a:t>
+                      </a:r>
+                    </a:p>
+                  </a:txBody>
+                  <a:tcPr marL="36000" marR="36000" marT="18000" marB="18000" anchor="ctr">
+                    <a:lnL w="12700">
+                      <a:solidFill>
+                        <a:schemeClr val="bg1">
+                          <a:lumMod val="50000"/>
+                        </a:schemeClr>
+                      </a:solidFill>
+                      <a:prstDash val="solid"/>
+                    </a:lnL>
+                    <a:lnR>
+                      <a:noFill/>
+                    </a:lnR>
+                    <a:lnT w="12700">
+                      <a:solidFill>
+                        <a:schemeClr val="bg1">
+                          <a:lumMod val="50000"/>
+                        </a:schemeClr>
+                      </a:solidFill>
+                      <a:prstDash val="solid"/>
+                    </a:lnT>
+                    <a:lnB w="12700">
+                      <a:solidFill>
+                        <a:schemeClr val="bg1">
+                          <a:lumMod val="50000"/>
+                        </a:schemeClr>
+                      </a:solidFill>
+                      <a:prstDash val="solid"/>
+                    </a:lnB>
+                    <a:solidFill>
+                      <a:srgbClr val="EDEDED"/>
+                    </a:solidFill>
+                  </a:tcPr>
+                </a:tc>
+                <a:tc>
+                  <a:txBody>
+                    <a:bodyPr/>
+                    <a:lstStyle/>
+                    <a:p>
+                      <a:pPr algn="ctr"/>
+                      <a:r>
+                        <a:rPr lang="ru-RU" sz="1000" b="0" i="0" dirty="0">
+                          <a:solidFill>
+                            <a:schemeClr val="tx1"/>
+                          </a:solidFill>
+                          <a:latin typeface="Arial"/>
+                        </a:rPr>
+                        <a:t>2 189</a:t>
+                      </a:r>
+                    </a:p>
+                  </a:txBody>
+                  <a:tcPr marL="36000" marR="36000" marT="18000" marB="18000" anchor="ctr">
+                    <a:lnL>
+                      <a:noFill/>
+                    </a:lnL>
+                    <a:lnR>
+                      <a:noFill/>
+                    </a:lnR>
+                    <a:lnT w="12700">
+                      <a:solidFill>
+                        <a:schemeClr val="bg1">
+                          <a:lumMod val="50000"/>
+                        </a:schemeClr>
+                      </a:solidFill>
+                      <a:prstDash val="solid"/>
+                    </a:lnT>
+                    <a:lnB w="12700">
+                      <a:solidFill>
+                        <a:schemeClr val="bg1">
+                          <a:lumMod val="50000"/>
+                        </a:schemeClr>
+                      </a:solidFill>
+                      <a:prstDash val="solid"/>
+                    </a:lnB>
+                    <a:solidFill>
+                      <a:srgbClr val="EDEDED"/>
+                    </a:solidFill>
+                  </a:tcPr>
+                </a:tc>
+                <a:tc>
+                  <a:txBody>
+                    <a:bodyPr/>
+                    <a:lstStyle/>
+                    <a:p>
+                      <a:pPr algn="ctr"/>
+                      <a:r>
+                        <a:rPr lang="ru-RU" sz="1000" b="0" i="0" dirty="0">
+                          <a:solidFill>
+                            <a:schemeClr val="tx1"/>
+                          </a:solidFill>
+                          <a:latin typeface="Arial"/>
+                        </a:rPr>
+                        <a:t>2 472</a:t>
+                      </a:r>
+                    </a:p>
+                  </a:txBody>
+                  <a:tcPr marL="36000" marR="36000" marT="18000" marB="18000" anchor="ctr">
+                    <a:lnL>
+                      <a:noFill/>
+                    </a:lnL>
+                    <a:lnR>
+                      <a:noFill/>
+                    </a:lnR>
+                    <a:lnT w="12700">
+                      <a:solidFill>
+                        <a:schemeClr val="bg1">
+                          <a:lumMod val="50000"/>
+                        </a:schemeClr>
+                      </a:solidFill>
+                      <a:prstDash val="solid"/>
+                    </a:lnT>
+                    <a:lnB w="12700">
+                      <a:solidFill>
+                        <a:schemeClr val="bg1">
+                          <a:lumMod val="50000"/>
+                        </a:schemeClr>
+                      </a:solidFill>
+                      <a:prstDash val="solid"/>
+                    </a:lnB>
+                    <a:solidFill>
+                      <a:srgbClr val="EDEDED"/>
+                    </a:solidFill>
+                  </a:tcPr>
+                </a:tc>
+                <a:tc>
+                  <a:txBody>
+                    <a:bodyPr/>
+                    <a:lstStyle/>
+                    <a:p>
+                      <a:pPr algn="ctr"/>
+                      <a:r>
+                        <a:rPr lang="ru-RU" sz="1000" b="0" i="0" dirty="0">
+                          <a:solidFill>
+                            <a:schemeClr val="tx1"/>
+                          </a:solidFill>
+                          <a:latin typeface="Arial"/>
+                        </a:rPr>
+                        <a:t>5 029</a:t>
+                      </a:r>
+                    </a:p>
+                  </a:txBody>
+                  <a:tcPr marL="36000" marR="36000" marT="18000" marB="18000" anchor="ctr">
+                    <a:lnL>
+                      <a:noFill/>
+                    </a:lnL>
+                    <a:lnR w="12700">
+                      <a:solidFill>
+                        <a:schemeClr val="bg1">
+                          <a:lumMod val="50000"/>
+                        </a:schemeClr>
+                      </a:solidFill>
+                      <a:prstDash val="solid"/>
+                    </a:lnR>
+                    <a:lnT w="12700">
+                      <a:solidFill>
+                        <a:schemeClr val="bg1">
+                          <a:lumMod val="50000"/>
+                        </a:schemeClr>
+                      </a:solidFill>
+                      <a:prstDash val="solid"/>
+                    </a:lnT>
+                    <a:lnB w="12700">
+                      <a:solidFill>
+                        <a:schemeClr val="bg1">
+                          <a:lumMod val="50000"/>
+                        </a:schemeClr>
+                      </a:solidFill>
+                      <a:prstDash val="solid"/>
+                    </a:lnB>
+                    <a:solidFill>
+                      <a:srgbClr val="EDEDED"/>
+                    </a:solidFill>
+                  </a:tcPr>
+                </a:tc>
+              </a:tr>
+              <a:tr h="315000">
+                <a:tc>
+                  <a:txBody>
+                    <a:bodyPr/>
+                    <a:lstStyle/>
+                    <a:p>
+                      <a:pPr algn="l"/>
+                      <a:r>
+                        <a:rPr lang="ru-RU" sz="1000" b="1" i="0" dirty="0">
+                          <a:solidFill>
+                            <a:schemeClr val="tx1"/>
+                          </a:solidFill>
+                          <a:latin typeface="Arial"/>
+                        </a:rPr>
+                        <a:t>CAPEX</a:t>
+                      </a:r>
+                    </a:p>
+                  </a:txBody>
+                  <a:tcPr marL="72000" marR="36000" marT="18000" marB="18000" anchor="ctr">
+                    <a:lnL w="12700">
+                      <a:solidFill>
+                        <a:schemeClr val="bg1">
+                          <a:lumMod val="50000"/>
+                        </a:schemeClr>
+                      </a:solidFill>
+                      <a:prstDash val="solid"/>
+                    </a:lnL>
+                    <a:lnR>
+                      <a:noFill/>
+                    </a:lnR>
+                    <a:lnT w="12700">
+                      <a:solidFill>
+                        <a:schemeClr val="bg1">
+                          <a:lumMod val="50000"/>
+                        </a:schemeClr>
+                      </a:solidFill>
+                      <a:prstDash val="solid"/>
+                    </a:lnT>
+                    <a:lnB w="12700">
+                      <a:solidFill>
+                        <a:schemeClr val="bg1">
+                          <a:lumMod val="50000"/>
+                        </a:schemeClr>
+                      </a:solidFill>
+                      <a:prstDash val="solid"/>
+                    </a:lnB>
+                    <a:noFill/>
+                  </a:tcPr>
+                </a:tc>
+                <a:tc>
+                  <a:txBody>
+                    <a:bodyPr/>
+                    <a:lstStyle/>
+                    <a:p>
+                      <a:pPr algn="ctr"/>
+                      <a:r>
+                        <a:rPr lang="ru-RU" sz="1000" b="1" i="0" dirty="0">
+                          <a:solidFill>
+                            <a:schemeClr val="tx1"/>
+                          </a:solidFill>
+                          <a:latin typeface="Arial"/>
+                        </a:rPr>
+                        <a:t>-1 151</a:t>
+                      </a:r>
+                    </a:p>
+                  </a:txBody>
+                  <a:tcPr marL="36000" marR="36000" marT="18000" marB="18000" anchor="ctr">
+                    <a:lnL>
+                      <a:noFill/>
+                    </a:lnL>
+                    <a:lnR>
+                      <a:noFill/>
+                    </a:lnR>
+                    <a:lnT w="12700">
+                      <a:solidFill>
+                        <a:schemeClr val="bg1">
+                          <a:lumMod val="50000"/>
+                        </a:schemeClr>
+                      </a:solidFill>
+                      <a:prstDash val="solid"/>
+                    </a:lnT>
+                    <a:lnB w="12700">
+                      <a:solidFill>
+                        <a:schemeClr val="bg1">
+                          <a:lumMod val="50000"/>
+                        </a:schemeClr>
+                      </a:solidFill>
+                      <a:prstDash val="solid"/>
+                    </a:lnB>
+                    <a:noFill/>
+                  </a:tcPr>
+                </a:tc>
+                <a:tc>
+                  <a:txBody>
+                    <a:bodyPr/>
+                    <a:lstStyle/>
+                    <a:p>
+                      <a:pPr algn="ctr"/>
+                      <a:r>
+                        <a:rPr lang="ru-RU" sz="1000" b="0" i="0" dirty="0">
+                          <a:solidFill>
+                            <a:schemeClr val="tx1"/>
+                          </a:solidFill>
+                          <a:latin typeface="Arial"/>
+                        </a:rPr>
+                        <a:t>-1 180</a:t>
+                      </a:r>
+                    </a:p>
+                  </a:txBody>
+                  <a:tcPr marL="36000" marR="36000" marT="18000" marB="18000" anchor="ctr">
+                    <a:lnL>
+                      <a:noFill/>
+                    </a:lnL>
+                    <a:lnR>
+                      <a:noFill/>
+                    </a:lnR>
+                    <a:lnT w="12700">
+                      <a:solidFill>
+                        <a:schemeClr val="bg1">
+                          <a:lumMod val="50000"/>
+                        </a:schemeClr>
+                      </a:solidFill>
+                      <a:prstDash val="solid"/>
+                    </a:lnT>
+                    <a:lnB w="12700">
+                      <a:solidFill>
+                        <a:schemeClr val="bg1">
+                          <a:lumMod val="50000"/>
+                        </a:schemeClr>
+                      </a:solidFill>
+                      <a:prstDash val="solid"/>
+                    </a:lnB>
+                    <a:noFill/>
+                  </a:tcPr>
+                </a:tc>
+                <a:tc>
+                  <a:txBody>
+                    <a:bodyPr/>
+                    <a:lstStyle/>
+                    <a:p>
+                      <a:pPr algn="ctr"/>
+                      <a:r>
+                        <a:rPr lang="ru-RU" sz="1000" b="0" i="0" dirty="0">
+                          <a:solidFill>
+                            <a:schemeClr val="tx1">
+                              <a:lumMod val="50000"/>
+                              <a:lumOff val="50000"/>
+                            </a:schemeClr>
+                          </a:solidFill>
+                          <a:latin typeface="Arial"/>
+                        </a:rPr>
+                        <a:t>+29</a:t>
+                      </a:r>
+                    </a:p>
+                  </a:txBody>
+                  <a:tcPr marL="36000" marR="36000" marT="18000" marB="18000" anchor="ctr">
+                    <a:lnL>
+                      <a:noFill/>
+                    </a:lnL>
+                    <a:lnR>
+                      <a:noFill/>
+                    </a:lnR>
+                    <a:lnT w="12700">
+                      <a:solidFill>
+                        <a:schemeClr val="bg1">
+                          <a:lumMod val="50000"/>
+                        </a:schemeClr>
+                      </a:solidFill>
+                      <a:prstDash val="solid"/>
+                    </a:lnT>
+                    <a:lnB w="12700">
+                      <a:solidFill>
+                        <a:schemeClr val="bg1">
+                          <a:lumMod val="50000"/>
+                        </a:schemeClr>
+                      </a:solidFill>
+                      <a:prstDash val="solid"/>
+                    </a:lnB>
+                    <a:noFill/>
+                  </a:tcPr>
+                </a:tc>
+                <a:tc>
+                  <a:txBody>
+                    <a:bodyPr/>
+                    <a:lstStyle/>
+                    <a:p>
+                      <a:pPr algn="ctr"/>
+                      <a:r>
+                        <a:rPr lang="ru-RU" sz="1000" b="0" i="0" dirty="0">
+                          <a:solidFill>
+                            <a:schemeClr val="tx1">
+                              <a:lumMod val="50000"/>
+                              <a:lumOff val="50000"/>
+                            </a:schemeClr>
+                          </a:solidFill>
+                          <a:latin typeface="Arial"/>
+                        </a:rPr>
+                        <a:t>+2,5%</a:t>
+                      </a:r>
+                    </a:p>
+                  </a:txBody>
+                  <a:tcPr marL="36000" marR="36000" marT="18000" marB="18000" anchor="ctr">
+                    <a:lnL>
+                      <a:noFill/>
+                    </a:lnL>
+                    <a:lnR>
+                      <a:noFill/>
+                    </a:lnR>
+                    <a:lnT w="12700">
+                      <a:solidFill>
+                        <a:schemeClr val="bg1">
+                          <a:lumMod val="50000"/>
+                        </a:schemeClr>
+                      </a:solidFill>
+                      <a:prstDash val="solid"/>
+                    </a:lnT>
+                    <a:lnB w="12700">
+                      <a:solidFill>
+                        <a:schemeClr val="bg1">
+                          <a:lumMod val="50000"/>
+                        </a:schemeClr>
+                      </a:solidFill>
+                      <a:prstDash val="solid"/>
+                    </a:lnB>
+                    <a:solidFill>
+                      <a:srgbClr val="C6EFCE"/>
+                    </a:solidFill>
+                  </a:tcPr>
+                </a:tc>
+                <a:tc>
+                  <a:txBody>
+                    <a:bodyPr/>
+                    <a:lstStyle/>
+                    <a:p>
+                      <a:pPr algn="ctr"/>
+                      <a:r>
+                        <a:rPr lang="ru-RU" sz="1000" b="0" i="0" dirty="0">
+                          <a:solidFill>
+                            <a:schemeClr val="tx1"/>
+                          </a:solidFill>
+                          <a:latin typeface="Arial"/>
+                        </a:rPr>
+                        <a:t>-1 242</a:t>
+                      </a:r>
+                    </a:p>
+                  </a:txBody>
+                  <a:tcPr marL="36000" marR="36000" marT="18000" marB="18000" anchor="ctr">
+                    <a:lnL>
+                      <a:noFill/>
+                    </a:lnL>
+                    <a:lnR>
+                      <a:noFill/>
+                    </a:lnR>
+                    <a:lnT w="12700">
+                      <a:solidFill>
+                        <a:schemeClr val="bg1">
+                          <a:lumMod val="50000"/>
+                        </a:schemeClr>
+                      </a:solidFill>
+                      <a:prstDash val="solid"/>
+                    </a:lnT>
+                    <a:lnB w="12700">
+                      <a:solidFill>
+                        <a:schemeClr val="bg1">
+                          <a:lumMod val="50000"/>
+                        </a:schemeClr>
+                      </a:solidFill>
+                      <a:prstDash val="solid"/>
+                    </a:lnB>
+                    <a:noFill/>
+                  </a:tcPr>
+                </a:tc>
+                <a:tc>
+                  <a:txBody>
+                    <a:bodyPr/>
+                    <a:lstStyle/>
+                    <a:p>
+                      <a:pPr algn="ctr"/>
+                      <a:r>
+                        <a:rPr lang="ru-RU" sz="1000" b="0" i="0" dirty="0">
+                          <a:solidFill>
+                            <a:schemeClr val="tx1">
+                              <a:lumMod val="50000"/>
+                              <a:lumOff val="50000"/>
+                            </a:schemeClr>
+                          </a:solidFill>
+                          <a:latin typeface="Arial"/>
+                        </a:rPr>
+                        <a:t>+7,4%</a:t>
+                      </a:r>
+                    </a:p>
+                  </a:txBody>
+                  <a:tcPr marL="36000" marR="36000" marT="18000" marB="18000" anchor="ctr">
+                    <a:lnL>
+                      <a:noFill/>
+                    </a:lnL>
+                    <a:lnR>
+                      <a:noFill/>
+                    </a:lnR>
+                    <a:lnT w="12700">
+                      <a:solidFill>
+                        <a:schemeClr val="bg1">
+                          <a:lumMod val="50000"/>
+                        </a:schemeClr>
+                      </a:solidFill>
+                      <a:prstDash val="solid"/>
+                    </a:lnT>
+                    <a:lnB w="12700">
+                      <a:solidFill>
+                        <a:schemeClr val="bg1">
+                          <a:lumMod val="50000"/>
+                        </a:schemeClr>
+                      </a:solidFill>
+                      <a:prstDash val="solid"/>
+                    </a:lnB>
+                    <a:solidFill>
+                      <a:srgbClr val="C6EFCE"/>
+                    </a:solidFill>
+                  </a:tcPr>
+                </a:tc>
+                <a:tc>
+                  <a:txBody>
+                    <a:bodyPr/>
+                    <a:lstStyle/>
+                    <a:p>
+                      <a:pPr algn="l"/>
+                      <a:r>
+                        <a:rPr lang="ru-RU" sz="1000" b="1" i="0" dirty="0">
+                          <a:solidFill>
+                            <a:schemeClr val="tx1"/>
+                          </a:solidFill>
+                          <a:latin typeface="Arial"/>
+                        </a:rPr>
+                        <a:t>Платформа −541, оснащение ТТ −610</a:t>
+                      </a:r>
+                    </a:p>
+                  </a:txBody>
+                  <a:tcPr marL="72000" marR="36000" marT="18000" marB="18000" anchor="ctr">
+                    <a:lnL>
+                      <a:noFill/>
+                    </a:lnL>
+                    <a:lnR w="12700">
+                      <a:solidFill>
+                        <a:schemeClr val="bg1">
+                          <a:lumMod val="50000"/>
+                        </a:schemeClr>
+                      </a:solidFill>
+                      <a:prstDash val="solid"/>
+                    </a:lnR>
+                    <a:lnT w="12700">
+                      <a:solidFill>
+                        <a:schemeClr val="bg1">
+                          <a:lumMod val="50000"/>
+                        </a:schemeClr>
+                      </a:solidFill>
+                      <a:prstDash val="solid"/>
+                    </a:lnT>
+                    <a:lnB w="12700">
+                      <a:solidFill>
+                        <a:schemeClr val="bg1">
+                          <a:lumMod val="50000"/>
+                        </a:schemeClr>
+                      </a:solidFill>
+                      <a:prstDash val="solid"/>
+                    </a:lnB>
+                    <a:noFill/>
+                  </a:tcPr>
+                </a:tc>
+                <a:tc>
+                  <a:txBody>
+                    <a:bodyPr/>
+                    <a:lstStyle/>
+                    <a:p>
+                      <a:endParaRPr lang="ru-RU" sz="1000" dirty="0"/>
+                    </a:p>
+                  </a:txBody>
+                  <a:tcPr>
+                    <a:lnL w="12700">
+                      <a:solidFill>
+                        <a:schemeClr val="bg1">
+                          <a:lumMod val="50000"/>
+                        </a:schemeClr>
+                      </a:solidFill>
+                      <a:prstDash val="solid"/>
+                    </a:lnL>
+                    <a:lnR>
+                      <a:noFill/>
+                    </a:lnR>
+                    <a:lnT>
+                      <a:noFill/>
+                    </a:lnT>
+                    <a:lnB>
+                      <a:noFill/>
+                    </a:lnB>
+                    <a:noFill/>
+                  </a:tcPr>
+                </a:tc>
+                <a:tc>
+                  <a:txBody>
+                    <a:bodyPr/>
+                    <a:lstStyle/>
+                    <a:p>
+                      <a:pPr algn="ctr"/>
+                      <a:r>
+                        <a:rPr lang="ru-RU" sz="1000" b="0" i="0" dirty="0">
+                          <a:solidFill>
+                            <a:schemeClr val="tx1"/>
+                          </a:solidFill>
+                          <a:latin typeface="Arial"/>
+                        </a:rPr>
+                        <a:t>-130</a:t>
+                      </a:r>
+                    </a:p>
+                  </a:txBody>
+                  <a:tcPr marL="36000" marR="36000" marT="18000" marB="18000" anchor="ctr">
+                    <a:lnL w="12700">
+                      <a:solidFill>
+                        <a:schemeClr val="bg1">
+                          <a:lumMod val="50000"/>
+                        </a:schemeClr>
+                      </a:solidFill>
+                      <a:prstDash val="solid"/>
+                    </a:lnL>
+                    <a:lnR>
+                      <a:noFill/>
+                    </a:lnR>
+                    <a:lnT w="12700">
+                      <a:solidFill>
+                        <a:schemeClr val="bg1">
+                          <a:lumMod val="50000"/>
+                        </a:schemeClr>
+                      </a:solidFill>
+                      <a:prstDash val="solid"/>
+                    </a:lnT>
+                    <a:lnB w="12700">
+                      <a:solidFill>
+                        <a:schemeClr val="bg1">
+                          <a:lumMod val="50000"/>
+                        </a:schemeClr>
+                      </a:solidFill>
+                      <a:prstDash val="solid"/>
+                    </a:lnB>
+                    <a:noFill/>
+                  </a:tcPr>
+                </a:tc>
+                <a:tc>
+                  <a:txBody>
+                    <a:bodyPr/>
+                    <a:lstStyle/>
+                    <a:p>
+                      <a:pPr algn="ctr"/>
+                      <a:r>
+                        <a:rPr lang="ru-RU" sz="1000" b="0" i="0" dirty="0">
+                          <a:solidFill>
+                            <a:schemeClr val="tx1"/>
+                          </a:solidFill>
+                          <a:latin typeface="Arial"/>
+                        </a:rPr>
+                        <a:t>-214</a:t>
+                      </a:r>
+                    </a:p>
+                  </a:txBody>
+                  <a:tcPr marL="36000" marR="36000" marT="18000" marB="18000" anchor="ctr">
+                    <a:lnL>
+                      <a:noFill/>
+                    </a:lnL>
+                    <a:lnR>
+                      <a:noFill/>
+                    </a:lnR>
+                    <a:lnT w="12700">
+                      <a:solidFill>
+                        <a:schemeClr val="bg1">
+                          <a:lumMod val="50000"/>
+                        </a:schemeClr>
+                      </a:solidFill>
+                      <a:prstDash val="solid"/>
+                    </a:lnT>
+                    <a:lnB w="12700">
+                      <a:solidFill>
+                        <a:schemeClr val="bg1">
+                          <a:lumMod val="50000"/>
+                        </a:schemeClr>
+                      </a:solidFill>
+                      <a:prstDash val="solid"/>
+                    </a:lnB>
+                    <a:noFill/>
+                  </a:tcPr>
+                </a:tc>
+                <a:tc>
+                  <a:txBody>
+                    <a:bodyPr/>
+                    <a:lstStyle/>
+                    <a:p>
+                      <a:pPr algn="ctr"/>
+                      <a:r>
+                        <a:rPr lang="ru-RU" sz="1000" b="0" i="0" dirty="0">
+                          <a:solidFill>
+                            <a:schemeClr val="tx1"/>
+                          </a:solidFill>
+                          <a:latin typeface="Arial"/>
+                        </a:rPr>
+                        <a:t>-398</a:t>
+                      </a:r>
+                    </a:p>
+                  </a:txBody>
+                  <a:tcPr marL="36000" marR="36000" marT="18000" marB="18000" anchor="ctr">
+                    <a:lnL>
+                      <a:noFill/>
+                    </a:lnL>
+                    <a:lnR>
+                      <a:noFill/>
+                    </a:lnR>
+                    <a:lnT w="12700">
+                      <a:solidFill>
+                        <a:schemeClr val="bg1">
+                          <a:lumMod val="50000"/>
+                        </a:schemeClr>
+                      </a:solidFill>
+                      <a:prstDash val="solid"/>
+                    </a:lnT>
+                    <a:lnB w="12700">
+                      <a:solidFill>
+                        <a:schemeClr val="bg1">
+                          <a:lumMod val="50000"/>
+                        </a:schemeClr>
+                      </a:solidFill>
+                      <a:prstDash val="solid"/>
+                    </a:lnB>
+                    <a:noFill/>
+                  </a:tcPr>
+                </a:tc>
+                <a:tc>
+                  <a:txBody>
+                    <a:bodyPr/>
+                    <a:lstStyle/>
+                    <a:p>
+                      <a:pPr algn="ctr"/>
+                      <a:r>
+                        <a:rPr lang="ru-RU" sz="1000" b="0" i="0" dirty="0">
+                          <a:solidFill>
+                            <a:schemeClr val="tx1"/>
+                          </a:solidFill>
+                          <a:latin typeface="Arial"/>
+                        </a:rPr>
+                        <a:t>-409</a:t>
+                      </a:r>
+                    </a:p>
+                  </a:txBody>
+                  <a:tcPr marL="36000" marR="36000" marT="18000" marB="18000" anchor="ctr">
+                    <a:lnL>
+                      <a:noFill/>
+                    </a:lnL>
+                    <a:lnR w="12700">
+                      <a:solidFill>
+                        <a:schemeClr val="bg1">
+                          <a:lumMod val="50000"/>
+                        </a:schemeClr>
+                      </a:solidFill>
+                      <a:prstDash val="solid"/>
+                    </a:lnR>
+                    <a:lnT w="12700">
+                      <a:solidFill>
+                        <a:schemeClr val="bg1">
+                          <a:lumMod val="50000"/>
+                        </a:schemeClr>
+                      </a:solidFill>
+                      <a:prstDash val="solid"/>
+                    </a:lnT>
+                    <a:lnB w="12700">
+                      <a:solidFill>
+                        <a:schemeClr val="bg1">
+                          <a:lumMod val="50000"/>
+                        </a:schemeClr>
+                      </a:solidFill>
+                      <a:prstDash val="solid"/>
+                    </a:lnB>
+                    <a:noFill/>
+                  </a:tcPr>
+                </a:tc>
+              </a:tr>
+              <a:tr h="315000">
+                <a:tc>
+                  <a:txBody>
+                    <a:bodyPr/>
+                    <a:lstStyle/>
+                    <a:p>
+                      <a:pPr algn="l"/>
+                      <a:r>
+                        <a:rPr lang="ru-RU" sz="1000" b="1" i="0" dirty="0">
+                          <a:solidFill>
+                            <a:schemeClr val="tx1"/>
+                          </a:solidFill>
+                          <a:latin typeface="Arial"/>
+                        </a:rPr>
+                        <a:t>FCF</a:t>
+                      </a:r>
+                    </a:p>
+                  </a:txBody>
+                  <a:tcPr marL="72000" marR="36000" marT="18000" marB="18000" anchor="ctr">
+                    <a:lnL w="12700">
+                      <a:solidFill>
+                        <a:schemeClr val="bg1">
+                          <a:lumMod val="50000"/>
+                        </a:schemeClr>
+                      </a:solidFill>
+                      <a:prstDash val="solid"/>
+                    </a:lnL>
+                    <a:lnR>
+                      <a:noFill/>
+                    </a:lnR>
+                    <a:lnT w="12700">
+                      <a:solidFill>
+                        <a:schemeClr val="bg1">
+                          <a:lumMod val="50000"/>
+                        </a:schemeClr>
+                      </a:solidFill>
+                      <a:prstDash val="solid"/>
+                    </a:lnT>
+                    <a:lnB w="12700">
+                      <a:solidFill>
+                        <a:schemeClr val="bg1">
+                          <a:lumMod val="50000"/>
+                        </a:schemeClr>
+                      </a:solidFill>
+                      <a:prstDash val="solid"/>
+                    </a:lnB>
+                    <a:noFill/>
+                  </a:tcPr>
+                </a:tc>
+                <a:tc>
+                  <a:txBody>
+                    <a:bodyPr/>
+                    <a:lstStyle/>
+                    <a:p>
+                      <a:pPr algn="ctr"/>
+                      <a:r>
+                        <a:rPr lang="ru-RU" sz="1000" b="1" i="0" dirty="0">
+                          <a:solidFill>
+                            <a:schemeClr val="tx1"/>
+                          </a:solidFill>
+                          <a:latin typeface="Arial"/>
+                        </a:rPr>
+                        <a:t>9 815</a:t>
+                      </a:r>
+                    </a:p>
+                  </a:txBody>
+                  <a:tcPr marL="36000" marR="36000" marT="18000" marB="18000" anchor="ctr">
+                    <a:lnL>
+                      <a:noFill/>
+                    </a:lnL>
+                    <a:lnR>
+                      <a:noFill/>
+                    </a:lnR>
+                    <a:lnT w="12700">
+                      <a:solidFill>
+                        <a:schemeClr val="bg1">
+                          <a:lumMod val="50000"/>
+                        </a:schemeClr>
+                      </a:solidFill>
+                      <a:prstDash val="solid"/>
+                    </a:lnT>
+                    <a:lnB w="12700">
+                      <a:solidFill>
+                        <a:schemeClr val="bg1">
+                          <a:lumMod val="50000"/>
+                        </a:schemeClr>
+                      </a:solidFill>
+                      <a:prstDash val="solid"/>
+                    </a:lnB>
+                    <a:noFill/>
+                  </a:tcPr>
+                </a:tc>
+                <a:tc>
+                  <a:txBody>
+                    <a:bodyPr/>
+                    <a:lstStyle/>
+                    <a:p>
+                      <a:pPr algn="ctr"/>
+                      <a:r>
+                        <a:rPr lang="ru-RU" sz="1000" b="0" i="0" dirty="0">
+                          <a:solidFill>
+                            <a:schemeClr val="tx1"/>
+                          </a:solidFill>
+                          <a:latin typeface="Arial"/>
+                        </a:rPr>
+                        <a:t>6 917</a:t>
+                      </a:r>
+                    </a:p>
+                  </a:txBody>
+                  <a:tcPr marL="36000" marR="36000" marT="18000" marB="18000" anchor="ctr">
+                    <a:lnL>
+                      <a:noFill/>
+                    </a:lnL>
+                    <a:lnR>
+                      <a:noFill/>
+                    </a:lnR>
+                    <a:lnT w="12700">
+                      <a:solidFill>
+                        <a:schemeClr val="bg1">
+                          <a:lumMod val="50000"/>
+                        </a:schemeClr>
+                      </a:solidFill>
+                      <a:prstDash val="solid"/>
+                    </a:lnT>
+                    <a:lnB w="12700">
+                      <a:solidFill>
+                        <a:schemeClr val="bg1">
+                          <a:lumMod val="50000"/>
+                        </a:schemeClr>
+                      </a:solidFill>
+                      <a:prstDash val="solid"/>
+                    </a:lnB>
+                    <a:noFill/>
+                  </a:tcPr>
+                </a:tc>
+                <a:tc>
+                  <a:txBody>
+                    <a:bodyPr/>
+                    <a:lstStyle/>
+                    <a:p>
+                      <a:pPr algn="ctr"/>
+                      <a:r>
+                        <a:rPr lang="ru-RU" sz="1000" b="0" i="0" dirty="0">
+                          <a:solidFill>
+                            <a:schemeClr val="tx1">
+                              <a:lumMod val="50000"/>
+                              <a:lumOff val="50000"/>
+                            </a:schemeClr>
+                          </a:solidFill>
+                          <a:latin typeface="Arial"/>
+                        </a:rPr>
+                        <a:t>+2 898</a:t>
+                      </a:r>
+                    </a:p>
+                  </a:txBody>
+                  <a:tcPr marL="36000" marR="36000" marT="18000" marB="18000" anchor="ctr">
+                    <a:lnL>
+                      <a:noFill/>
+                    </a:lnL>
+                    <a:lnR>
+                      <a:noFill/>
+                    </a:lnR>
+                    <a:lnT w="12700">
+                      <a:solidFill>
+                        <a:schemeClr val="bg1">
+                          <a:lumMod val="50000"/>
+                        </a:schemeClr>
+                      </a:solidFill>
+                      <a:prstDash val="solid"/>
+                    </a:lnT>
+                    <a:lnB w="12700">
+                      <a:solidFill>
+                        <a:schemeClr val="bg1">
+                          <a:lumMod val="50000"/>
+                        </a:schemeClr>
+                      </a:solidFill>
+                      <a:prstDash val="solid"/>
+                    </a:lnB>
+                    <a:noFill/>
+                  </a:tcPr>
+                </a:tc>
+                <a:tc>
+                  <a:txBody>
+                    <a:bodyPr/>
+                    <a:lstStyle/>
+                    <a:p>
+                      <a:pPr algn="ctr"/>
+                      <a:r>
+                        <a:rPr lang="ru-RU" sz="1000" b="0" i="0" dirty="0">
+                          <a:solidFill>
+                            <a:schemeClr val="tx1">
+                              <a:lumMod val="50000"/>
+                              <a:lumOff val="50000"/>
+                            </a:schemeClr>
+                          </a:solidFill>
+                          <a:latin typeface="Arial"/>
+                        </a:rPr>
+                        <a:t>+41,9%</a:t>
+                      </a:r>
+                    </a:p>
+                  </a:txBody>
+                  <a:tcPr marL="36000" marR="36000" marT="18000" marB="18000" anchor="ctr">
+                    <a:lnL>
+                      <a:noFill/>
+                    </a:lnL>
+                    <a:lnR>
+                      <a:noFill/>
+                    </a:lnR>
+                    <a:lnT w="12700">
+                      <a:solidFill>
+                        <a:schemeClr val="bg1">
+                          <a:lumMod val="50000"/>
+                        </a:schemeClr>
+                      </a:solidFill>
+                      <a:prstDash val="solid"/>
+                    </a:lnT>
+                    <a:lnB w="12700">
+                      <a:solidFill>
+                        <a:schemeClr val="bg1">
+                          <a:lumMod val="50000"/>
+                        </a:schemeClr>
+                      </a:solidFill>
+                      <a:prstDash val="solid"/>
+                    </a:lnB>
+                    <a:solidFill>
+                      <a:srgbClr val="C6EFCE"/>
+                    </a:solidFill>
+                  </a:tcPr>
+                </a:tc>
+                <a:tc>
+                  <a:txBody>
+                    <a:bodyPr/>
+                    <a:lstStyle/>
+                    <a:p>
+                      <a:pPr algn="ctr"/>
+                      <a:r>
+                        <a:rPr lang="ru-RU" sz="1000" b="0" i="0" dirty="0">
+                          <a:solidFill>
+                            <a:schemeClr val="tx1"/>
+                          </a:solidFill>
+                          <a:latin typeface="Arial"/>
+                        </a:rPr>
+                        <a:t>8 973</a:t>
+                      </a:r>
+                    </a:p>
+                  </a:txBody>
+                  <a:tcPr marL="36000" marR="36000" marT="18000" marB="18000" anchor="ctr">
+                    <a:lnL>
+                      <a:noFill/>
+                    </a:lnL>
+                    <a:lnR>
+                      <a:noFill/>
+                    </a:lnR>
+                    <a:lnT w="12700">
+                      <a:solidFill>
+                        <a:schemeClr val="bg1">
+                          <a:lumMod val="50000"/>
+                        </a:schemeClr>
+                      </a:solidFill>
+                      <a:prstDash val="solid"/>
+                    </a:lnT>
+                    <a:lnB w="12700">
+                      <a:solidFill>
+                        <a:schemeClr val="bg1">
+                          <a:lumMod val="50000"/>
+                        </a:schemeClr>
+                      </a:solidFill>
+                      <a:prstDash val="solid"/>
+                    </a:lnB>
+                    <a:noFill/>
+                  </a:tcPr>
+                </a:tc>
+                <a:tc>
+                  <a:txBody>
+                    <a:bodyPr/>
+                    <a:lstStyle/>
+                    <a:p>
+                      <a:pPr algn="ctr"/>
+                      <a:r>
+                        <a:rPr lang="ru-RU" sz="1000" b="0" i="0" dirty="0">
+                          <a:solidFill>
+                            <a:schemeClr val="tx1">
+                              <a:lumMod val="50000"/>
+                              <a:lumOff val="50000"/>
+                            </a:schemeClr>
+                          </a:solidFill>
+                          <a:latin typeface="Arial"/>
+                        </a:rPr>
+                        <a:t>+9,4%</a:t>
+                      </a:r>
+                    </a:p>
+                  </a:txBody>
+                  <a:tcPr marL="36000" marR="36000" marT="18000" marB="18000" anchor="ctr">
+                    <a:lnL>
+                      <a:noFill/>
+                    </a:lnL>
+                    <a:lnR>
+                      <a:noFill/>
+                    </a:lnR>
+                    <a:lnT w="12700">
+                      <a:solidFill>
+                        <a:schemeClr val="bg1">
+                          <a:lumMod val="50000"/>
+                        </a:schemeClr>
+                      </a:solidFill>
+                      <a:prstDash val="solid"/>
+                    </a:lnT>
+                    <a:lnB w="12700">
+                      <a:solidFill>
+                        <a:schemeClr val="bg1">
+                          <a:lumMod val="50000"/>
+                        </a:schemeClr>
+                      </a:solidFill>
+                      <a:prstDash val="solid"/>
+                    </a:lnB>
+                    <a:solidFill>
+                      <a:srgbClr val="C6EFCE"/>
+                    </a:solidFill>
+                  </a:tcPr>
+                </a:tc>
+                <a:tc>
+                  <a:txBody>
+                    <a:bodyPr/>
+                    <a:lstStyle/>
+                    <a:p>
+                      <a:pPr algn="l"/>
+                      <a:endParaRPr lang="ru-RU" sz="1000" dirty="0"/>
+                    </a:p>
+                  </a:txBody>
+                  <a:tcPr marL="72000" marR="36000" marT="18000" marB="18000" anchor="ctr">
+                    <a:lnL>
+                      <a:noFill/>
+                    </a:lnL>
+                    <a:lnR w="12700">
+                      <a:solidFill>
+                        <a:schemeClr val="bg1">
+                          <a:lumMod val="50000"/>
+                        </a:schemeClr>
+                      </a:solidFill>
+                      <a:prstDash val="solid"/>
+                    </a:lnR>
+                    <a:lnT w="12700">
+                      <a:solidFill>
+                        <a:schemeClr val="bg1">
+                          <a:lumMod val="50000"/>
+                        </a:schemeClr>
+                      </a:solidFill>
+                      <a:prstDash val="solid"/>
+                    </a:lnT>
+                    <a:lnB w="12700">
+                      <a:solidFill>
+                        <a:schemeClr val="bg1">
+                          <a:lumMod val="50000"/>
+                        </a:schemeClr>
+                      </a:solidFill>
+                      <a:prstDash val="solid"/>
+                    </a:lnB>
+                    <a:noFill/>
+                  </a:tcPr>
+                </a:tc>
+                <a:tc>
+                  <a:txBody>
+                    <a:bodyPr/>
+                    <a:lstStyle/>
+                    <a:p>
+                      <a:endParaRPr lang="ru-RU" sz="1000" dirty="0"/>
+                    </a:p>
+                  </a:txBody>
+                  <a:tcPr>
+                    <a:lnL w="12700">
+                      <a:solidFill>
+                        <a:schemeClr val="bg1">
+                          <a:lumMod val="50000"/>
+                        </a:schemeClr>
+                      </a:solidFill>
+                      <a:prstDash val="solid"/>
+                    </a:lnL>
+                    <a:lnR>
+                      <a:noFill/>
+                    </a:lnR>
+                    <a:lnT>
+                      <a:noFill/>
+                    </a:lnT>
+                    <a:lnB>
+                      <a:noFill/>
+                    </a:lnB>
+                    <a:noFill/>
+                  </a:tcPr>
+                </a:tc>
+                <a:tc>
+                  <a:txBody>
+                    <a:bodyPr/>
+                    <a:lstStyle/>
+                    <a:p>
+                      <a:pPr algn="ctr"/>
+                      <a:r>
+                        <a:rPr lang="ru-RU" sz="1000" b="0" i="0" dirty="0">
+                          <a:solidFill>
+                            <a:schemeClr val="tx1"/>
+                          </a:solidFill>
+                          <a:latin typeface="Arial"/>
+                        </a:rPr>
+                        <a:t>1 145</a:t>
+                      </a:r>
+                    </a:p>
+                  </a:txBody>
+                  <a:tcPr marL="36000" marR="36000" marT="18000" marB="18000" anchor="ctr">
+                    <a:lnL w="12700">
+                      <a:solidFill>
+                        <a:schemeClr val="bg1">
+                          <a:lumMod val="50000"/>
+                        </a:schemeClr>
+                      </a:solidFill>
+                      <a:prstDash val="solid"/>
+                    </a:lnL>
+                    <a:lnR>
+                      <a:noFill/>
+                    </a:lnR>
+                    <a:lnT w="12700">
+                      <a:solidFill>
+                        <a:schemeClr val="bg1">
+                          <a:lumMod val="50000"/>
+                        </a:schemeClr>
+                      </a:solidFill>
+                      <a:prstDash val="solid"/>
+                    </a:lnT>
+                    <a:lnB w="12700">
+                      <a:solidFill>
+                        <a:schemeClr val="bg1">
+                          <a:lumMod val="50000"/>
+                        </a:schemeClr>
+                      </a:solidFill>
+                      <a:prstDash val="solid"/>
+                    </a:lnB>
+                    <a:noFill/>
+                  </a:tcPr>
+                </a:tc>
+                <a:tc>
+                  <a:txBody>
+                    <a:bodyPr/>
+                    <a:lstStyle/>
+                    <a:p>
+                      <a:pPr algn="ctr"/>
+                      <a:r>
+                        <a:rPr lang="ru-RU" sz="1000" b="0" i="0" dirty="0">
+                          <a:solidFill>
+                            <a:schemeClr val="tx1"/>
+                          </a:solidFill>
+                          <a:latin typeface="Arial"/>
+                        </a:rPr>
+                        <a:t>1 975</a:t>
+                      </a:r>
+                    </a:p>
+                  </a:txBody>
+                  <a:tcPr marL="36000" marR="36000" marT="18000" marB="18000" anchor="ctr">
+                    <a:lnL>
+                      <a:noFill/>
+                    </a:lnL>
+                    <a:lnR>
+                      <a:noFill/>
+                    </a:lnR>
+                    <a:lnT w="12700">
+                      <a:solidFill>
+                        <a:schemeClr val="bg1">
+                          <a:lumMod val="50000"/>
+                        </a:schemeClr>
+                      </a:solidFill>
+                      <a:prstDash val="solid"/>
+                    </a:lnT>
+                    <a:lnB w="12700">
+                      <a:solidFill>
+                        <a:schemeClr val="bg1">
+                          <a:lumMod val="50000"/>
+                        </a:schemeClr>
+                      </a:solidFill>
+                      <a:prstDash val="solid"/>
+                    </a:lnB>
+                    <a:noFill/>
+                  </a:tcPr>
+                </a:tc>
+                <a:tc>
+                  <a:txBody>
+                    <a:bodyPr/>
+                    <a:lstStyle/>
+                    <a:p>
+                      <a:pPr algn="ctr"/>
+                      <a:r>
+                        <a:rPr lang="ru-RU" sz="1000" b="0" i="0" dirty="0">
+                          <a:solidFill>
+                            <a:schemeClr val="tx1"/>
+                          </a:solidFill>
+                          <a:latin typeface="Arial"/>
+                        </a:rPr>
+                        <a:t>2 074</a:t>
+                      </a:r>
+                    </a:p>
+                  </a:txBody>
+                  <a:tcPr marL="36000" marR="36000" marT="18000" marB="18000" anchor="ctr">
+                    <a:lnL>
+                      <a:noFill/>
+                    </a:lnL>
+                    <a:lnR>
+                      <a:noFill/>
+                    </a:lnR>
+                    <a:lnT w="12700">
+                      <a:solidFill>
+                        <a:schemeClr val="bg1">
+                          <a:lumMod val="50000"/>
+                        </a:schemeClr>
+                      </a:solidFill>
+                      <a:prstDash val="solid"/>
+                    </a:lnT>
+                    <a:lnB w="12700">
+                      <a:solidFill>
+                        <a:schemeClr val="bg1">
+                          <a:lumMod val="50000"/>
+                        </a:schemeClr>
+                      </a:solidFill>
+                      <a:prstDash val="solid"/>
+                    </a:lnB>
+                    <a:noFill/>
+                  </a:tcPr>
+                </a:tc>
+                <a:tc>
+                  <a:txBody>
+                    <a:bodyPr/>
+                    <a:lstStyle/>
+                    <a:p>
+                      <a:pPr algn="ctr"/>
+                      <a:r>
+                        <a:rPr lang="ru-RU" sz="1000" b="0" i="0" dirty="0">
+                          <a:solidFill>
+                            <a:schemeClr val="tx1"/>
+                          </a:solidFill>
+                          <a:latin typeface="Arial"/>
+                        </a:rPr>
+                        <a:t>4 620</a:t>
+                      </a:r>
+                    </a:p>
+                  </a:txBody>
+                  <a:tcPr marL="36000" marR="36000" marT="18000" marB="18000" anchor="ctr">
                     <a:lnL>
                       <a:noFill/>
                     </a:lnL>

--- a/AdTech_Budget_2027.pptx
+++ b/AdTech_Budget_2027.pptx
@@ -15192,61 +15192,6 @@
           <a:chExt cx="0" cy="0"/>
         </a:xfrm>
       </p:grpSpPr>
-      <p:graphicFrame>
-        <p:nvGraphicFramePr>
-          <p:cNvPr id="6" name="think-cell data - do not delete" hidden="1"/>
-          <p:cNvGraphicFramePr>
-            <a:graphicFrameLocks noChangeAspect="1"/>
-          </p:cNvGraphicFramePr>
-          <p:nvPr>
-            <p:custDataLst>
-              <p:tags r:id="rId1"/>
-            </p:custDataLst>
-          </p:nvPr>
-        </p:nvGraphicFramePr>
-        <p:xfrm>
-          <a:off x="364175" y="829165"/>
-          <a:ext cx="1588" cy="1588"/>
-        </p:xfrm>
-        <a:graphic>
-          <a:graphicData uri="http://schemas.openxmlformats.org/presentationml/2006/ole">
-            <mc:AlternateContent xmlns:mc="http://schemas.openxmlformats.org/markup-compatibility/2006">
-              <mc:Choice xmlns:v="urn:schemas-microsoft-com:vml" Requires="v">
-                <p:oleObj name="Слайд think-cell" r:id="rId4" imgW="425" imgH="424" progId="TCLayout.ActiveDocument.1">
-                  <p:embed/>
-                </p:oleObj>
-              </mc:Choice>
-              <mc:Fallback>
-                <p:oleObj name="Слайд think-cell" r:id="rId4" imgW="425" imgH="424" progId="TCLayout.ActiveDocument.1">
-                  <p:embed/>
-                  <p:pic>
-                    <p:nvPicPr>
-                      <p:cNvPr id="6" name="think-cell data - do not delete" hidden="1"/>
-                      <p:cNvPicPr/>
-                      <p:nvPr/>
-                    </p:nvPicPr>
-                    <p:blipFill>
-                      <a:blip r:embed="rId5"/>
-                      <a:stretch>
-                        <a:fillRect/>
-                      </a:stretch>
-                    </p:blipFill>
-                    <p:spPr>
-                      <a:xfrm>
-                        <a:off x="364175" y="829165"/>
-                        <a:ext cx="1588" cy="1588"/>
-                      </a:xfrm>
-                      <a:prstGeom prst="rect">
-                        <a:avLst/>
-                      </a:prstGeom>
-                    </p:spPr>
-                  </p:pic>
-                </p:oleObj>
-              </mc:Fallback>
-            </mc:AlternateContent>
-          </a:graphicData>
-        </a:graphic>
-      </p:graphicFrame>
       <p:sp>
         <p:nvSpPr>
           <p:cNvPr id="3" name="Текст 2"/>
@@ -24830,7 +24775,7 @@
     </p:spTree>
     <p:extLst>
       <p:ext uri="{BB962C8B-B14F-4D97-AF65-F5344CB8AC3E}">
-        <p14:creationId xmlns:p14="http://schemas.microsoft.com/office/powerpoint/2010/main" val="1650885464"/>
+        <p14:creationId xmlns:p14="http://schemas.microsoft.com/office/powerpoint/2010/main" val="1116321858"/>
       </p:ext>
     </p:extLst>
   </p:cSld>
@@ -24857,61 +24802,6 @@
           <a:chExt cx="0" cy="0"/>
         </a:xfrm>
       </p:grpSpPr>
-      <p:graphicFrame>
-        <p:nvGraphicFramePr>
-          <p:cNvPr id="6" name="think-cell data - do not delete" hidden="1"/>
-          <p:cNvGraphicFramePr>
-            <a:graphicFrameLocks noChangeAspect="1"/>
-          </p:cNvGraphicFramePr>
-          <p:nvPr>
-            <p:custDataLst>
-              <p:tags r:id="rId1"/>
-            </p:custDataLst>
-          </p:nvPr>
-        </p:nvGraphicFramePr>
-        <p:xfrm>
-          <a:off x="364175" y="829165"/>
-          <a:ext cx="1588" cy="1588"/>
-        </p:xfrm>
-        <a:graphic>
-          <a:graphicData uri="http://schemas.openxmlformats.org/presentationml/2006/ole">
-            <mc:AlternateContent xmlns:mc="http://schemas.openxmlformats.org/markup-compatibility/2006">
-              <mc:Choice xmlns:v="urn:schemas-microsoft-com:vml" Requires="v">
-                <p:oleObj name="Слайд think-cell" r:id="rId4" imgW="425" imgH="424" progId="TCLayout.ActiveDocument.1">
-                  <p:embed/>
-                </p:oleObj>
-              </mc:Choice>
-              <mc:Fallback>
-                <p:oleObj name="Слайд think-cell" r:id="rId4" imgW="425" imgH="424" progId="TCLayout.ActiveDocument.1">
-                  <p:embed/>
-                  <p:pic>
-                    <p:nvPicPr>
-                      <p:cNvPr id="6" name="think-cell data - do not delete" hidden="1"/>
-                      <p:cNvPicPr/>
-                      <p:nvPr/>
-                    </p:nvPicPr>
-                    <p:blipFill>
-                      <a:blip r:embed="rId5"/>
-                      <a:stretch>
-                        <a:fillRect/>
-                      </a:stretch>
-                    </p:blipFill>
-                    <p:spPr>
-                      <a:xfrm>
-                        <a:off x="364175" y="829165"/>
-                        <a:ext cx="1588" cy="1588"/>
-                      </a:xfrm>
-                      <a:prstGeom prst="rect">
-                        <a:avLst/>
-                      </a:prstGeom>
-                    </p:spPr>
-                  </p:pic>
-                </p:oleObj>
-              </mc:Fallback>
-            </mc:AlternateContent>
-          </a:graphicData>
-        </a:graphic>
-      </p:graphicFrame>
       <p:sp>
         <p:nvSpPr>
           <p:cNvPr id="3" name="Текст 2"/>
@@ -28715,7 +28605,7 @@
     </p:spTree>
     <p:extLst>
       <p:ext uri="{BB962C8B-B14F-4D97-AF65-F5344CB8AC3E}">
-        <p14:creationId xmlns:p14="http://schemas.microsoft.com/office/powerpoint/2010/main" val="1650885464"/>
+        <p14:creationId xmlns:p14="http://schemas.microsoft.com/office/powerpoint/2010/main" val="1014564736"/>
       </p:ext>
     </p:extLst>
   </p:cSld>
@@ -28742,61 +28632,6 @@
           <a:chExt cx="0" cy="0"/>
         </a:xfrm>
       </p:grpSpPr>
-      <p:graphicFrame>
-        <p:nvGraphicFramePr>
-          <p:cNvPr id="6" name="think-cell data - do not delete" hidden="1"/>
-          <p:cNvGraphicFramePr>
-            <a:graphicFrameLocks noChangeAspect="1"/>
-          </p:cNvGraphicFramePr>
-          <p:nvPr>
-            <p:custDataLst>
-              <p:tags r:id="rId1"/>
-            </p:custDataLst>
-          </p:nvPr>
-        </p:nvGraphicFramePr>
-        <p:xfrm>
-          <a:off x="364175" y="829165"/>
-          <a:ext cx="1588" cy="1588"/>
-        </p:xfrm>
-        <a:graphic>
-          <a:graphicData uri="http://schemas.openxmlformats.org/presentationml/2006/ole">
-            <mc:AlternateContent xmlns:mc="http://schemas.openxmlformats.org/markup-compatibility/2006">
-              <mc:Choice xmlns:v="urn:schemas-microsoft-com:vml" Requires="v">
-                <p:oleObj name="Слайд think-cell" r:id="rId4" imgW="425" imgH="424" progId="TCLayout.ActiveDocument.1">
-                  <p:embed/>
-                </p:oleObj>
-              </mc:Choice>
-              <mc:Fallback>
-                <p:oleObj name="Слайд think-cell" r:id="rId4" imgW="425" imgH="424" progId="TCLayout.ActiveDocument.1">
-                  <p:embed/>
-                  <p:pic>
-                    <p:nvPicPr>
-                      <p:cNvPr id="6" name="think-cell data - do not delete" hidden="1"/>
-                      <p:cNvPicPr/>
-                      <p:nvPr/>
-                    </p:nvPicPr>
-                    <p:blipFill>
-                      <a:blip r:embed="rId5"/>
-                      <a:stretch>
-                        <a:fillRect/>
-                      </a:stretch>
-                    </p:blipFill>
-                    <p:spPr>
-                      <a:xfrm>
-                        <a:off x="364175" y="829165"/>
-                        <a:ext cx="1588" cy="1588"/>
-                      </a:xfrm>
-                      <a:prstGeom prst="rect">
-                        <a:avLst/>
-                      </a:prstGeom>
-                    </p:spPr>
-                  </p:pic>
-                </p:oleObj>
-              </mc:Fallback>
-            </mc:AlternateContent>
-          </a:graphicData>
-        </a:graphic>
-      </p:graphicFrame>
       <p:sp>
         <p:nvSpPr>
           <p:cNvPr id="3" name="Текст 2"/>
@@ -39593,7 +39428,7 @@
     </p:spTree>
     <p:extLst>
       <p:ext uri="{BB962C8B-B14F-4D97-AF65-F5344CB8AC3E}">
-        <p14:creationId xmlns:p14="http://schemas.microsoft.com/office/powerpoint/2010/main" val="1650885464"/>
+        <p14:creationId xmlns:p14="http://schemas.microsoft.com/office/powerpoint/2010/main" val="1085449051"/>
       </p:ext>
     </p:extLst>
   </p:cSld>
@@ -39620,61 +39455,6 @@
           <a:chExt cx="0" cy="0"/>
         </a:xfrm>
       </p:grpSpPr>
-      <p:graphicFrame>
-        <p:nvGraphicFramePr>
-          <p:cNvPr id="6" name="think-cell data - do not delete" hidden="1"/>
-          <p:cNvGraphicFramePr>
-            <a:graphicFrameLocks noChangeAspect="1"/>
-          </p:cNvGraphicFramePr>
-          <p:nvPr>
-            <p:custDataLst>
-              <p:tags r:id="rId1"/>
-            </p:custDataLst>
-          </p:nvPr>
-        </p:nvGraphicFramePr>
-        <p:xfrm>
-          <a:off x="364175" y="829165"/>
-          <a:ext cx="1588" cy="1588"/>
-        </p:xfrm>
-        <a:graphic>
-          <a:graphicData uri="http://schemas.openxmlformats.org/presentationml/2006/ole">
-            <mc:AlternateContent xmlns:mc="http://schemas.openxmlformats.org/markup-compatibility/2006">
-              <mc:Choice xmlns:v="urn:schemas-microsoft-com:vml" Requires="v">
-                <p:oleObj name="Слайд think-cell" r:id="rId4" imgW="425" imgH="424" progId="TCLayout.ActiveDocument.1">
-                  <p:embed/>
-                </p:oleObj>
-              </mc:Choice>
-              <mc:Fallback>
-                <p:oleObj name="Слайд think-cell" r:id="rId4" imgW="425" imgH="424" progId="TCLayout.ActiveDocument.1">
-                  <p:embed/>
-                  <p:pic>
-                    <p:nvPicPr>
-                      <p:cNvPr id="6" name="think-cell data - do not delete" hidden="1"/>
-                      <p:cNvPicPr/>
-                      <p:nvPr/>
-                    </p:nvPicPr>
-                    <p:blipFill>
-                      <a:blip r:embed="rId5"/>
-                      <a:stretch>
-                        <a:fillRect/>
-                      </a:stretch>
-                    </p:blipFill>
-                    <p:spPr>
-                      <a:xfrm>
-                        <a:off x="364175" y="829165"/>
-                        <a:ext cx="1588" cy="1588"/>
-                      </a:xfrm>
-                      <a:prstGeom prst="rect">
-                        <a:avLst/>
-                      </a:prstGeom>
-                    </p:spPr>
-                  </p:pic>
-                </p:oleObj>
-              </mc:Fallback>
-            </mc:AlternateContent>
-          </a:graphicData>
-        </a:graphic>
-      </p:graphicFrame>
       <p:sp>
         <p:nvSpPr>
           <p:cNvPr id="3" name="Текст 2"/>
@@ -44000,7 +43780,7 @@
     </p:spTree>
     <p:extLst>
       <p:ext uri="{BB962C8B-B14F-4D97-AF65-F5344CB8AC3E}">
-        <p14:creationId xmlns:p14="http://schemas.microsoft.com/office/powerpoint/2010/main" val="1650885464"/>
+        <p14:creationId xmlns:p14="http://schemas.microsoft.com/office/powerpoint/2010/main" val="1498272094"/>
       </p:ext>
     </p:extLst>
   </p:cSld>
@@ -44027,61 +43807,6 @@
           <a:chExt cx="0" cy="0"/>
         </a:xfrm>
       </p:grpSpPr>
-      <p:graphicFrame>
-        <p:nvGraphicFramePr>
-          <p:cNvPr id="6" name="think-cell data - do not delete" hidden="1"/>
-          <p:cNvGraphicFramePr>
-            <a:graphicFrameLocks noChangeAspect="1"/>
-          </p:cNvGraphicFramePr>
-          <p:nvPr>
-            <p:custDataLst>
-              <p:tags r:id="rId1"/>
-            </p:custDataLst>
-          </p:nvPr>
-        </p:nvGraphicFramePr>
-        <p:xfrm>
-          <a:off x="364175" y="829165"/>
-          <a:ext cx="1588" cy="1588"/>
-        </p:xfrm>
-        <a:graphic>
-          <a:graphicData uri="http://schemas.openxmlformats.org/presentationml/2006/ole">
-            <mc:AlternateContent xmlns:mc="http://schemas.openxmlformats.org/markup-compatibility/2006">
-              <mc:Choice xmlns:v="urn:schemas-microsoft-com:vml" Requires="v">
-                <p:oleObj name="Слайд think-cell" r:id="rId4" imgW="425" imgH="424" progId="TCLayout.ActiveDocument.1">
-                  <p:embed/>
-                </p:oleObj>
-              </mc:Choice>
-              <mc:Fallback>
-                <p:oleObj name="Слайд think-cell" r:id="rId4" imgW="425" imgH="424" progId="TCLayout.ActiveDocument.1">
-                  <p:embed/>
-                  <p:pic>
-                    <p:nvPicPr>
-                      <p:cNvPr id="6" name="think-cell data - do not delete" hidden="1"/>
-                      <p:cNvPicPr/>
-                      <p:nvPr/>
-                    </p:nvPicPr>
-                    <p:blipFill>
-                      <a:blip r:embed="rId5"/>
-                      <a:stretch>
-                        <a:fillRect/>
-                      </a:stretch>
-                    </p:blipFill>
-                    <p:spPr>
-                      <a:xfrm>
-                        <a:off x="364175" y="829165"/>
-                        <a:ext cx="1588" cy="1588"/>
-                      </a:xfrm>
-                      <a:prstGeom prst="rect">
-                        <a:avLst/>
-                      </a:prstGeom>
-                    </p:spPr>
-                  </p:pic>
-                </p:oleObj>
-              </mc:Fallback>
-            </mc:AlternateContent>
-          </a:graphicData>
-        </a:graphic>
-      </p:graphicFrame>
       <p:sp>
         <p:nvSpPr>
           <p:cNvPr id="3" name="Текст 2"/>
@@ -53663,7 +53388,7 @@
     </p:spTree>
     <p:extLst>
       <p:ext uri="{BB962C8B-B14F-4D97-AF65-F5344CB8AC3E}">
-        <p14:creationId xmlns:p14="http://schemas.microsoft.com/office/powerpoint/2010/main" val="1650885464"/>
+        <p14:creationId xmlns:p14="http://schemas.microsoft.com/office/powerpoint/2010/main" val="1995405996"/>
       </p:ext>
     </p:extLst>
   </p:cSld>
@@ -53694,12 +53419,6 @@
 <file path=ppt/tags/tag4.xml><?xml version="1.0" encoding="utf-8"?>
 <p:tagLst xmlns:a="http://schemas.openxmlformats.org/drawingml/2006/main" xmlns:r="http://schemas.openxmlformats.org/officeDocument/2006/relationships" xmlns:p="http://schemas.openxmlformats.org/presentationml/2006/main">
   <p:tag name="THINKCELLSHAPEDONOTDELETE" val="tQsaBMu5Y9A2PtCcQK8SQlQ"/>
-</p:tagLst>
-</file>
-
-<file path=ppt/tags/tag5.xml><?xml version="1.0" encoding="utf-8"?>
-<p:tagLst xmlns:a="http://schemas.openxmlformats.org/drawingml/2006/main" xmlns:r="http://schemas.openxmlformats.org/officeDocument/2006/relationships" xmlns:p="http://schemas.openxmlformats.org/presentationml/2006/main">
-  <p:tag name="THINKCELLSHAPEDONOTDELETE" val="thinkcellActiveDocDoNotDelete"/>
 </p:tagLst>
 </file>
 
